--- a/chapter 19.pptx
+++ b/chapter 19.pptx
@@ -5,35 +5,36 @@
     <p:sldMasterId id="2147483648" r:id="rId1"/>
   </p:sldMasterIdLst>
   <p:notesMasterIdLst>
-    <p:notesMasterId r:id="rId25"/>
+    <p:notesMasterId r:id="rId26"/>
   </p:notesMasterIdLst>
   <p:handoutMasterIdLst>
-    <p:handoutMasterId r:id="rId26"/>
+    <p:handoutMasterId r:id="rId27"/>
   </p:handoutMasterIdLst>
   <p:sldIdLst>
     <p:sldId id="259" r:id="rId2"/>
     <p:sldId id="265" r:id="rId3"/>
     <p:sldId id="264" r:id="rId4"/>
-    <p:sldId id="266" r:id="rId5"/>
-    <p:sldId id="267" r:id="rId6"/>
-    <p:sldId id="268" r:id="rId7"/>
-    <p:sldId id="269" r:id="rId8"/>
-    <p:sldId id="291" r:id="rId9"/>
-    <p:sldId id="272" r:id="rId10"/>
-    <p:sldId id="273" r:id="rId11"/>
-    <p:sldId id="292" r:id="rId12"/>
-    <p:sldId id="293" r:id="rId13"/>
-    <p:sldId id="296" r:id="rId14"/>
-    <p:sldId id="297" r:id="rId15"/>
-    <p:sldId id="298" r:id="rId16"/>
-    <p:sldId id="295" r:id="rId17"/>
-    <p:sldId id="299" r:id="rId18"/>
-    <p:sldId id="300" r:id="rId19"/>
-    <p:sldId id="301" r:id="rId20"/>
-    <p:sldId id="302" r:id="rId21"/>
-    <p:sldId id="304" r:id="rId22"/>
-    <p:sldId id="306" r:id="rId23"/>
-    <p:sldId id="307" r:id="rId24"/>
+    <p:sldId id="308" r:id="rId5"/>
+    <p:sldId id="266" r:id="rId6"/>
+    <p:sldId id="267" r:id="rId7"/>
+    <p:sldId id="268" r:id="rId8"/>
+    <p:sldId id="269" r:id="rId9"/>
+    <p:sldId id="291" r:id="rId10"/>
+    <p:sldId id="272" r:id="rId11"/>
+    <p:sldId id="273" r:id="rId12"/>
+    <p:sldId id="292" r:id="rId13"/>
+    <p:sldId id="293" r:id="rId14"/>
+    <p:sldId id="296" r:id="rId15"/>
+    <p:sldId id="297" r:id="rId16"/>
+    <p:sldId id="298" r:id="rId17"/>
+    <p:sldId id="295" r:id="rId18"/>
+    <p:sldId id="299" r:id="rId19"/>
+    <p:sldId id="300" r:id="rId20"/>
+    <p:sldId id="301" r:id="rId21"/>
+    <p:sldId id="302" r:id="rId22"/>
+    <p:sldId id="304" r:id="rId23"/>
+    <p:sldId id="306" r:id="rId24"/>
+    <p:sldId id="307" r:id="rId25"/>
   </p:sldIdLst>
   <p:sldSz cx="12192000" cy="6858000"/>
   <p:notesSz cx="6858000" cy="9144000"/>
@@ -248,7 +249,7 @@
           <a:p>
             <a:fld id="{13928E3B-7122-43E6-B3BB-09448C56C96C}" type="datetimeFigureOut">
               <a:rPr lang="en-US" smtClean="0"/>
-              <a:t>25/05/13</a:t>
+              <a:t>25/06/14</a:t>
             </a:fld>
             <a:endParaRPr lang="en-US" dirty="0"/>
           </a:p>
@@ -426,7 +427,7 @@
           <a:p>
             <a:fld id="{B98C9CAF-43DF-44BF-8016-DC193E4E594B}" type="datetimeFigureOut">
               <a:rPr lang="en-US" smtClean="0"/>
-              <a:t>25/05/13</a:t>
+              <a:t>25/06/14</a:t>
             </a:fld>
             <a:endParaRPr lang="en-US" dirty="0"/>
           </a:p>
@@ -1421,6 +1422,240 @@
 
 <file path=ppt/slideLayouts/slideLayout3.xml><?xml version="1.0" encoding="utf-8"?>
 <p:sldLayout xmlns:a="http://schemas.openxmlformats.org/drawingml/2006/main" xmlns:r="http://schemas.openxmlformats.org/officeDocument/2006/relationships" xmlns:p="http://schemas.openxmlformats.org/presentationml/2006/main" preserve="1" userDrawn="1">
+  <p:cSld name="نقل قول">
+    <p:spTree>
+      <p:nvGrpSpPr>
+        <p:cNvPr id="1" name=""/>
+        <p:cNvGrpSpPr/>
+        <p:nvPr/>
+      </p:nvGrpSpPr>
+      <p:grpSpPr>
+        <a:xfrm>
+          <a:off x="0" y="0"/>
+          <a:ext cx="0" cy="0"/>
+          <a:chOff x="0" y="0"/>
+          <a:chExt cx="0" cy="0"/>
+        </a:xfrm>
+      </p:grpSpPr>
+      <p:sp>
+        <p:nvSpPr>
+          <p:cNvPr id="4" name="Slide Number Placeholder 3">
+            <a:extLst>
+              <a:ext uri="{FF2B5EF4-FFF2-40B4-BE49-F238E27FC236}">
+                <a16:creationId xmlns:a16="http://schemas.microsoft.com/office/drawing/2014/main" id="{B3D763EB-F58C-2FDA-883E-D34AC3F89BD8}"/>
+              </a:ext>
+            </a:extLst>
+          </p:cNvPr>
+          <p:cNvSpPr>
+            <a:spLocks noGrp="1"/>
+          </p:cNvSpPr>
+          <p:nvPr>
+            <p:ph type="sldNum" sz="quarter" idx="10"/>
+          </p:nvPr>
+        </p:nvSpPr>
+        <p:spPr/>
+        <p:txBody>
+          <a:bodyPr/>
+          <a:lstStyle/>
+          <a:p>
+            <a:fld id="{AE311D09-C3D9-45E8-99CE-78E12234EEAD}" type="slidenum">
+              <a:rPr lang="en-US" smtClean="0"/>
+              <a:pPr/>
+              <a:t>‹#›</a:t>
+            </a:fld>
+            <a:endParaRPr lang="en-US" dirty="0"/>
+          </a:p>
+        </p:txBody>
+      </p:sp>
+      <p:sp>
+        <p:nvSpPr>
+          <p:cNvPr id="6" name="TextBox 5">
+            <a:extLst>
+              <a:ext uri="{FF2B5EF4-FFF2-40B4-BE49-F238E27FC236}">
+                <a16:creationId xmlns:a16="http://schemas.microsoft.com/office/drawing/2014/main" id="{E9BD9CD7-C12F-5578-3913-F6206D50C27B}"/>
+              </a:ext>
+            </a:extLst>
+          </p:cNvPr>
+          <p:cNvSpPr txBox="1"/>
+          <p:nvPr userDrawn="1"/>
+        </p:nvSpPr>
+        <p:spPr>
+          <a:xfrm>
+            <a:off x="1859302" y="1303253"/>
+            <a:ext cx="1168061" cy="1107996"/>
+          </a:xfrm>
+          <a:prstGeom prst="rect">
+            <a:avLst/>
+          </a:prstGeom>
+          <a:noFill/>
+        </p:spPr>
+        <p:txBody>
+          <a:bodyPr wrap="square" rtlCol="0" anchor="ctr">
+            <a:spAutoFit/>
+          </a:bodyPr>
+          <a:lstStyle/>
+          <a:p>
+            <a:pPr marL="0" indent="0" algn="ctr">
+              <a:buFont typeface="Arial" panose="020B0604020202020204" pitchFamily="34" charset="0"/>
+              <a:buNone/>
+            </a:pPr>
+            <a:r>
+              <a:rPr lang="en-US" sz="6600" b="1" dirty="0">
+                <a:latin typeface="+mj-lt"/>
+              </a:rPr>
+              <a:t>“</a:t>
+            </a:r>
+          </a:p>
+        </p:txBody>
+      </p:sp>
+      <p:sp>
+        <p:nvSpPr>
+          <p:cNvPr id="8" name="TextBox 7">
+            <a:extLst>
+              <a:ext uri="{FF2B5EF4-FFF2-40B4-BE49-F238E27FC236}">
+                <a16:creationId xmlns:a16="http://schemas.microsoft.com/office/drawing/2014/main" id="{E62C21CC-5ED0-E64B-EAB7-020E97E35EDD}"/>
+              </a:ext>
+            </a:extLst>
+          </p:cNvPr>
+          <p:cNvSpPr txBox="1"/>
+          <p:nvPr userDrawn="1"/>
+        </p:nvSpPr>
+        <p:spPr>
+          <a:xfrm>
+            <a:off x="9205913" y="3698406"/>
+            <a:ext cx="1168061" cy="1107996"/>
+          </a:xfrm>
+          <a:prstGeom prst="rect">
+            <a:avLst/>
+          </a:prstGeom>
+          <a:noFill/>
+        </p:spPr>
+        <p:txBody>
+          <a:bodyPr wrap="square" rtlCol="0" anchor="ctr">
+            <a:spAutoFit/>
+          </a:bodyPr>
+          <a:lstStyle/>
+          <a:p>
+            <a:pPr marL="0" indent="0" algn="ctr">
+              <a:buFont typeface="Arial" panose="020B0604020202020204" pitchFamily="34" charset="0"/>
+              <a:buNone/>
+            </a:pPr>
+            <a:r>
+              <a:rPr lang="en-US" sz="6600" b="1" dirty="0">
+                <a:latin typeface="+mj-lt"/>
+              </a:rPr>
+              <a:t>”</a:t>
+            </a:r>
+          </a:p>
+        </p:txBody>
+      </p:sp>
+      <p:sp>
+        <p:nvSpPr>
+          <p:cNvPr id="10" name="Text Placeholder 9">
+            <a:extLst>
+              <a:ext uri="{FF2B5EF4-FFF2-40B4-BE49-F238E27FC236}">
+                <a16:creationId xmlns:a16="http://schemas.microsoft.com/office/drawing/2014/main" id="{3CC271C3-2751-4DDA-C95D-61E65E2C4072}"/>
+              </a:ext>
+            </a:extLst>
+          </p:cNvPr>
+          <p:cNvSpPr>
+            <a:spLocks noGrp="1"/>
+          </p:cNvSpPr>
+          <p:nvPr>
+            <p:ph type="body" sz="quarter" idx="11"/>
+          </p:nvPr>
+        </p:nvSpPr>
+        <p:spPr>
+          <a:xfrm>
+            <a:off x="3027363" y="1627188"/>
+            <a:ext cx="6178550" cy="2625216"/>
+          </a:xfrm>
+          <a:prstGeom prst="rect">
+            <a:avLst/>
+          </a:prstGeom>
+        </p:spPr>
+        <p:txBody>
+          <a:bodyPr anchor="ctr"/>
+          <a:lstStyle>
+            <a:lvl1pPr marL="0" indent="0" algn="ctr">
+              <a:buNone/>
+              <a:defRPr sz="3200" b="0" i="1">
+                <a:solidFill>
+                  <a:schemeClr val="bg2">
+                    <a:lumMod val="25000"/>
+                  </a:schemeClr>
+                </a:solidFill>
+                <a:latin typeface="+mj-lt"/>
+              </a:defRPr>
+            </a:lvl1pPr>
+          </a:lstStyle>
+          <a:p>
+            <a:pPr lvl="0"/>
+            <a:endParaRPr lang="en-US" dirty="0"/>
+          </a:p>
+        </p:txBody>
+      </p:sp>
+      <p:sp>
+        <p:nvSpPr>
+          <p:cNvPr id="12" name="Text Placeholder 11">
+            <a:extLst>
+              <a:ext uri="{FF2B5EF4-FFF2-40B4-BE49-F238E27FC236}">
+                <a16:creationId xmlns:a16="http://schemas.microsoft.com/office/drawing/2014/main" id="{0F6E1FB4-261B-CA90-BDD6-924DC2566383}"/>
+              </a:ext>
+            </a:extLst>
+          </p:cNvPr>
+          <p:cNvSpPr>
+            <a:spLocks noGrp="1"/>
+          </p:cNvSpPr>
+          <p:nvPr>
+            <p:ph type="body" sz="quarter" idx="12"/>
+          </p:nvPr>
+        </p:nvSpPr>
+        <p:spPr>
+          <a:xfrm>
+            <a:off x="3027364" y="5229225"/>
+            <a:ext cx="6178550" cy="711200"/>
+          </a:xfrm>
+          <a:prstGeom prst="rect">
+            <a:avLst/>
+          </a:prstGeom>
+        </p:spPr>
+        <p:txBody>
+          <a:bodyPr anchor="ctr"/>
+          <a:lstStyle>
+            <a:lvl1pPr marL="0" indent="0" algn="ctr">
+              <a:buNone/>
+              <a:defRPr sz="1600">
+                <a:solidFill>
+                  <a:schemeClr val="bg2">
+                    <a:lumMod val="50000"/>
+                  </a:schemeClr>
+                </a:solidFill>
+                <a:latin typeface="+mj-lt"/>
+              </a:defRPr>
+            </a:lvl1pPr>
+          </a:lstStyle>
+          <a:p>
+            <a:pPr lvl="0"/>
+            <a:endParaRPr lang="en-US" dirty="0"/>
+          </a:p>
+        </p:txBody>
+      </p:sp>
+    </p:spTree>
+    <p:extLst>
+      <p:ext uri="{BB962C8B-B14F-4D97-AF65-F5344CB8AC3E}">
+        <p14:creationId xmlns:p14="http://schemas.microsoft.com/office/powerpoint/2010/main" val="698708588"/>
+      </p:ext>
+    </p:extLst>
+  </p:cSld>
+  <p:clrMapOvr>
+    <a:masterClrMapping/>
+  </p:clrMapOvr>
+</p:sldLayout>
+</file>
+
+<file path=ppt/slideLayouts/slideLayout4.xml><?xml version="1.0" encoding="utf-8"?>
+<p:sldLayout xmlns:a="http://schemas.openxmlformats.org/drawingml/2006/main" xmlns:r="http://schemas.openxmlformats.org/officeDocument/2006/relationships" xmlns:p="http://schemas.openxmlformats.org/presentationml/2006/main" preserve="1" userDrawn="1">
   <p:cSld name="توضیحات">
     <p:spTree>
       <p:nvGrpSpPr>
@@ -1770,7 +2005,7 @@
 </p:sldLayout>
 </file>
 
-<file path=ppt/slideLayouts/slideLayout4.xml><?xml version="1.0" encoding="utf-8"?>
+<file path=ppt/slideLayouts/slideLayout5.xml><?xml version="1.0" encoding="utf-8"?>
 <p:sldLayout xmlns:a="http://schemas.openxmlformats.org/drawingml/2006/main" xmlns:r="http://schemas.openxmlformats.org/officeDocument/2006/relationships" xmlns:p="http://schemas.openxmlformats.org/presentationml/2006/main" preserve="1" userDrawn="1">
   <p:cSld name="عنوان بخش‌ها">
     <p:spTree>
@@ -1975,7 +2210,7 @@
 </p:sldLayout>
 </file>
 
-<file path=ppt/slideLayouts/slideLayout5.xml><?xml version="1.0" encoding="utf-8"?>
+<file path=ppt/slideLayouts/slideLayout6.xml><?xml version="1.0" encoding="utf-8"?>
 <p:sldLayout xmlns:a="http://schemas.openxmlformats.org/drawingml/2006/main" xmlns:r="http://schemas.openxmlformats.org/officeDocument/2006/relationships" xmlns:p="http://schemas.openxmlformats.org/presentationml/2006/main" preserve="1" userDrawn="1">
   <p:cSld name="عکس و توضیحات">
     <p:spTree>
@@ -2440,7 +2675,7 @@
 </p:sldLayout>
 </file>
 
-<file path=ppt/slideLayouts/slideLayout6.xml><?xml version="1.0" encoding="utf-8"?>
+<file path=ppt/slideLayouts/slideLayout7.xml><?xml version="1.0" encoding="utf-8"?>
 <p:sldLayout xmlns:a="http://schemas.openxmlformats.org/drawingml/2006/main" xmlns:r="http://schemas.openxmlformats.org/officeDocument/2006/relationships" xmlns:p="http://schemas.openxmlformats.org/presentationml/2006/main" preserve="1" userDrawn="1">
   <p:cSld name="عکس">
     <p:spTree>
@@ -2725,7 +2960,7 @@
           <p:nvPr userDrawn="1"/>
         </p:nvPicPr>
         <p:blipFill>
-          <a:blip r:embed="rId8">
+          <a:blip r:embed="rId9">
             <a:extLst>
               <a:ext uri="{28A0092B-C50C-407E-A947-70E740481C1C}">
                 <a14:useLocalDpi xmlns:a14="http://schemas.microsoft.com/office/drawing/2010/main" val="0"/>
@@ -2757,10 +2992,11 @@
   <p:sldLayoutIdLst>
     <p:sldLayoutId id="2147483649" r:id="rId1"/>
     <p:sldLayoutId id="2147483654" r:id="rId2"/>
-    <p:sldLayoutId id="2147483650" r:id="rId3"/>
-    <p:sldLayoutId id="2147483651" r:id="rId4"/>
-    <p:sldLayoutId id="2147483652" r:id="rId5"/>
-    <p:sldLayoutId id="2147483653" r:id="rId6"/>
+    <p:sldLayoutId id="2147483655" r:id="rId3"/>
+    <p:sldLayoutId id="2147483650" r:id="rId4"/>
+    <p:sldLayoutId id="2147483651" r:id="rId5"/>
+    <p:sldLayoutId id="2147483652" r:id="rId6"/>
+    <p:sldLayoutId id="2147483653" r:id="rId7"/>
   </p:sldLayoutIdLst>
   <p:hf hdr="0" ftr="0" dt="0"/>
   <p:txStyles>
@@ -3095,10 +3331,10 @@
       </p:grpSpPr>
       <p:sp>
         <p:nvSpPr>
-          <p:cNvPr id="2" name="Content Placeholder 1">
-            <a:extLst>
-              <a:ext uri="{FF2B5EF4-FFF2-40B4-BE49-F238E27FC236}">
-                <a16:creationId xmlns:a16="http://schemas.microsoft.com/office/drawing/2014/main" id="{48E9B0B3-6B8D-3756-5827-8DC22A41F15E}"/>
+          <p:cNvPr id="7" name="Content Placeholder 6">
+            <a:extLst>
+              <a:ext uri="{FF2B5EF4-FFF2-40B4-BE49-F238E27FC236}">
+                <a16:creationId xmlns:a16="http://schemas.microsoft.com/office/drawing/2014/main" id="{B7D3045C-6E27-B893-D935-62D8387F3A49}"/>
               </a:ext>
             </a:extLst>
           </p:cNvPr>
@@ -3116,45 +3352,48 @@
           <a:p>
             <a:r>
               <a:rPr lang="en-US" dirty="0"/>
-              <a:t>Say your project won’t have the QAs nailed down by the time you need to start your design work. </a:t>
-            </a:r>
-          </a:p>
-          <a:p>
-            <a:r>
-              <a:rPr lang="en-US" dirty="0"/>
-              <a:t>What do you do?</a:t>
-            </a:r>
-          </a:p>
-          <a:p>
-            <a:r>
-              <a:rPr lang="en-US" dirty="0"/>
-              <a:t>Stakeholders often have </a:t>
-            </a:r>
-            <a:r>
-              <a:rPr lang="en-US" i="1" dirty="0"/>
-              <a:t>no idea </a:t>
-            </a:r>
-            <a:r>
-              <a:rPr lang="en-US" dirty="0"/>
-              <a:t>what QAs they want in a system.</a:t>
-            </a:r>
-          </a:p>
-          <a:p>
-            <a:r>
-              <a:rPr lang="en-US" dirty="0"/>
-              <a:t>Experienced architects know what quality goals are realistic based on past projects.</a:t>
-            </a:r>
-          </a:p>
-          <a:p>
-            <a:r>
-              <a:rPr lang="en-US" dirty="0"/>
-              <a:t>Architects help stakeholders understand tradeoffs—like cost versus quality—and may even suggest better options than stakeholders expected.</a:t>
-            </a:r>
-          </a:p>
-          <a:p>
-            <a:r>
-              <a:rPr lang="en-US" dirty="0"/>
-              <a:t>Interviewing the relevant stakeholders is the surest way to learn what they know and need.</a:t>
+              <a:t>The architect should perform a bit of investigation to extract ASRs from Requirements Document.</a:t>
+            </a:r>
+          </a:p>
+          <a:p>
+            <a:r>
+              <a:rPr lang="en-US" dirty="0"/>
+              <a:t>Look for information like:</a:t>
+            </a:r>
+          </a:p>
+          <a:p>
+            <a:pPr lvl="1"/>
+            <a:r>
+              <a:rPr lang="en-US" dirty="0"/>
+              <a:t>Plans for teaming, skill sets, team coordination. </a:t>
+            </a:r>
+          </a:p>
+          <a:p>
+            <a:pPr lvl="1"/>
+            <a:r>
+              <a:rPr lang="en-US" dirty="0"/>
+              <a:t>Network properties and configurations.</a:t>
+            </a:r>
+          </a:p>
+          <a:p>
+            <a:pPr lvl="1"/>
+            <a:r>
+              <a:rPr lang="en-US" dirty="0"/>
+              <a:t>User roles, permissions, authentication.</a:t>
+            </a:r>
+          </a:p>
+          <a:p>
+            <a:pPr lvl="1"/>
+            <a:r>
+              <a:rPr lang="en-US" dirty="0"/>
+              <a:t>Hardware choices</a:t>
+            </a:r>
+          </a:p>
+          <a:p>
+            <a:pPr lvl="1"/>
+            <a:r>
+              <a:rPr lang="en-US" dirty="0"/>
+              <a:t>Data persistence requirements</a:t>
             </a:r>
           </a:p>
         </p:txBody>
@@ -3164,7 +3403,7 @@
           <p:cNvPr id="3" name="Title 2">
             <a:extLst>
               <a:ext uri="{FF2B5EF4-FFF2-40B4-BE49-F238E27FC236}">
-                <a16:creationId xmlns:a16="http://schemas.microsoft.com/office/drawing/2014/main" id="{297B5A56-DD56-38A0-E649-94735610F8AE}"/>
+                <a16:creationId xmlns:a16="http://schemas.microsoft.com/office/drawing/2014/main" id="{2C5E397B-265B-86B2-0A56-2E84C143D0EA}"/>
               </a:ext>
             </a:extLst>
           </p:cNvPr>
@@ -3175,14 +3414,19 @@
             <p:ph type="title"/>
           </p:nvPr>
         </p:nvSpPr>
-        <p:spPr/>
+        <p:spPr>
+          <a:xfrm>
+            <a:off x="878889" y="153671"/>
+            <a:ext cx="10436810" cy="641281"/>
+          </a:xfrm>
+        </p:spPr>
         <p:txBody>
           <a:bodyPr/>
           <a:lstStyle/>
           <a:p>
             <a:r>
               <a:rPr lang="en-US" dirty="0"/>
-              <a:t>19.2 ASRs from Interviewing Stakeholders</a:t>
+              <a:t>Sniffing Out ASRs</a:t>
             </a:r>
           </a:p>
         </p:txBody>
@@ -3192,7 +3436,7 @@
           <p:cNvPr id="4" name="Slide Number Placeholder 3">
             <a:extLst>
               <a:ext uri="{FF2B5EF4-FFF2-40B4-BE49-F238E27FC236}">
-                <a16:creationId xmlns:a16="http://schemas.microsoft.com/office/drawing/2014/main" id="{49E357F3-38ED-7CE9-E2C0-82820F3C54E1}"/>
+                <a16:creationId xmlns:a16="http://schemas.microsoft.com/office/drawing/2014/main" id="{95B0966A-4AD1-5751-80F8-60A9BEEA2D10}"/>
               </a:ext>
             </a:extLst>
           </p:cNvPr>
@@ -3203,7 +3447,12 @@
             <p:ph type="sldNum" sz="quarter" idx="10"/>
           </p:nvPr>
         </p:nvSpPr>
-        <p:spPr/>
+        <p:spPr>
+          <a:xfrm>
+            <a:off x="556149" y="153671"/>
+            <a:ext cx="670079" cy="641281"/>
+          </a:xfrm>
+        </p:spPr>
         <p:txBody>
           <a:bodyPr/>
           <a:lstStyle/>
@@ -3220,7 +3469,7 @@
     </p:spTree>
     <p:extLst>
       <p:ext uri="{BB962C8B-B14F-4D97-AF65-F5344CB8AC3E}">
-        <p14:creationId xmlns:p14="http://schemas.microsoft.com/office/powerpoint/2010/main" val="1692142678"/>
+        <p14:creationId xmlns:p14="http://schemas.microsoft.com/office/powerpoint/2010/main" val="1275786396"/>
       </p:ext>
     </p:extLst>
   </p:cSld>
@@ -3252,7 +3501,7 @@
           <p:cNvPr id="2" name="Content Placeholder 1">
             <a:extLst>
               <a:ext uri="{FF2B5EF4-FFF2-40B4-BE49-F238E27FC236}">
-                <a16:creationId xmlns:a16="http://schemas.microsoft.com/office/drawing/2014/main" id="{7AD72FFE-EA9B-D03D-458D-57F50401660C}"/>
+                <a16:creationId xmlns:a16="http://schemas.microsoft.com/office/drawing/2014/main" id="{48E9B0B3-6B8D-3756-5827-8DC22A41F15E}"/>
               </a:ext>
             </a:extLst>
           </p:cNvPr>
@@ -3270,56 +3519,45 @@
           <a:p>
             <a:r>
               <a:rPr lang="en-US" dirty="0"/>
-              <a:t>Business goals are the reason systems are built.</a:t>
-            </a:r>
-          </a:p>
-          <a:p>
-            <a:r>
-              <a:rPr lang="en-US" dirty="0"/>
-              <a:t>Business goals are of interest to architects because they frequently lead directly to ASRs.</a:t>
-            </a:r>
-          </a:p>
-          <a:p>
-            <a:r>
-              <a:rPr lang="en-US" dirty="0"/>
-              <a:t>There are three possible relationships between business goals and an architecture:</a:t>
-            </a:r>
-          </a:p>
-          <a:p>
-            <a:pPr marL="228600" indent="-457200">
-              <a:buFont typeface="+mj-lt"/>
-              <a:buAutoNum type="arabicPeriod"/>
-            </a:pPr>
-            <a:r>
-              <a:rPr lang="en-US" dirty="0"/>
-              <a:t>Business goals often lead to quality attribute requirements.</a:t>
-            </a:r>
-          </a:p>
-          <a:p>
-            <a:pPr marL="228600" indent="-457200">
-              <a:buFont typeface="+mj-lt"/>
-              <a:buAutoNum type="arabicPeriod"/>
-            </a:pPr>
-            <a:r>
-              <a:rPr lang="en-US" dirty="0"/>
-              <a:t>Business goals may affect the architecture without inducing a quality attribute requirement at all.</a:t>
-            </a:r>
-          </a:p>
-          <a:p>
-            <a:pPr lvl="1"/>
-            <a:r>
-              <a:rPr lang="en-US" dirty="0"/>
-              <a:t>For example, the manager wants to include a database, because the organization had a database unit employing a number of highly paid technical staff who were currently unassigned.</a:t>
-            </a:r>
-          </a:p>
-          <a:p>
-            <a:pPr marL="228600" indent="-457200">
-              <a:buFont typeface="+mj-lt"/>
-              <a:buAutoNum type="arabicPeriod"/>
-            </a:pPr>
-            <a:r>
-              <a:rPr lang="en-US" dirty="0"/>
-              <a:t>Not all business goals lead to quality attributes.</a:t>
+              <a:t>Say your project won’t have the QAs nailed down by the time you need to start your design work. </a:t>
+            </a:r>
+          </a:p>
+          <a:p>
+            <a:r>
+              <a:rPr lang="en-US" dirty="0"/>
+              <a:t>What do you do?</a:t>
+            </a:r>
+          </a:p>
+          <a:p>
+            <a:r>
+              <a:rPr lang="en-US" dirty="0"/>
+              <a:t>Stakeholders often have </a:t>
+            </a:r>
+            <a:r>
+              <a:rPr lang="en-US" i="1" dirty="0"/>
+              <a:t>no idea </a:t>
+            </a:r>
+            <a:r>
+              <a:rPr lang="en-US" dirty="0"/>
+              <a:t>what QAs they want in a system.</a:t>
+            </a:r>
+          </a:p>
+          <a:p>
+            <a:r>
+              <a:rPr lang="en-US" dirty="0"/>
+              <a:t>Experienced architects know what quality goals are realistic based on past projects.</a:t>
+            </a:r>
+          </a:p>
+          <a:p>
+            <a:r>
+              <a:rPr lang="en-US" dirty="0"/>
+              <a:t>Architects help stakeholders understand tradeoffs—like cost versus quality—and may even suggest better options than stakeholders expected.</a:t>
+            </a:r>
+          </a:p>
+          <a:p>
+            <a:r>
+              <a:rPr lang="en-US" dirty="0"/>
+              <a:t>Interviewing the relevant stakeholders is the surest way to learn what they know and need.</a:t>
             </a:r>
           </a:p>
         </p:txBody>
@@ -3329,7 +3567,7 @@
           <p:cNvPr id="3" name="Title 2">
             <a:extLst>
               <a:ext uri="{FF2B5EF4-FFF2-40B4-BE49-F238E27FC236}">
-                <a16:creationId xmlns:a16="http://schemas.microsoft.com/office/drawing/2014/main" id="{D60CF6AE-892C-7270-392B-0406163179AA}"/>
+                <a16:creationId xmlns:a16="http://schemas.microsoft.com/office/drawing/2014/main" id="{297B5A56-DD56-38A0-E649-94735610F8AE}"/>
               </a:ext>
             </a:extLst>
           </p:cNvPr>
@@ -3342,14 +3580,12 @@
         </p:nvSpPr>
         <p:spPr/>
         <p:txBody>
-          <a:bodyPr>
-            <a:normAutofit/>
-          </a:bodyPr>
-          <a:lstStyle/>
-          <a:p>
-            <a:r>
-              <a:rPr lang="en-US" dirty="0"/>
-              <a:t>19.3 ASRs From Business Goals</a:t>
+          <a:bodyPr/>
+          <a:lstStyle/>
+          <a:p>
+            <a:r>
+              <a:rPr lang="en-US" dirty="0"/>
+              <a:t>19.2 ASRs from Interviewing Stakeholders</a:t>
             </a:r>
           </a:p>
         </p:txBody>
@@ -3359,7 +3595,7 @@
           <p:cNvPr id="4" name="Slide Number Placeholder 3">
             <a:extLst>
               <a:ext uri="{FF2B5EF4-FFF2-40B4-BE49-F238E27FC236}">
-                <a16:creationId xmlns:a16="http://schemas.microsoft.com/office/drawing/2014/main" id="{D415AA41-67D8-AB56-AD2D-14BBCDB5C867}"/>
+                <a16:creationId xmlns:a16="http://schemas.microsoft.com/office/drawing/2014/main" id="{49E357F3-38ED-7CE9-E2C0-82820F3C54E1}"/>
               </a:ext>
             </a:extLst>
           </p:cNvPr>
@@ -3387,7 +3623,7 @@
     </p:spTree>
     <p:extLst>
       <p:ext uri="{BB962C8B-B14F-4D97-AF65-F5344CB8AC3E}">
-        <p14:creationId xmlns:p14="http://schemas.microsoft.com/office/powerpoint/2010/main" val="2143180145"/>
+        <p14:creationId xmlns:p14="http://schemas.microsoft.com/office/powerpoint/2010/main" val="1692142678"/>
       </p:ext>
     </p:extLst>
   </p:cSld>
@@ -3414,59 +3650,109 @@
           <a:chExt cx="0" cy="0"/>
         </a:xfrm>
       </p:grpSpPr>
-      <p:pic>
-        <p:nvPicPr>
-          <p:cNvPr id="6" name="Picture Placeholder 5">
-            <a:extLst>
-              <a:ext uri="{FF2B5EF4-FFF2-40B4-BE49-F238E27FC236}">
-                <a16:creationId xmlns:a16="http://schemas.microsoft.com/office/drawing/2014/main" id="{CD374C5A-DF41-46FF-C628-1DB65322C6B8}"/>
-              </a:ext>
-            </a:extLst>
-          </p:cNvPr>
-          <p:cNvPicPr>
-            <a:picLocks noGrp="1" noChangeAspect="1"/>
-          </p:cNvPicPr>
-          <p:nvPr>
-            <p:ph type="pic" sz="quarter" idx="11"/>
-          </p:nvPr>
-        </p:nvPicPr>
-        <p:blipFill rotWithShape="1">
-          <a:blip r:embed="rId2">
-            <a:extLst>
-              <a:ext uri="{28A0092B-C50C-407E-A947-70E740481C1C}">
-                <a14:useLocalDpi xmlns:a14="http://schemas.microsoft.com/office/drawing/2010/main" val="0"/>
-              </a:ext>
-            </a:extLst>
-          </a:blip>
-          <a:srcRect t="-41740" b="-41740"/>
-          <a:stretch/>
-        </p:blipFill>
+      <p:sp>
+        <p:nvSpPr>
+          <p:cNvPr id="2" name="Content Placeholder 1">
+            <a:extLst>
+              <a:ext uri="{FF2B5EF4-FFF2-40B4-BE49-F238E27FC236}">
+                <a16:creationId xmlns:a16="http://schemas.microsoft.com/office/drawing/2014/main" id="{7AD72FFE-EA9B-D03D-458D-57F50401660C}"/>
+              </a:ext>
+            </a:extLst>
+          </p:cNvPr>
+          <p:cNvSpPr>
+            <a:spLocks noGrp="1"/>
+          </p:cNvSpPr>
+          <p:nvPr>
+            <p:ph sz="half" idx="2"/>
+          </p:nvPr>
+        </p:nvSpPr>
         <p:spPr/>
-      </p:pic>
-      <p:sp>
-        <p:nvSpPr>
-          <p:cNvPr id="3" name="Text Placeholder 2">
-            <a:extLst>
-              <a:ext uri="{FF2B5EF4-FFF2-40B4-BE49-F238E27FC236}">
-                <a16:creationId xmlns:a16="http://schemas.microsoft.com/office/drawing/2014/main" id="{9D58E866-B4F4-A24F-D45F-26B099CC1176}"/>
-              </a:ext>
-            </a:extLst>
-          </p:cNvPr>
-          <p:cNvSpPr>
-            <a:spLocks noGrp="1"/>
-          </p:cNvSpPr>
-          <p:nvPr>
-            <p:ph type="body" sz="quarter" idx="12"/>
+        <p:txBody>
+          <a:bodyPr/>
+          <a:lstStyle/>
+          <a:p>
+            <a:r>
+              <a:rPr lang="en-US" dirty="0"/>
+              <a:t>Business goals are the reason systems are built.</a:t>
+            </a:r>
+          </a:p>
+          <a:p>
+            <a:r>
+              <a:rPr lang="en-US" dirty="0"/>
+              <a:t>Business goals are of interest to architects because they frequently lead directly to ASRs.</a:t>
+            </a:r>
+          </a:p>
+          <a:p>
+            <a:r>
+              <a:rPr lang="en-US" dirty="0"/>
+              <a:t>There are three possible relationships between business goals and an architecture:</a:t>
+            </a:r>
+          </a:p>
+          <a:p>
+            <a:pPr marL="228600" indent="-457200">
+              <a:buFont typeface="+mj-lt"/>
+              <a:buAutoNum type="arabicPeriod"/>
+            </a:pPr>
+            <a:r>
+              <a:rPr lang="en-US" dirty="0"/>
+              <a:t>Business goals often lead to quality attribute requirements.</a:t>
+            </a:r>
+          </a:p>
+          <a:p>
+            <a:pPr marL="228600" indent="-457200">
+              <a:buFont typeface="+mj-lt"/>
+              <a:buAutoNum type="arabicPeriod"/>
+            </a:pPr>
+            <a:r>
+              <a:rPr lang="en-US" dirty="0"/>
+              <a:t>Business goals may affect the architecture without inducing a quality attribute requirement at all.</a:t>
+            </a:r>
+          </a:p>
+          <a:p>
+            <a:pPr lvl="1"/>
+            <a:r>
+              <a:rPr lang="en-US" dirty="0"/>
+              <a:t>For example, the manager wants to include a database, because the organization had a database unit employing a number of highly paid technical staff who were currently unassigned.</a:t>
+            </a:r>
+          </a:p>
+          <a:p>
+            <a:pPr marL="228600" indent="-457200">
+              <a:buFont typeface="+mj-lt"/>
+              <a:buAutoNum type="arabicPeriod"/>
+            </a:pPr>
+            <a:r>
+              <a:rPr lang="en-US" dirty="0"/>
+              <a:t>Not all business goals lead to quality attributes.</a:t>
+            </a:r>
+          </a:p>
+        </p:txBody>
+      </p:sp>
+      <p:sp>
+        <p:nvSpPr>
+          <p:cNvPr id="3" name="Title 2">
+            <a:extLst>
+              <a:ext uri="{FF2B5EF4-FFF2-40B4-BE49-F238E27FC236}">
+                <a16:creationId xmlns:a16="http://schemas.microsoft.com/office/drawing/2014/main" id="{D60CF6AE-892C-7270-392B-0406163179AA}"/>
+              </a:ext>
+            </a:extLst>
+          </p:cNvPr>
+          <p:cNvSpPr>
+            <a:spLocks noGrp="1"/>
+          </p:cNvSpPr>
+          <p:nvPr>
+            <p:ph type="title"/>
           </p:nvPr>
         </p:nvSpPr>
         <p:spPr/>
         <p:txBody>
-          <a:bodyPr/>
-          <a:lstStyle/>
-          <a:p>
-            <a:r>
-              <a:rPr lang="en-US" dirty="0"/>
-              <a:t>Some business goals may lead to quality attribute requirements, or lead directly to architectural decisions, or lead to non-architectural solutions.</a:t>
+          <a:bodyPr>
+            <a:normAutofit/>
+          </a:bodyPr>
+          <a:lstStyle/>
+          <a:p>
+            <a:r>
+              <a:rPr lang="en-US" dirty="0"/>
+              <a:t>19.3 ASRs From Business Goals</a:t>
             </a:r>
           </a:p>
         </p:txBody>
@@ -3476,15 +3762,15 @@
           <p:cNvPr id="4" name="Slide Number Placeholder 3">
             <a:extLst>
               <a:ext uri="{FF2B5EF4-FFF2-40B4-BE49-F238E27FC236}">
-                <a16:creationId xmlns:a16="http://schemas.microsoft.com/office/drawing/2014/main" id="{E8F8395D-C56D-DC81-415F-91C273815DC0}"/>
-              </a:ext>
-            </a:extLst>
-          </p:cNvPr>
-          <p:cNvSpPr>
-            <a:spLocks noGrp="1"/>
-          </p:cNvSpPr>
-          <p:nvPr>
-            <p:ph type="sldNum" sz="quarter" idx="13"/>
+                <a16:creationId xmlns:a16="http://schemas.microsoft.com/office/drawing/2014/main" id="{D415AA41-67D8-AB56-AD2D-14BBCDB5C867}"/>
+              </a:ext>
+            </a:extLst>
+          </p:cNvPr>
+          <p:cNvSpPr>
+            <a:spLocks noGrp="1"/>
+          </p:cNvSpPr>
+          <p:nvPr>
+            <p:ph type="sldNum" sz="quarter" idx="10"/>
           </p:nvPr>
         </p:nvSpPr>
         <p:spPr/>
@@ -3504,7 +3790,7 @@
     </p:spTree>
     <p:extLst>
       <p:ext uri="{BB962C8B-B14F-4D97-AF65-F5344CB8AC3E}">
-        <p14:creationId xmlns:p14="http://schemas.microsoft.com/office/powerpoint/2010/main" val="1506094575"/>
+        <p14:creationId xmlns:p14="http://schemas.microsoft.com/office/powerpoint/2010/main" val="2143180145"/>
       </p:ext>
     </p:extLst>
   </p:cSld>
@@ -3531,151 +3817,59 @@
           <a:chExt cx="0" cy="0"/>
         </a:xfrm>
       </p:grpSpPr>
-      <p:sp>
-        <p:nvSpPr>
-          <p:cNvPr id="2" name="Content Placeholder 1">
-            <a:extLst>
-              <a:ext uri="{FF2B5EF4-FFF2-40B4-BE49-F238E27FC236}">
-                <a16:creationId xmlns:a16="http://schemas.microsoft.com/office/drawing/2014/main" id="{FE134588-EB9E-5BC1-28A9-0D637DB39D9E}"/>
-              </a:ext>
-            </a:extLst>
-          </p:cNvPr>
-          <p:cNvSpPr>
-            <a:spLocks noGrp="1"/>
-          </p:cNvSpPr>
-          <p:nvPr>
-            <p:ph sz="half" idx="2"/>
-          </p:nvPr>
-        </p:nvSpPr>
+      <p:pic>
+        <p:nvPicPr>
+          <p:cNvPr id="6" name="Picture Placeholder 5">
+            <a:extLst>
+              <a:ext uri="{FF2B5EF4-FFF2-40B4-BE49-F238E27FC236}">
+                <a16:creationId xmlns:a16="http://schemas.microsoft.com/office/drawing/2014/main" id="{CD374C5A-DF41-46FF-C628-1DB65322C6B8}"/>
+              </a:ext>
+            </a:extLst>
+          </p:cNvPr>
+          <p:cNvPicPr>
+            <a:picLocks noGrp="1" noChangeAspect="1"/>
+          </p:cNvPicPr>
+          <p:nvPr>
+            <p:ph type="pic" sz="quarter" idx="11"/>
+          </p:nvPr>
+        </p:nvPicPr>
+        <p:blipFill rotWithShape="1">
+          <a:blip r:embed="rId2">
+            <a:extLst>
+              <a:ext uri="{28A0092B-C50C-407E-A947-70E740481C1C}">
+                <a14:useLocalDpi xmlns:a14="http://schemas.microsoft.com/office/drawing/2010/main" val="0"/>
+              </a:ext>
+            </a:extLst>
+          </a:blip>
+          <a:srcRect t="-41740" b="-41740"/>
+          <a:stretch/>
+        </p:blipFill>
         <p:spPr/>
+      </p:pic>
+      <p:sp>
+        <p:nvSpPr>
+          <p:cNvPr id="3" name="Text Placeholder 2">
+            <a:extLst>
+              <a:ext uri="{FF2B5EF4-FFF2-40B4-BE49-F238E27FC236}">
+                <a16:creationId xmlns:a16="http://schemas.microsoft.com/office/drawing/2014/main" id="{9D58E866-B4F4-A24F-D45F-26B099CC1176}"/>
+              </a:ext>
+            </a:extLst>
+          </p:cNvPr>
+          <p:cNvSpPr>
+            <a:spLocks noGrp="1"/>
+          </p:cNvSpPr>
+          <p:nvPr>
+            <p:ph type="body" sz="quarter" idx="12"/>
+          </p:nvPr>
+        </p:nvSpPr>
+        <p:spPr/>
         <p:txBody>
           <a:bodyPr/>
           <a:lstStyle/>
           <a:p>
             <a:r>
               <a:rPr lang="en-US" dirty="0"/>
-              <a:t>The is a stakeholder-driven session to create and sharpen quality-attribute scenarios before finalizing the architecture.</a:t>
-            </a:r>
-          </a:p>
-          <a:p>
-            <a:r>
-              <a:rPr lang="en-US" dirty="0"/>
-              <a:t>The </a:t>
-            </a:r>
-            <a:r>
-              <a:rPr lang="en-US" dirty="0">
-                <a:solidFill>
-                  <a:schemeClr val="accent1"/>
-                </a:solidFill>
-              </a:rPr>
-              <a:t>Quality Attribute Workshop </a:t>
-            </a:r>
-            <a:r>
-              <a:rPr lang="en-US" dirty="0"/>
-              <a:t>(QAW) is a stakeholder-driven session to create and sharpen quality-attribute scenarios before finalizing the architecture. </a:t>
-            </a:r>
-          </a:p>
-          <a:p>
-            <a:r>
-              <a:rPr lang="en-US" dirty="0"/>
-              <a:t>The </a:t>
-            </a:r>
-            <a:r>
-              <a:rPr lang="en-US" dirty="0">
-                <a:solidFill>
-                  <a:schemeClr val="accent1"/>
-                </a:solidFill>
-              </a:rPr>
-              <a:t>QAW</a:t>
-            </a:r>
-            <a:r>
-              <a:rPr lang="en-US" dirty="0"/>
-              <a:t> involves the following elements:</a:t>
-            </a:r>
-          </a:p>
-          <a:p>
-            <a:pPr lvl="1"/>
-            <a:r>
-              <a:rPr lang="en-US" dirty="0">
-                <a:solidFill>
-                  <a:schemeClr val="accent4">
-                    <a:lumMod val="50000"/>
-                  </a:schemeClr>
-                </a:solidFill>
-              </a:rPr>
-              <a:t>Step 1: QAW Presentation and Introductions.</a:t>
-            </a:r>
-          </a:p>
-          <a:p>
-            <a:pPr lvl="2"/>
-            <a:r>
-              <a:rPr lang="en-US" sz="1800" dirty="0"/>
-              <a:t>QAW facilitators describe the motivation for the QAW and explain each step of the method.</a:t>
-            </a:r>
-          </a:p>
-          <a:p>
-            <a:pPr lvl="1"/>
-            <a:r>
-              <a:rPr lang="en-US" dirty="0">
-                <a:solidFill>
-                  <a:schemeClr val="accent4">
-                    <a:lumMod val="50000"/>
-                  </a:schemeClr>
-                </a:solidFill>
-              </a:rPr>
-              <a:t>Step 2: Business/Mission Presentation.</a:t>
-            </a:r>
-            <a:endParaRPr lang="en-US" dirty="0"/>
-          </a:p>
-          <a:p>
-            <a:pPr lvl="2"/>
-            <a:r>
-              <a:rPr lang="en-US" sz="1800" dirty="0"/>
-              <a:t>The stakeholder representing the business concerns behind the system presents the system’s business context, broad functional requirements, constraints, and known quality attribute requirements. </a:t>
-            </a:r>
-          </a:p>
-          <a:p>
-            <a:pPr lvl="2"/>
-            <a:r>
-              <a:rPr lang="en-US" sz="1800" dirty="0"/>
-              <a:t>The quality attributes that will be refined in later steps will be derived largely from the business/mission needs presented in this step.</a:t>
-            </a:r>
-          </a:p>
-          <a:p>
-            <a:pPr marL="0" indent="0">
-              <a:buNone/>
-            </a:pPr>
-            <a:endParaRPr lang="en-US" dirty="0"/>
-          </a:p>
-          <a:p>
-            <a:endParaRPr lang="en-US" dirty="0"/>
-          </a:p>
-        </p:txBody>
-      </p:sp>
-      <p:sp>
-        <p:nvSpPr>
-          <p:cNvPr id="3" name="Title 2">
-            <a:extLst>
-              <a:ext uri="{FF2B5EF4-FFF2-40B4-BE49-F238E27FC236}">
-                <a16:creationId xmlns:a16="http://schemas.microsoft.com/office/drawing/2014/main" id="{8276B5EA-12F9-FC2C-5912-42C805D03A12}"/>
-              </a:ext>
-            </a:extLst>
-          </p:cNvPr>
-          <p:cNvSpPr>
-            <a:spLocks noGrp="1"/>
-          </p:cNvSpPr>
-          <p:nvPr>
-            <p:ph type="title"/>
-          </p:nvPr>
-        </p:nvSpPr>
-        <p:spPr/>
-        <p:txBody>
-          <a:bodyPr/>
-          <a:lstStyle/>
-          <a:p>
-            <a:r>
-              <a:rPr lang="en-US" dirty="0"/>
-              <a:t>Quality Attribute Workshop</a:t>
+              <a:t>Some business goals may lead to quality attribute requirements, or lead directly to architectural decisions, or lead to non-architectural solutions.</a:t>
             </a:r>
           </a:p>
         </p:txBody>
@@ -3685,15 +3879,15 @@
           <p:cNvPr id="4" name="Slide Number Placeholder 3">
             <a:extLst>
               <a:ext uri="{FF2B5EF4-FFF2-40B4-BE49-F238E27FC236}">
-                <a16:creationId xmlns:a16="http://schemas.microsoft.com/office/drawing/2014/main" id="{83D6C042-899D-D3B1-D45A-43B633787A73}"/>
-              </a:ext>
-            </a:extLst>
-          </p:cNvPr>
-          <p:cNvSpPr>
-            <a:spLocks noGrp="1"/>
-          </p:cNvSpPr>
-          <p:nvPr>
-            <p:ph type="sldNum" sz="quarter" idx="10"/>
+                <a16:creationId xmlns:a16="http://schemas.microsoft.com/office/drawing/2014/main" id="{E8F8395D-C56D-DC81-415F-91C273815DC0}"/>
+              </a:ext>
+            </a:extLst>
+          </p:cNvPr>
+          <p:cNvSpPr>
+            <a:spLocks noGrp="1"/>
+          </p:cNvSpPr>
+          <p:nvPr>
+            <p:ph type="sldNum" sz="quarter" idx="13"/>
           </p:nvPr>
         </p:nvSpPr>
         <p:spPr/>
@@ -3713,7 +3907,7 @@
     </p:spTree>
     <p:extLst>
       <p:ext uri="{BB962C8B-B14F-4D97-AF65-F5344CB8AC3E}">
-        <p14:creationId xmlns:p14="http://schemas.microsoft.com/office/powerpoint/2010/main" val="3157308822"/>
+        <p14:creationId xmlns:p14="http://schemas.microsoft.com/office/powerpoint/2010/main" val="1506094575"/>
       </p:ext>
     </p:extLst>
   </p:cSld>
@@ -3745,7 +3939,7 @@
           <p:cNvPr id="2" name="Content Placeholder 1">
             <a:extLst>
               <a:ext uri="{FF2B5EF4-FFF2-40B4-BE49-F238E27FC236}">
-                <a16:creationId xmlns:a16="http://schemas.microsoft.com/office/drawing/2014/main" id="{6E98DBF6-281D-5559-A90B-7947CB223DB0}"/>
+                <a16:creationId xmlns:a16="http://schemas.microsoft.com/office/drawing/2014/main" id="{FE134588-EB9E-5BC1-28A9-0D637DB39D9E}"/>
               </a:ext>
             </a:extLst>
           </p:cNvPr>
@@ -3756,15 +3950,52 @@
             <p:ph sz="half" idx="2"/>
           </p:nvPr>
         </p:nvSpPr>
-        <p:spPr>
-          <a:xfrm>
-            <a:off x="588977" y="1015164"/>
-            <a:ext cx="11058526" cy="5676247"/>
-          </a:xfrm>
-        </p:spPr>
+        <p:spPr/>
         <p:txBody>
           <a:bodyPr/>
           <a:lstStyle/>
+          <a:p>
+            <a:r>
+              <a:rPr lang="en-US" dirty="0"/>
+              <a:t>The is a stakeholder-driven session to create and sharpen quality-attribute scenarios before finalizing the architecture.</a:t>
+            </a:r>
+          </a:p>
+          <a:p>
+            <a:r>
+              <a:rPr lang="en-US" dirty="0"/>
+              <a:t>The </a:t>
+            </a:r>
+            <a:r>
+              <a:rPr lang="en-US" dirty="0">
+                <a:solidFill>
+                  <a:schemeClr val="accent1"/>
+                </a:solidFill>
+              </a:rPr>
+              <a:t>Quality Attribute Workshop </a:t>
+            </a:r>
+            <a:r>
+              <a:rPr lang="en-US" dirty="0"/>
+              <a:t>(QAW) is a stakeholder-driven session to create and sharpen quality-attribute scenarios before finalizing the architecture. </a:t>
+            </a:r>
+          </a:p>
+          <a:p>
+            <a:r>
+              <a:rPr lang="en-US" dirty="0"/>
+              <a:t>The </a:t>
+            </a:r>
+            <a:r>
+              <a:rPr lang="en-US" dirty="0">
+                <a:solidFill>
+                  <a:schemeClr val="accent1"/>
+                </a:solidFill>
+              </a:rPr>
+              <a:t>QAW</a:t>
+            </a:r>
+            <a:r>
+              <a:rPr lang="en-US" dirty="0"/>
+              <a:t> involves the following elements:</a:t>
+            </a:r>
+          </a:p>
           <a:p>
             <a:pPr lvl="1"/>
             <a:r>
@@ -3775,21 +4006,14 @@
                   </a:schemeClr>
                 </a:solidFill>
               </a:rPr>
-              <a:t>Step 3: Architectural Plan Presentation.</a:t>
+              <a:t>Step 1: QAW Presentation and Introductions.</a:t>
             </a:r>
           </a:p>
           <a:p>
             <a:pPr lvl="2"/>
             <a:r>
-              <a:rPr lang="en-US" dirty="0"/>
-              <a:t>The architect will present the system architectural plans as they stand. </a:t>
-            </a:r>
-          </a:p>
-          <a:p>
-            <a:pPr lvl="2"/>
-            <a:r>
-              <a:rPr lang="en-US" dirty="0"/>
-              <a:t>This lets stakeholders know the current architectural thinking, to the extent that it exists.</a:t>
+              <a:rPr lang="en-US" sz="1800" dirty="0"/>
+              <a:t>QAW facilitators describe the motivation for the QAW and explain each step of the method.</a:t>
             </a:r>
           </a:p>
           <a:p>
@@ -3802,69 +4026,41 @@
                   </a:schemeClr>
                 </a:solidFill>
               </a:rPr>
-              <a:t>Step 4: Identification of Architectural Drivers.</a:t>
-            </a:r>
+              <a:t>Step 2: Business/Mission Presentation.</a:t>
+            </a:r>
+            <a:endParaRPr lang="en-US" dirty="0"/>
           </a:p>
           <a:p>
             <a:pPr lvl="2"/>
             <a:r>
-              <a:rPr lang="en-US" dirty="0"/>
-              <a:t>The facilitators will share their list of key architectural drivers that they assembled during Steps 2 and 3, and ask the stakeholders for clarifications, additions, deletions, and corrections. </a:t>
+              <a:rPr lang="en-US" sz="1800" dirty="0"/>
+              <a:t>The stakeholder representing the business concerns behind the system presents the system’s business context, broad functional requirements, constraints, and known quality attribute requirements. </a:t>
             </a:r>
           </a:p>
           <a:p>
             <a:pPr lvl="2"/>
             <a:r>
-              <a:rPr lang="en-US" dirty="0"/>
-              <a:t>The idea is to reach a consensus on a distilled list of architectural drivers that includes overall requirements, business drivers, constraints, and quality attributes. </a:t>
-            </a:r>
-          </a:p>
-          <a:p>
-            <a:pPr lvl="1"/>
-            <a:r>
-              <a:rPr lang="en-US" dirty="0">
-                <a:solidFill>
-                  <a:schemeClr val="accent4">
-                    <a:lumMod val="50000"/>
-                  </a:schemeClr>
-                </a:solidFill>
-              </a:rPr>
-              <a:t>Step 5: Scenario Brainstorming. </a:t>
-            </a:r>
-          </a:p>
-          <a:p>
-            <a:pPr lvl="2"/>
-            <a:r>
-              <a:rPr lang="en-US" dirty="0"/>
-              <a:t>Each stakeholder expresses a scenario representing his or her concerns with respect to the system. </a:t>
-            </a:r>
-          </a:p>
-          <a:p>
-            <a:pPr lvl="2"/>
-            <a:r>
-              <a:rPr lang="en-US" dirty="0"/>
-              <a:t>Facilitators ensure that each scenario has an explicit stimulus and response. </a:t>
-            </a:r>
-          </a:p>
-          <a:p>
-            <a:pPr lvl="2"/>
-            <a:r>
-              <a:rPr lang="en-US" dirty="0"/>
-              <a:t>The facilitators ensure that at least one representative scenario exists for each architectural driver listed in Step 4.</a:t>
-            </a:r>
-          </a:p>
-          <a:p>
-            <a:pPr lvl="1"/>
+              <a:rPr lang="en-US" sz="1800" dirty="0"/>
+              <a:t>The quality attributes that will be refined in later steps will be derived largely from the business/mission needs presented in this step.</a:t>
+            </a:r>
+          </a:p>
+          <a:p>
+            <a:pPr marL="0" indent="0">
+              <a:buNone/>
+            </a:pPr>
             <a:endParaRPr lang="en-US" dirty="0"/>
           </a:p>
-        </p:txBody>
-      </p:sp>
-      <p:sp>
-        <p:nvSpPr>
-          <p:cNvPr id="7" name="Title 6">
-            <a:extLst>
-              <a:ext uri="{FF2B5EF4-FFF2-40B4-BE49-F238E27FC236}">
-                <a16:creationId xmlns:a16="http://schemas.microsoft.com/office/drawing/2014/main" id="{C56B8F85-9B93-B0E3-0E49-5478EB2F5044}"/>
+          <a:p>
+            <a:endParaRPr lang="en-US" dirty="0"/>
+          </a:p>
+        </p:txBody>
+      </p:sp>
+      <p:sp>
+        <p:nvSpPr>
+          <p:cNvPr id="3" name="Title 2">
+            <a:extLst>
+              <a:ext uri="{FF2B5EF4-FFF2-40B4-BE49-F238E27FC236}">
+                <a16:creationId xmlns:a16="http://schemas.microsoft.com/office/drawing/2014/main" id="{8276B5EA-12F9-FC2C-5912-42C805D03A12}"/>
               </a:ext>
             </a:extLst>
           </p:cNvPr>
@@ -3892,7 +4088,7 @@
           <p:cNvPr id="4" name="Slide Number Placeholder 3">
             <a:extLst>
               <a:ext uri="{FF2B5EF4-FFF2-40B4-BE49-F238E27FC236}">
-                <a16:creationId xmlns:a16="http://schemas.microsoft.com/office/drawing/2014/main" id="{8E1CBBE6-8806-6A1D-CB05-2B326425F535}"/>
+                <a16:creationId xmlns:a16="http://schemas.microsoft.com/office/drawing/2014/main" id="{83D6C042-899D-D3B1-D45A-43B633787A73}"/>
               </a:ext>
             </a:extLst>
           </p:cNvPr>
@@ -3903,12 +4099,7 @@
             <p:ph type="sldNum" sz="quarter" idx="10"/>
           </p:nvPr>
         </p:nvSpPr>
-        <p:spPr>
-          <a:xfrm>
-            <a:off x="556149" y="153671"/>
-            <a:ext cx="670079" cy="641281"/>
-          </a:xfrm>
-        </p:spPr>
+        <p:spPr/>
         <p:txBody>
           <a:bodyPr/>
           <a:lstStyle/>
@@ -3925,7 +4116,7 @@
     </p:spTree>
     <p:extLst>
       <p:ext uri="{BB962C8B-B14F-4D97-AF65-F5344CB8AC3E}">
-        <p14:creationId xmlns:p14="http://schemas.microsoft.com/office/powerpoint/2010/main" val="3329056718"/>
+        <p14:creationId xmlns:p14="http://schemas.microsoft.com/office/powerpoint/2010/main" val="3157308822"/>
       </p:ext>
     </p:extLst>
   </p:cSld>
@@ -3957,7 +4148,7 @@
           <p:cNvPr id="2" name="Content Placeholder 1">
             <a:extLst>
               <a:ext uri="{FF2B5EF4-FFF2-40B4-BE49-F238E27FC236}">
-                <a16:creationId xmlns:a16="http://schemas.microsoft.com/office/drawing/2014/main" id="{6812E38F-C3A0-EA9B-AA6C-4C44E09D008F}"/>
+                <a16:creationId xmlns:a16="http://schemas.microsoft.com/office/drawing/2014/main" id="{6E98DBF6-281D-5559-A90B-7947CB223DB0}"/>
               </a:ext>
             </a:extLst>
           </p:cNvPr>
@@ -3987,21 +4178,21 @@
                   </a:schemeClr>
                 </a:solidFill>
               </a:rPr>
-              <a:t>Step 6: Scenario Consolidation. </a:t>
+              <a:t>Step 3: Architectural Plan Presentation.</a:t>
             </a:r>
           </a:p>
           <a:p>
             <a:pPr lvl="2"/>
             <a:r>
               <a:rPr lang="en-US" dirty="0"/>
-              <a:t>Similar scenarios are consolidated where reasonable. </a:t>
+              <a:t>The architect will present the system architectural plans as they stand. </a:t>
             </a:r>
           </a:p>
           <a:p>
             <a:pPr lvl="2"/>
             <a:r>
               <a:rPr lang="en-US" dirty="0"/>
-              <a:t>Consolidation helps to prevent votes from being spread across several scenarios that are expressing the same concern. </a:t>
+              <a:t>This lets stakeholders know the current architectural thinking, to the extent that it exists.</a:t>
             </a:r>
           </a:p>
           <a:p>
@@ -4014,14 +4205,21 @@
                   </a:schemeClr>
                 </a:solidFill>
               </a:rPr>
-              <a:t>Step 7: Scenario Prioritization. </a:t>
+              <a:t>Step 4: Identification of Architectural Drivers.</a:t>
             </a:r>
           </a:p>
           <a:p>
             <a:pPr lvl="2"/>
             <a:r>
               <a:rPr lang="en-US" dirty="0"/>
-              <a:t>Prioritization of the scenarios is accomplished by allocating each stakeholder a number of votes equal to 30 percent of the total number of scenarios</a:t>
+              <a:t>The facilitators will share their list of key architectural drivers that they assembled during Steps 2 and 3, and ask the stakeholders for clarifications, additions, deletions, and corrections. </a:t>
+            </a:r>
+          </a:p>
+          <a:p>
+            <a:pPr lvl="2"/>
+            <a:r>
+              <a:rPr lang="en-US" dirty="0"/>
+              <a:t>The idea is to reach a consensus on a distilled list of architectural drivers that includes overall requirements, business drivers, constraints, and quality attributes. </a:t>
             </a:r>
           </a:p>
           <a:p>
@@ -4034,24 +4232,32 @@
                   </a:schemeClr>
                 </a:solidFill>
               </a:rPr>
-              <a:t>Step 8: Scenario Refinement. </a:t>
+              <a:t>Step 5: Scenario Brainstorming. </a:t>
             </a:r>
           </a:p>
           <a:p>
             <a:pPr lvl="2"/>
             <a:r>
               <a:rPr lang="en-US" dirty="0"/>
-              <a:t>The top scenarios are refined and elaborated. </a:t>
+              <a:t>Each stakeholder expresses a scenario representing his or her concerns with respect to the system. </a:t>
             </a:r>
           </a:p>
           <a:p>
             <a:pPr lvl="2"/>
             <a:r>
               <a:rPr lang="en-US" dirty="0"/>
-              <a:t>Facilitators help the stakeholders put the scenarios in the six-part scenario form of source-stimulus-artifact-environment-response-response measure. </a:t>
-            </a:r>
-          </a:p>
-          <a:p>
+              <a:t>Facilitators ensure that each scenario has an explicit stimulus and response. </a:t>
+            </a:r>
+          </a:p>
+          <a:p>
+            <a:pPr lvl="2"/>
+            <a:r>
+              <a:rPr lang="en-US" dirty="0"/>
+              <a:t>The facilitators ensure that at least one representative scenario exists for each architectural driver listed in Step 4.</a:t>
+            </a:r>
+          </a:p>
+          <a:p>
+            <a:pPr lvl="1"/>
             <a:endParaRPr lang="en-US" dirty="0"/>
           </a:p>
         </p:txBody>
@@ -4061,7 +4267,7 @@
           <p:cNvPr id="7" name="Title 6">
             <a:extLst>
               <a:ext uri="{FF2B5EF4-FFF2-40B4-BE49-F238E27FC236}">
-                <a16:creationId xmlns:a16="http://schemas.microsoft.com/office/drawing/2014/main" id="{B7F8EA2B-3F6B-0DBE-3E7A-8C0901C08919}"/>
+                <a16:creationId xmlns:a16="http://schemas.microsoft.com/office/drawing/2014/main" id="{C56B8F85-9B93-B0E3-0E49-5478EB2F5044}"/>
               </a:ext>
             </a:extLst>
           </p:cNvPr>
@@ -4089,7 +4295,7 @@
           <p:cNvPr id="4" name="Slide Number Placeholder 3">
             <a:extLst>
               <a:ext uri="{FF2B5EF4-FFF2-40B4-BE49-F238E27FC236}">
-                <a16:creationId xmlns:a16="http://schemas.microsoft.com/office/drawing/2014/main" id="{4B131E44-B6EF-81BA-8277-0A7C8DAD7118}"/>
+                <a16:creationId xmlns:a16="http://schemas.microsoft.com/office/drawing/2014/main" id="{8E1CBBE6-8806-6A1D-CB05-2B326425F535}"/>
               </a:ext>
             </a:extLst>
           </p:cNvPr>
@@ -4122,7 +4328,7 @@
     </p:spTree>
     <p:extLst>
       <p:ext uri="{BB962C8B-B14F-4D97-AF65-F5344CB8AC3E}">
-        <p14:creationId xmlns:p14="http://schemas.microsoft.com/office/powerpoint/2010/main" val="4003044262"/>
+        <p14:creationId xmlns:p14="http://schemas.microsoft.com/office/powerpoint/2010/main" val="3329056718"/>
       </p:ext>
     </p:extLst>
   </p:cSld>
@@ -4154,7 +4360,7 @@
           <p:cNvPr id="2" name="Content Placeholder 1">
             <a:extLst>
               <a:ext uri="{FF2B5EF4-FFF2-40B4-BE49-F238E27FC236}">
-                <a16:creationId xmlns:a16="http://schemas.microsoft.com/office/drawing/2014/main" id="{E5C3C5F0-F6EE-1966-183C-7953ECF7A17D}"/>
+                <a16:creationId xmlns:a16="http://schemas.microsoft.com/office/drawing/2014/main" id="{6812E38F-C3A0-EA9B-AA6C-4C44E09D008F}"/>
               </a:ext>
             </a:extLst>
           </p:cNvPr>
@@ -4165,64 +4371,15 @@
             <p:ph sz="half" idx="2"/>
           </p:nvPr>
         </p:nvSpPr>
-        <p:spPr/>
+        <p:spPr>
+          <a:xfrm>
+            <a:off x="588977" y="1015164"/>
+            <a:ext cx="11058526" cy="5676247"/>
+          </a:xfrm>
+        </p:spPr>
         <p:txBody>
           <a:bodyPr/>
           <a:lstStyle/>
-          <a:p>
-            <a:r>
-              <a:rPr lang="en-US" dirty="0"/>
-              <a:t>Architects often become aware of an organization’s business and business goals via </a:t>
-            </a:r>
-            <a:r>
-              <a:rPr lang="en-US" dirty="0">
-                <a:solidFill>
-                  <a:schemeClr val="accent1"/>
-                </a:solidFill>
-              </a:rPr>
-              <a:t>osmosis</a:t>
-            </a:r>
-            <a:r>
-              <a:rPr lang="en-US" dirty="0"/>
-              <a:t>—working, listening, talking, and soaking up the goals that are at work in an organization.</a:t>
-            </a:r>
-          </a:p>
-          <a:p>
-            <a:r>
-              <a:rPr lang="en-US" dirty="0"/>
-              <a:t>More systematic ways of determining such goals are both possible and desirable.</a:t>
-            </a:r>
-          </a:p>
-          <a:p>
-            <a:r>
-              <a:rPr lang="en-US" dirty="0"/>
-              <a:t>It is worthwhile to capture business goals explicitly, because they often imply ASRs that would otherwise go undetected until it is too late or too expensive to address them.</a:t>
-            </a:r>
-          </a:p>
-          <a:p>
-            <a:r>
-              <a:rPr lang="en-US" dirty="0"/>
-              <a:t>One way to do this is to employ the </a:t>
-            </a:r>
-            <a:r>
-              <a:rPr lang="en-US" dirty="0">
-                <a:solidFill>
-                  <a:schemeClr val="accent1"/>
-                </a:solidFill>
-              </a:rPr>
-              <a:t>PALM</a:t>
-            </a:r>
-            <a:r>
-              <a:rPr lang="en-US" dirty="0"/>
-              <a:t> method, which entails holding a workshop with the architect and key business stakeholders.</a:t>
-            </a:r>
-          </a:p>
-          <a:p>
-            <a:r>
-              <a:rPr lang="en-US" dirty="0"/>
-              <a:t>PALM consists of these steps</a:t>
-            </a:r>
-          </a:p>
           <a:p>
             <a:pPr lvl="1"/>
             <a:r>
@@ -4233,30 +4390,81 @@
                   </a:schemeClr>
                 </a:solidFill>
               </a:rPr>
-              <a:t>Step 1: Business goals elicitation.</a:t>
+              <a:t>Step 6: Scenario Consolidation. </a:t>
             </a:r>
           </a:p>
           <a:p>
             <a:pPr lvl="2"/>
             <a:r>
               <a:rPr lang="en-US" dirty="0"/>
-              <a:t>Using the categories given later in this section to guide the discussion, capture from stakeholders the set of important business goals for this system.</a:t>
-            </a:r>
-          </a:p>
-          <a:p>
-            <a:pPr lvl="1" indent="0">
-              <a:buNone/>
-            </a:pPr>
+              <a:t>Similar scenarios are consolidated where reasonable. </a:t>
+            </a:r>
+          </a:p>
+          <a:p>
+            <a:pPr lvl="2"/>
+            <a:r>
+              <a:rPr lang="en-US" dirty="0"/>
+              <a:t>Consolidation helps to prevent votes from being spread across several scenarios that are expressing the same concern. </a:t>
+            </a:r>
+          </a:p>
+          <a:p>
+            <a:pPr lvl="1"/>
+            <a:r>
+              <a:rPr lang="en-US" dirty="0">
+                <a:solidFill>
+                  <a:schemeClr val="accent4">
+                    <a:lumMod val="50000"/>
+                  </a:schemeClr>
+                </a:solidFill>
+              </a:rPr>
+              <a:t>Step 7: Scenario Prioritization. </a:t>
+            </a:r>
+          </a:p>
+          <a:p>
+            <a:pPr lvl="2"/>
+            <a:r>
+              <a:rPr lang="en-US" dirty="0"/>
+              <a:t>Prioritization of the scenarios is accomplished by allocating each stakeholder a number of votes equal to 30 percent of the total number of scenarios</a:t>
+            </a:r>
+          </a:p>
+          <a:p>
+            <a:pPr lvl="1"/>
+            <a:r>
+              <a:rPr lang="en-US" dirty="0">
+                <a:solidFill>
+                  <a:schemeClr val="accent4">
+                    <a:lumMod val="50000"/>
+                  </a:schemeClr>
+                </a:solidFill>
+              </a:rPr>
+              <a:t>Step 8: Scenario Refinement. </a:t>
+            </a:r>
+          </a:p>
+          <a:p>
+            <a:pPr lvl="2"/>
+            <a:r>
+              <a:rPr lang="en-US" dirty="0"/>
+              <a:t>The top scenarios are refined and elaborated. </a:t>
+            </a:r>
+          </a:p>
+          <a:p>
+            <a:pPr lvl="2"/>
+            <a:r>
+              <a:rPr lang="en-US" dirty="0"/>
+              <a:t>Facilitators help the stakeholders put the scenarios in the six-part scenario form of source-stimulus-artifact-environment-response-response measure. </a:t>
+            </a:r>
+          </a:p>
+          <a:p>
             <a:endParaRPr lang="en-US" dirty="0"/>
           </a:p>
         </p:txBody>
       </p:sp>
       <p:sp>
         <p:nvSpPr>
-          <p:cNvPr id="3" name="Title 2">
-            <a:extLst>
-              <a:ext uri="{FF2B5EF4-FFF2-40B4-BE49-F238E27FC236}">
-                <a16:creationId xmlns:a16="http://schemas.microsoft.com/office/drawing/2014/main" id="{5E571760-8D24-A9A5-82F5-42A12FE4F6CB}"/>
+          <p:cNvPr id="7" name="Title 6">
+            <a:extLst>
+              <a:ext uri="{FF2B5EF4-FFF2-40B4-BE49-F238E27FC236}">
+                <a16:creationId xmlns:a16="http://schemas.microsoft.com/office/drawing/2014/main" id="{B7F8EA2B-3F6B-0DBE-3E7A-8C0901C08919}"/>
               </a:ext>
             </a:extLst>
           </p:cNvPr>
@@ -4274,7 +4482,7 @@
           <a:p>
             <a:r>
               <a:rPr lang="en-US" dirty="0"/>
-              <a:t>19.3 ASRs From Business Goals</a:t>
+              <a:t>Quality Attribute Workshop</a:t>
             </a:r>
           </a:p>
         </p:txBody>
@@ -4284,7 +4492,7 @@
           <p:cNvPr id="4" name="Slide Number Placeholder 3">
             <a:extLst>
               <a:ext uri="{FF2B5EF4-FFF2-40B4-BE49-F238E27FC236}">
-                <a16:creationId xmlns:a16="http://schemas.microsoft.com/office/drawing/2014/main" id="{7CDF4EBF-35FE-CB5E-8C2B-2566CF9A9F38}"/>
+                <a16:creationId xmlns:a16="http://schemas.microsoft.com/office/drawing/2014/main" id="{4B131E44-B6EF-81BA-8277-0A7C8DAD7118}"/>
               </a:ext>
             </a:extLst>
           </p:cNvPr>
@@ -4295,7 +4503,12 @@
             <p:ph type="sldNum" sz="quarter" idx="10"/>
           </p:nvPr>
         </p:nvSpPr>
-        <p:spPr/>
+        <p:spPr>
+          <a:xfrm>
+            <a:off x="556149" y="153671"/>
+            <a:ext cx="670079" cy="641281"/>
+          </a:xfrm>
+        </p:spPr>
         <p:txBody>
           <a:bodyPr/>
           <a:lstStyle/>
@@ -4312,7 +4525,7 @@
     </p:spTree>
     <p:extLst>
       <p:ext uri="{BB962C8B-B14F-4D97-AF65-F5344CB8AC3E}">
-        <p14:creationId xmlns:p14="http://schemas.microsoft.com/office/powerpoint/2010/main" val="1924475710"/>
+        <p14:creationId xmlns:p14="http://schemas.microsoft.com/office/powerpoint/2010/main" val="4003044262"/>
       </p:ext>
     </p:extLst>
   </p:cSld>
@@ -4344,7 +4557,7 @@
           <p:cNvPr id="2" name="Content Placeholder 1">
             <a:extLst>
               <a:ext uri="{FF2B5EF4-FFF2-40B4-BE49-F238E27FC236}">
-                <a16:creationId xmlns:a16="http://schemas.microsoft.com/office/drawing/2014/main" id="{6C5273C9-BBFE-188E-DF0B-550AA3A8423C}"/>
+                <a16:creationId xmlns:a16="http://schemas.microsoft.com/office/drawing/2014/main" id="{E5C3C5F0-F6EE-1966-183C-7953ECF7A17D}"/>
               </a:ext>
             </a:extLst>
           </p:cNvPr>
@@ -4359,6 +4572,60 @@
         <p:txBody>
           <a:bodyPr/>
           <a:lstStyle/>
+          <a:p>
+            <a:r>
+              <a:rPr lang="en-US" dirty="0"/>
+              <a:t>Architects often become aware of an organization’s business and business goals via </a:t>
+            </a:r>
+            <a:r>
+              <a:rPr lang="en-US" dirty="0">
+                <a:solidFill>
+                  <a:schemeClr val="accent1"/>
+                </a:solidFill>
+              </a:rPr>
+              <a:t>osmosis</a:t>
+            </a:r>
+            <a:r>
+              <a:rPr lang="en-US" dirty="0"/>
+              <a:t>—working, listening, talking, and soaking up the goals that are at work in an organization.</a:t>
+            </a:r>
+          </a:p>
+          <a:p>
+            <a:r>
+              <a:rPr lang="en-US" dirty="0"/>
+              <a:t>More systematic ways of determining such goals are both possible and desirable.</a:t>
+            </a:r>
+          </a:p>
+          <a:p>
+            <a:r>
+              <a:rPr lang="en-US" dirty="0"/>
+              <a:t>It is worthwhile to capture business goals explicitly, because they often imply ASRs that would otherwise go undetected until it is too late or too expensive to address them.</a:t>
+            </a:r>
+          </a:p>
+          <a:p>
+            <a:r>
+              <a:rPr lang="en-US" dirty="0"/>
+              <a:t>One way to do this is to employ the </a:t>
+            </a:r>
+            <a:r>
+              <a:rPr lang="en-US" dirty="0">
+                <a:solidFill>
+                  <a:schemeClr val="accent1"/>
+                </a:solidFill>
+              </a:rPr>
+              <a:t>PALM</a:t>
+            </a:r>
+            <a:r>
+              <a:rPr lang="en-US" dirty="0"/>
+              <a:t> method, which entails holding a workshop with the architect and key business stakeholders.</a:t>
+            </a:r>
+          </a:p>
+          <a:p>
+            <a:r>
+              <a:rPr lang="en-US" dirty="0"/>
+              <a:t>PALM consists of these steps</a:t>
+            </a:r>
+          </a:p>
           <a:p>
             <a:pPr lvl="1"/>
             <a:r>
@@ -4369,84 +4636,21 @@
                   </a:schemeClr>
                 </a:solidFill>
               </a:rPr>
-              <a:t>Step 2: Identify potential QAs from business goals.</a:t>
+              <a:t>Step 1: Business goals elicitation.</a:t>
             </a:r>
           </a:p>
           <a:p>
             <a:pPr lvl="2"/>
             <a:r>
               <a:rPr lang="en-US" dirty="0"/>
-              <a:t>For each important business goal scenario, have the participants describe a QA and response measure value that would help achieve the goal.</a:t>
-            </a:r>
-            <a:endParaRPr lang="en-US" dirty="0">
-              <a:solidFill>
-                <a:schemeClr val="accent4">
-                  <a:lumMod val="50000"/>
-                </a:schemeClr>
-              </a:solidFill>
-            </a:endParaRPr>
-          </a:p>
-          <a:p>
-            <a:r>
-              <a:rPr lang="en-US" dirty="0"/>
-              <a:t>Using of categories for asking the stakeholders about business goals in each category, some assurance of coverage is gained.</a:t>
-            </a:r>
-          </a:p>
-          <a:p>
-            <a:pPr lvl="1"/>
-            <a:r>
-              <a:rPr lang="en-US" dirty="0"/>
-              <a:t>Growth and continuity of the organization</a:t>
-            </a:r>
-          </a:p>
-          <a:p>
-            <a:pPr lvl="1"/>
-            <a:r>
-              <a:rPr lang="en-US" dirty="0"/>
-              <a:t>Meeting financial objectives</a:t>
-            </a:r>
-          </a:p>
-          <a:p>
-            <a:pPr lvl="1"/>
-            <a:r>
-              <a:rPr lang="en-US" dirty="0"/>
-              <a:t>Meeting personal objectives</a:t>
-            </a:r>
-          </a:p>
-          <a:p>
-            <a:pPr lvl="1"/>
-            <a:r>
-              <a:rPr lang="en-US" dirty="0"/>
-              <a:t>Meeting responsibility to the employees</a:t>
-            </a:r>
-          </a:p>
-          <a:p>
-            <a:pPr lvl="1"/>
-            <a:r>
-              <a:rPr lang="en-US" dirty="0"/>
-              <a:t>Meeting responsibility to society</a:t>
-            </a:r>
-          </a:p>
-          <a:p>
-            <a:pPr lvl="1"/>
-            <a:r>
-              <a:rPr lang="en-US" dirty="0"/>
-              <a:t>Meeting responsibility to the state</a:t>
-            </a:r>
-          </a:p>
-          <a:p>
-            <a:pPr lvl="1"/>
-            <a:r>
-              <a:rPr lang="en-US" dirty="0"/>
-              <a:t>Meeting responsibility to the shareholders</a:t>
-            </a:r>
-          </a:p>
-          <a:p>
-            <a:pPr lvl="1"/>
-            <a:r>
-              <a:rPr lang="en-US" dirty="0"/>
-              <a:t>…</a:t>
-            </a:r>
+              <a:t>Using the categories given later in this section to guide the discussion, capture from stakeholders the set of important business goals for this system.</a:t>
+            </a:r>
+          </a:p>
+          <a:p>
+            <a:pPr lvl="1" indent="0">
+              <a:buNone/>
+            </a:pPr>
+            <a:endParaRPr lang="en-US" dirty="0"/>
           </a:p>
         </p:txBody>
       </p:sp>
@@ -4455,7 +4659,7 @@
           <p:cNvPr id="3" name="Title 2">
             <a:extLst>
               <a:ext uri="{FF2B5EF4-FFF2-40B4-BE49-F238E27FC236}">
-                <a16:creationId xmlns:a16="http://schemas.microsoft.com/office/drawing/2014/main" id="{9838E1F2-D5AA-D40B-C86D-4B23A493766D}"/>
+                <a16:creationId xmlns:a16="http://schemas.microsoft.com/office/drawing/2014/main" id="{5E571760-8D24-A9A5-82F5-42A12FE4F6CB}"/>
               </a:ext>
             </a:extLst>
           </p:cNvPr>
@@ -4483,7 +4687,7 @@
           <p:cNvPr id="4" name="Slide Number Placeholder 3">
             <a:extLst>
               <a:ext uri="{FF2B5EF4-FFF2-40B4-BE49-F238E27FC236}">
-                <a16:creationId xmlns:a16="http://schemas.microsoft.com/office/drawing/2014/main" id="{DC78484B-E629-602F-1257-2DC8031A0AFD}"/>
+                <a16:creationId xmlns:a16="http://schemas.microsoft.com/office/drawing/2014/main" id="{7CDF4EBF-35FE-CB5E-8C2B-2566CF9A9F38}"/>
               </a:ext>
             </a:extLst>
           </p:cNvPr>
@@ -4511,7 +4715,7 @@
     </p:spTree>
     <p:extLst>
       <p:ext uri="{BB962C8B-B14F-4D97-AF65-F5344CB8AC3E}">
-        <p14:creationId xmlns:p14="http://schemas.microsoft.com/office/powerpoint/2010/main" val="1377699281"/>
+        <p14:creationId xmlns:p14="http://schemas.microsoft.com/office/powerpoint/2010/main" val="1924475710"/>
       </p:ext>
     </p:extLst>
   </p:cSld>
@@ -4543,7 +4747,7 @@
           <p:cNvPr id="2" name="Content Placeholder 1">
             <a:extLst>
               <a:ext uri="{FF2B5EF4-FFF2-40B4-BE49-F238E27FC236}">
-                <a16:creationId xmlns:a16="http://schemas.microsoft.com/office/drawing/2014/main" id="{198F7037-2926-54BD-9FB8-984E5EABB6B8}"/>
+                <a16:creationId xmlns:a16="http://schemas.microsoft.com/office/drawing/2014/main" id="{6C5273C9-BBFE-188E-DF0B-550AA3A8423C}"/>
               </a:ext>
             </a:extLst>
           </p:cNvPr>
@@ -4559,79 +4763,92 @@
           <a:bodyPr/>
           <a:lstStyle/>
           <a:p>
-            <a:r>
-              <a:rPr lang="en-US" dirty="0"/>
-              <a:t>Architects can use a construct called a </a:t>
-            </a:r>
+            <a:pPr lvl="1"/>
             <a:r>
               <a:rPr lang="en-US" dirty="0">
                 <a:solidFill>
-                  <a:schemeClr val="accent1"/>
+                  <a:schemeClr val="accent4">
+                    <a:lumMod val="50000"/>
+                  </a:schemeClr>
                 </a:solidFill>
               </a:rPr>
-              <a:t>utility tree</a:t>
-            </a:r>
-            <a:r>
-              <a:rPr lang="en-US" dirty="0"/>
-              <a:t> when the stakeholders are not available.</a:t>
+              <a:t>Step 2: Identify potential QAs from business goals.</a:t>
+            </a:r>
+          </a:p>
+          <a:p>
+            <a:pPr lvl="2"/>
+            <a:r>
+              <a:rPr lang="en-US" dirty="0"/>
+              <a:t>For each important business goal scenario, have the participants describe a QA and response measure value that would help achieve the goal.</a:t>
+            </a:r>
+            <a:endParaRPr lang="en-US" dirty="0">
+              <a:solidFill>
+                <a:schemeClr val="accent4">
+                  <a:lumMod val="50000"/>
+                </a:schemeClr>
+              </a:solidFill>
+            </a:endParaRPr>
+          </a:p>
+          <a:p>
+            <a:r>
+              <a:rPr lang="en-US" dirty="0"/>
+              <a:t>Using of categories for asking the stakeholders about business goals in each category, some assurance of coverage is gained.</a:t>
             </a:r>
           </a:p>
           <a:p>
             <a:pPr lvl="1"/>
             <a:r>
               <a:rPr lang="en-US" dirty="0"/>
-              <a:t>Of course, the real world, it is often the case that you do not have access to stakeholders when you need them.</a:t>
-            </a:r>
-          </a:p>
-          <a:p>
-            <a:r>
-              <a:rPr lang="en-US" dirty="0"/>
-              <a:t>A utility tree begins with the word </a:t>
-            </a:r>
-            <a:r>
-              <a:rPr lang="en-US" dirty="0">
-                <a:solidFill>
-                  <a:schemeClr val="accent1"/>
-                </a:solidFill>
-              </a:rPr>
-              <a:t>Utility</a:t>
-            </a:r>
-            <a:r>
-              <a:rPr lang="en-US" dirty="0"/>
-              <a:t> as the root node. Utility is an expression of the overall </a:t>
-            </a:r>
-            <a:r>
-              <a:rPr lang="en-US" dirty="0">
-                <a:solidFill>
-                  <a:schemeClr val="accent1"/>
-                </a:solidFill>
-              </a:rPr>
-              <a:t>goodness</a:t>
-            </a:r>
-            <a:r>
-              <a:rPr lang="en-US" dirty="0"/>
-              <a:t> of the system.</a:t>
+              <a:t>Growth and continuity of the organization</a:t>
             </a:r>
           </a:p>
           <a:p>
             <a:pPr lvl="1"/>
             <a:r>
               <a:rPr lang="en-US" dirty="0"/>
-              <a:t>You then elaborate on this root node by listing the major QAs that the system is required to exhibit.</a:t>
+              <a:t>Meeting financial objectives</a:t>
             </a:r>
           </a:p>
           <a:p>
             <a:pPr lvl="1"/>
             <a:r>
               <a:rPr lang="en-US" dirty="0"/>
-              <a:t>Under each QA, record specific refinements of that QA. For example, performance might be decomposed into “data latency” and “transaction throughput” or, alternatively, “user wait time” and “time to refresh web page”.</a:t>
+              <a:t>Meeting personal objectives</a:t>
             </a:r>
           </a:p>
           <a:p>
             <a:pPr lvl="1"/>
             <a:r>
               <a:rPr lang="en-US" dirty="0"/>
-              <a:t>Under each refinement, you can then record the specific ASRs, expressed as QA scenarios.</a:t>
+              <a:t>Meeting responsibility to the employees</a:t>
+            </a:r>
+          </a:p>
+          <a:p>
+            <a:pPr lvl="1"/>
+            <a:r>
+              <a:rPr lang="en-US" dirty="0"/>
+              <a:t>Meeting responsibility to society</a:t>
+            </a:r>
+          </a:p>
+          <a:p>
+            <a:pPr lvl="1"/>
+            <a:r>
+              <a:rPr lang="en-US" dirty="0"/>
+              <a:t>Meeting responsibility to the state</a:t>
+            </a:r>
+          </a:p>
+          <a:p>
+            <a:pPr lvl="1"/>
+            <a:r>
+              <a:rPr lang="en-US" dirty="0"/>
+              <a:t>Meeting responsibility to the shareholders</a:t>
+            </a:r>
+          </a:p>
+          <a:p>
+            <a:pPr lvl="1"/>
+            <a:r>
+              <a:rPr lang="en-US" dirty="0"/>
+              <a:t>…</a:t>
             </a:r>
           </a:p>
         </p:txBody>
@@ -4641,7 +4858,7 @@
           <p:cNvPr id="3" name="Title 2">
             <a:extLst>
               <a:ext uri="{FF2B5EF4-FFF2-40B4-BE49-F238E27FC236}">
-                <a16:creationId xmlns:a16="http://schemas.microsoft.com/office/drawing/2014/main" id="{99EA9F47-17D6-2E2D-6AD2-6A7275C0DB8B}"/>
+                <a16:creationId xmlns:a16="http://schemas.microsoft.com/office/drawing/2014/main" id="{9838E1F2-D5AA-D40B-C86D-4B23A493766D}"/>
               </a:ext>
             </a:extLst>
           </p:cNvPr>
@@ -4659,7 +4876,7 @@
           <a:p>
             <a:r>
               <a:rPr lang="en-US" dirty="0"/>
-              <a:t>19.4 ASRs From Utility Tree</a:t>
+              <a:t>19.3 ASRs From Business Goals</a:t>
             </a:r>
           </a:p>
         </p:txBody>
@@ -4669,7 +4886,7 @@
           <p:cNvPr id="4" name="Slide Number Placeholder 3">
             <a:extLst>
               <a:ext uri="{FF2B5EF4-FFF2-40B4-BE49-F238E27FC236}">
-                <a16:creationId xmlns:a16="http://schemas.microsoft.com/office/drawing/2014/main" id="{AEF39BC4-452D-49B2-0461-273F15AD2731}"/>
+                <a16:creationId xmlns:a16="http://schemas.microsoft.com/office/drawing/2014/main" id="{DC78484B-E629-602F-1257-2DC8031A0AFD}"/>
               </a:ext>
             </a:extLst>
           </p:cNvPr>
@@ -4697,7 +4914,7 @@
     </p:spTree>
     <p:extLst>
       <p:ext uri="{BB962C8B-B14F-4D97-AF65-F5344CB8AC3E}">
-        <p14:creationId xmlns:p14="http://schemas.microsoft.com/office/powerpoint/2010/main" val="1177055747"/>
+        <p14:creationId xmlns:p14="http://schemas.microsoft.com/office/powerpoint/2010/main" val="1377699281"/>
       </p:ext>
     </p:extLst>
   </p:cSld>
@@ -4729,7 +4946,7 @@
           <p:cNvPr id="2" name="Content Placeholder 1">
             <a:extLst>
               <a:ext uri="{FF2B5EF4-FFF2-40B4-BE49-F238E27FC236}">
-                <a16:creationId xmlns:a16="http://schemas.microsoft.com/office/drawing/2014/main" id="{2E13D1AD-93D5-5E30-0BAD-90458C673CBC}"/>
+                <a16:creationId xmlns:a16="http://schemas.microsoft.com/office/drawing/2014/main" id="{198F7037-2926-54BD-9FB8-984E5EABB6B8}"/>
               </a:ext>
             </a:extLst>
           </p:cNvPr>
@@ -4745,171 +4962,79 @@
           <a:bodyPr/>
           <a:lstStyle/>
           <a:p>
+            <a:r>
+              <a:rPr lang="en-US" dirty="0"/>
+              <a:t>Architects can use a construct called a </a:t>
+            </a:r>
+            <a:r>
+              <a:rPr lang="en-US" dirty="0">
+                <a:solidFill>
+                  <a:schemeClr val="accent1"/>
+                </a:solidFill>
+              </a:rPr>
+              <a:t>utility tree</a:t>
+            </a:r>
+            <a:r>
+              <a:rPr lang="en-US" dirty="0"/>
+              <a:t> when the stakeholders are not available.</a:t>
+            </a:r>
+          </a:p>
+          <a:p>
             <a:pPr lvl="1"/>
             <a:r>
               <a:rPr lang="en-US" dirty="0"/>
-              <a:t>Once the ASRs are recorded as scenarios and placed at the leaves of the tree, you can evaluate these scenarios against two criteria:</a:t>
-            </a:r>
-          </a:p>
-          <a:p>
-            <a:pPr lvl="2"/>
-            <a:r>
-              <a:rPr lang="en-US" dirty="0"/>
-              <a:t>the business value of the candidate scenario </a:t>
-            </a:r>
-          </a:p>
-          <a:p>
-            <a:pPr lvl="2"/>
-            <a:r>
-              <a:rPr lang="en-US" dirty="0"/>
-              <a:t>the technical risk of achieving it</a:t>
+              <a:t>Of course, the real world, it is often the case that you do not have access to stakeholders when you need them.</a:t>
+            </a:r>
+          </a:p>
+          <a:p>
+            <a:r>
+              <a:rPr lang="en-US" dirty="0"/>
+              <a:t>A utility tree begins with the word </a:t>
+            </a:r>
+            <a:r>
+              <a:rPr lang="en-US" dirty="0">
+                <a:solidFill>
+                  <a:schemeClr val="accent1"/>
+                </a:solidFill>
+              </a:rPr>
+              <a:t>Utility</a:t>
+            </a:r>
+            <a:r>
+              <a:rPr lang="en-US" dirty="0"/>
+              <a:t> as the root node. Utility is an expression of the overall </a:t>
+            </a:r>
+            <a:r>
+              <a:rPr lang="en-US" dirty="0">
+                <a:solidFill>
+                  <a:schemeClr val="accent1"/>
+                </a:solidFill>
+              </a:rPr>
+              <a:t>goodness</a:t>
+            </a:r>
+            <a:r>
+              <a:rPr lang="en-US" dirty="0"/>
+              <a:t> of the system.</a:t>
             </a:r>
           </a:p>
           <a:p>
             <a:pPr lvl="1"/>
             <a:r>
               <a:rPr lang="en-US" dirty="0"/>
-              <a:t>You can use any scale you like, but we find that a simple “</a:t>
-            </a:r>
-            <a:r>
-              <a:rPr lang="en-US" dirty="0">
-                <a:solidFill>
-                  <a:schemeClr val="accent1"/>
-                </a:solidFill>
-              </a:rPr>
-              <a:t>H</a:t>
-            </a:r>
-            <a:r>
-              <a:rPr lang="en-US" dirty="0"/>
-              <a:t>” (high), “</a:t>
-            </a:r>
-            <a:r>
-              <a:rPr lang="en-US" dirty="0">
-                <a:solidFill>
-                  <a:schemeClr val="accent1"/>
-                </a:solidFill>
-              </a:rPr>
-              <a:t>M</a:t>
-            </a:r>
-            <a:r>
-              <a:rPr lang="en-US" dirty="0"/>
-              <a:t>” (medium), and “</a:t>
-            </a:r>
-            <a:r>
-              <a:rPr lang="en-US" dirty="0">
-                <a:solidFill>
-                  <a:schemeClr val="accent1"/>
-                </a:solidFill>
-              </a:rPr>
-              <a:t>L</a:t>
-            </a:r>
-            <a:r>
-              <a:rPr lang="en-US" dirty="0"/>
-              <a:t>” (low) scoring system suffices for each criterion.</a:t>
+              <a:t>You then elaborate on this root node by listing the major QAs that the system is required to exhibit.</a:t>
             </a:r>
           </a:p>
           <a:p>
             <a:pPr lvl="1"/>
             <a:r>
               <a:rPr lang="en-US" dirty="0"/>
-              <a:t>For business value</a:t>
-            </a:r>
-          </a:p>
-          <a:p>
-            <a:pPr lvl="2"/>
-            <a:r>
-              <a:rPr lang="en-US" dirty="0">
-                <a:solidFill>
-                  <a:schemeClr val="accent1"/>
-                </a:solidFill>
-              </a:rPr>
-              <a:t>high</a:t>
-            </a:r>
-            <a:r>
-              <a:rPr lang="en-US" dirty="0"/>
-              <a:t> designates a must-have requirement</a:t>
-            </a:r>
-          </a:p>
-          <a:p>
-            <a:pPr lvl="2"/>
-            <a:r>
-              <a:rPr lang="en-US" dirty="0">
-                <a:solidFill>
-                  <a:schemeClr val="accent1"/>
-                </a:solidFill>
-              </a:rPr>
-              <a:t>medium</a:t>
-            </a:r>
-            <a:r>
-              <a:rPr lang="en-US" dirty="0"/>
-              <a:t> means the requirement is important but would not lead to project failure were it omitted,</a:t>
-            </a:r>
-          </a:p>
-          <a:p>
-            <a:pPr lvl="2"/>
-            <a:r>
-              <a:rPr lang="en-US" dirty="0">
-                <a:solidFill>
-                  <a:schemeClr val="accent1"/>
-                </a:solidFill>
-              </a:rPr>
-              <a:t>low</a:t>
-            </a:r>
-            <a:r>
-              <a:rPr lang="en-US" dirty="0"/>
-              <a:t> describes a nice requirement to meet but not something worth much effort.</a:t>
+              <a:t>Under each QA, record specific refinements of that QA. For example, performance might be decomposed into “data latency” and “transaction throughput” or, alternatively, “user wait time” and “time to refresh web page”.</a:t>
             </a:r>
           </a:p>
           <a:p>
             <a:pPr lvl="1"/>
             <a:r>
               <a:rPr lang="en-US" dirty="0"/>
-              <a:t>For technical risk,</a:t>
-            </a:r>
-          </a:p>
-          <a:p>
-            <a:pPr lvl="2"/>
-            <a:r>
-              <a:rPr lang="en-US" dirty="0">
-                <a:solidFill>
-                  <a:schemeClr val="accent1"/>
-                </a:solidFill>
-              </a:rPr>
-              <a:t>high</a:t>
-            </a:r>
-            <a:r>
-              <a:rPr lang="en-US" dirty="0"/>
-              <a:t> means that meeting this ASR is keeping you awake at night</a:t>
-            </a:r>
-          </a:p>
-          <a:p>
-            <a:pPr lvl="2"/>
-            <a:r>
-              <a:rPr lang="en-US" dirty="0">
-                <a:solidFill>
-                  <a:schemeClr val="accent1"/>
-                </a:solidFill>
-              </a:rPr>
-              <a:t>medium</a:t>
-            </a:r>
-            <a:r>
-              <a:rPr lang="en-US" dirty="0"/>
-              <a:t> means meeting this ASR is concerning but does not carry a high risk </a:t>
-            </a:r>
-          </a:p>
-          <a:p>
-            <a:pPr lvl="2"/>
-            <a:r>
-              <a:rPr lang="en-US" dirty="0">
-                <a:solidFill>
-                  <a:schemeClr val="accent1"/>
-                </a:solidFill>
-              </a:rPr>
-              <a:t>low</a:t>
-            </a:r>
-            <a:r>
-              <a:rPr lang="en-US" dirty="0"/>
-              <a:t> means that you have confidence in your ability to meet this ASR.</a:t>
+              <a:t>Under each refinement, you can then record the specific ASRs, expressed as QA scenarios.</a:t>
             </a:r>
           </a:p>
         </p:txBody>
@@ -4919,7 +5044,7 @@
           <p:cNvPr id="3" name="Title 2">
             <a:extLst>
               <a:ext uri="{FF2B5EF4-FFF2-40B4-BE49-F238E27FC236}">
-                <a16:creationId xmlns:a16="http://schemas.microsoft.com/office/drawing/2014/main" id="{261C51BF-D31F-61AC-E284-19B2FDA42F36}"/>
+                <a16:creationId xmlns:a16="http://schemas.microsoft.com/office/drawing/2014/main" id="{99EA9F47-17D6-2E2D-6AD2-6A7275C0DB8B}"/>
               </a:ext>
             </a:extLst>
           </p:cNvPr>
@@ -4947,7 +5072,7 @@
           <p:cNvPr id="4" name="Slide Number Placeholder 3">
             <a:extLst>
               <a:ext uri="{FF2B5EF4-FFF2-40B4-BE49-F238E27FC236}">
-                <a16:creationId xmlns:a16="http://schemas.microsoft.com/office/drawing/2014/main" id="{06DD176A-F868-22EA-0397-8C08CDD5B3CB}"/>
+                <a16:creationId xmlns:a16="http://schemas.microsoft.com/office/drawing/2014/main" id="{AEF39BC4-452D-49B2-0461-273F15AD2731}"/>
               </a:ext>
             </a:extLst>
           </p:cNvPr>
@@ -4975,7 +5100,7 @@
     </p:spTree>
     <p:extLst>
       <p:ext uri="{BB962C8B-B14F-4D97-AF65-F5344CB8AC3E}">
-        <p14:creationId xmlns:p14="http://schemas.microsoft.com/office/powerpoint/2010/main" val="2936563643"/>
+        <p14:creationId xmlns:p14="http://schemas.microsoft.com/office/powerpoint/2010/main" val="1177055747"/>
       </p:ext>
     </p:extLst>
   </p:cSld>
@@ -5093,7 +5218,7 @@
           <p:cNvPr id="2" name="Content Placeholder 1">
             <a:extLst>
               <a:ext uri="{FF2B5EF4-FFF2-40B4-BE49-F238E27FC236}">
-                <a16:creationId xmlns:a16="http://schemas.microsoft.com/office/drawing/2014/main" id="{DCE1EC38-5EF7-715C-D8F2-5E9B86C3D27D}"/>
+                <a16:creationId xmlns:a16="http://schemas.microsoft.com/office/drawing/2014/main" id="{2E13D1AD-93D5-5E30-0BAD-90458C673CBC}"/>
               </a:ext>
             </a:extLst>
           </p:cNvPr>
@@ -5109,23 +5234,171 @@
           <a:bodyPr/>
           <a:lstStyle/>
           <a:p>
-            <a:r>
-              <a:rPr lang="en-US" dirty="0"/>
-              <a:t>Once you have a utility tree filled out, you can use it to make important checks. For instance:</a:t>
-            </a:r>
-          </a:p>
-          <a:p>
             <a:pPr lvl="1"/>
             <a:r>
               <a:rPr lang="en-US" dirty="0"/>
-              <a:t>A QA or QA refinement without any ASR scenario is not necessarily an error but rather an indication that you should investigate whether there are unrecorded ASR scenarios in that area.</a:t>
+              <a:t>Once the ASRs are recorded as scenarios and placed at the leaves of the tree, you can evaluate these scenarios against two criteria:</a:t>
+            </a:r>
+          </a:p>
+          <a:p>
+            <a:pPr lvl="2"/>
+            <a:r>
+              <a:rPr lang="en-US" dirty="0"/>
+              <a:t>the business value of the candidate scenario </a:t>
+            </a:r>
+          </a:p>
+          <a:p>
+            <a:pPr lvl="2"/>
+            <a:r>
+              <a:rPr lang="en-US" dirty="0"/>
+              <a:t>the technical risk of achieving it</a:t>
             </a:r>
           </a:p>
           <a:p>
             <a:pPr lvl="1"/>
             <a:r>
               <a:rPr lang="en-US" dirty="0"/>
-              <a:t>ASR scenarios that receive a (H, H) rating are obviously the ones that deserve the most attention from you; these are the most significant of the significant requirements.</a:t>
+              <a:t>You can use any scale you like, but we find that a simple “</a:t>
+            </a:r>
+            <a:r>
+              <a:rPr lang="en-US" dirty="0">
+                <a:solidFill>
+                  <a:schemeClr val="accent1"/>
+                </a:solidFill>
+              </a:rPr>
+              <a:t>H</a:t>
+            </a:r>
+            <a:r>
+              <a:rPr lang="en-US" dirty="0"/>
+              <a:t>” (high), “</a:t>
+            </a:r>
+            <a:r>
+              <a:rPr lang="en-US" dirty="0">
+                <a:solidFill>
+                  <a:schemeClr val="accent1"/>
+                </a:solidFill>
+              </a:rPr>
+              <a:t>M</a:t>
+            </a:r>
+            <a:r>
+              <a:rPr lang="en-US" dirty="0"/>
+              <a:t>” (medium), and “</a:t>
+            </a:r>
+            <a:r>
+              <a:rPr lang="en-US" dirty="0">
+                <a:solidFill>
+                  <a:schemeClr val="accent1"/>
+                </a:solidFill>
+              </a:rPr>
+              <a:t>L</a:t>
+            </a:r>
+            <a:r>
+              <a:rPr lang="en-US" dirty="0"/>
+              <a:t>” (low) scoring system suffices for each criterion.</a:t>
+            </a:r>
+          </a:p>
+          <a:p>
+            <a:pPr lvl="1"/>
+            <a:r>
+              <a:rPr lang="en-US" dirty="0"/>
+              <a:t>For business value</a:t>
+            </a:r>
+          </a:p>
+          <a:p>
+            <a:pPr lvl="2"/>
+            <a:r>
+              <a:rPr lang="en-US" dirty="0">
+                <a:solidFill>
+                  <a:schemeClr val="accent1"/>
+                </a:solidFill>
+              </a:rPr>
+              <a:t>high</a:t>
+            </a:r>
+            <a:r>
+              <a:rPr lang="en-US" dirty="0"/>
+              <a:t> designates a must-have requirement</a:t>
+            </a:r>
+          </a:p>
+          <a:p>
+            <a:pPr lvl="2"/>
+            <a:r>
+              <a:rPr lang="en-US" dirty="0">
+                <a:solidFill>
+                  <a:schemeClr val="accent1"/>
+                </a:solidFill>
+              </a:rPr>
+              <a:t>medium</a:t>
+            </a:r>
+            <a:r>
+              <a:rPr lang="en-US" dirty="0"/>
+              <a:t> means the requirement is important but would not lead to project failure were it omitted,</a:t>
+            </a:r>
+          </a:p>
+          <a:p>
+            <a:pPr lvl="2"/>
+            <a:r>
+              <a:rPr lang="en-US" dirty="0">
+                <a:solidFill>
+                  <a:schemeClr val="accent1"/>
+                </a:solidFill>
+              </a:rPr>
+              <a:t>low</a:t>
+            </a:r>
+            <a:r>
+              <a:rPr lang="en-US" dirty="0"/>
+              <a:t> describes a nice requirement to meet but not something worth much effort.</a:t>
+            </a:r>
+          </a:p>
+          <a:p>
+            <a:pPr lvl="1"/>
+            <a:r>
+              <a:rPr lang="en-US" dirty="0"/>
+              <a:t>For technical risk,</a:t>
+            </a:r>
+          </a:p>
+          <a:p>
+            <a:pPr lvl="2"/>
+            <a:r>
+              <a:rPr lang="en-US" dirty="0">
+                <a:solidFill>
+                  <a:schemeClr val="accent1"/>
+                </a:solidFill>
+              </a:rPr>
+              <a:t>high</a:t>
+            </a:r>
+            <a:r>
+              <a:rPr lang="en-US" dirty="0"/>
+              <a:t> means that meeting this ASR is keeping you awake at night</a:t>
+            </a:r>
+          </a:p>
+          <a:p>
+            <a:pPr lvl="2"/>
+            <a:r>
+              <a:rPr lang="en-US" dirty="0">
+                <a:solidFill>
+                  <a:schemeClr val="accent1"/>
+                </a:solidFill>
+              </a:rPr>
+              <a:t>medium</a:t>
+            </a:r>
+            <a:r>
+              <a:rPr lang="en-US" dirty="0"/>
+              <a:t> means meeting this ASR is concerning but does not carry a high risk </a:t>
+            </a:r>
+          </a:p>
+          <a:p>
+            <a:pPr lvl="2"/>
+            <a:r>
+              <a:rPr lang="en-US" dirty="0">
+                <a:solidFill>
+                  <a:schemeClr val="accent1"/>
+                </a:solidFill>
+              </a:rPr>
+              <a:t>low</a:t>
+            </a:r>
+            <a:r>
+              <a:rPr lang="en-US" dirty="0"/>
+              <a:t> means that you have confidence in your ability to meet this ASR.</a:t>
             </a:r>
           </a:p>
         </p:txBody>
@@ -5135,7 +5408,7 @@
           <p:cNvPr id="3" name="Title 2">
             <a:extLst>
               <a:ext uri="{FF2B5EF4-FFF2-40B4-BE49-F238E27FC236}">
-                <a16:creationId xmlns:a16="http://schemas.microsoft.com/office/drawing/2014/main" id="{442BA08A-1AA8-7349-C3B3-0F2DF0B121BD}"/>
+                <a16:creationId xmlns:a16="http://schemas.microsoft.com/office/drawing/2014/main" id="{261C51BF-D31F-61AC-E284-19B2FDA42F36}"/>
               </a:ext>
             </a:extLst>
           </p:cNvPr>
@@ -5163,7 +5436,7 @@
           <p:cNvPr id="4" name="Slide Number Placeholder 3">
             <a:extLst>
               <a:ext uri="{FF2B5EF4-FFF2-40B4-BE49-F238E27FC236}">
-                <a16:creationId xmlns:a16="http://schemas.microsoft.com/office/drawing/2014/main" id="{BF86827B-3688-F3A4-A8F2-7BF3065B1F61}"/>
+                <a16:creationId xmlns:a16="http://schemas.microsoft.com/office/drawing/2014/main" id="{06DD176A-F868-22EA-0397-8C08CDD5B3CB}"/>
               </a:ext>
             </a:extLst>
           </p:cNvPr>
@@ -5191,7 +5464,7 @@
     </p:spTree>
     <p:extLst>
       <p:ext uri="{BB962C8B-B14F-4D97-AF65-F5344CB8AC3E}">
-        <p14:creationId xmlns:p14="http://schemas.microsoft.com/office/powerpoint/2010/main" val="659875520"/>
+        <p14:creationId xmlns:p14="http://schemas.microsoft.com/office/powerpoint/2010/main" val="2936563643"/>
       </p:ext>
     </p:extLst>
   </p:cSld>
@@ -5218,69 +5491,72 @@
           <a:chExt cx="0" cy="0"/>
         </a:xfrm>
       </p:grpSpPr>
-      <p:pic>
-        <p:nvPicPr>
-          <p:cNvPr id="6" name="Picture Placeholder 5">
-            <a:extLst>
-              <a:ext uri="{FF2B5EF4-FFF2-40B4-BE49-F238E27FC236}">
-                <a16:creationId xmlns:a16="http://schemas.microsoft.com/office/drawing/2014/main" id="{8AAFBBE4-E28B-7CB1-A7FA-1851933F9FCB}"/>
-              </a:ext>
-            </a:extLst>
-          </p:cNvPr>
-          <p:cNvPicPr>
-            <a:picLocks noGrp="1" noChangeAspect="1"/>
-          </p:cNvPicPr>
-          <p:nvPr>
-            <p:ph type="pic" sz="quarter" idx="11"/>
-          </p:nvPr>
-        </p:nvPicPr>
-        <p:blipFill rotWithShape="1">
-          <a:blip r:embed="rId2">
-            <a:extLst>
-              <a:ext uri="{28A0092B-C50C-407E-A947-70E740481C1C}">
-                <a14:useLocalDpi xmlns:a14="http://schemas.microsoft.com/office/drawing/2010/main" val="0"/>
-              </a:ext>
-            </a:extLst>
-          </a:blip>
-          <a:srcRect l="-38527" t="1339" r="-38527"/>
-          <a:stretch/>
-        </p:blipFill>
-        <p:spPr>
-          <a:xfrm>
-            <a:off x="1226228" y="489334"/>
-            <a:ext cx="9740579" cy="5405717"/>
-          </a:xfrm>
-        </p:spPr>
-      </p:pic>
-      <p:sp>
-        <p:nvSpPr>
-          <p:cNvPr id="3" name="Text Placeholder 2">
-            <a:extLst>
-              <a:ext uri="{FF2B5EF4-FFF2-40B4-BE49-F238E27FC236}">
-                <a16:creationId xmlns:a16="http://schemas.microsoft.com/office/drawing/2014/main" id="{744AA59E-6FA6-87E5-5D26-97B5DD59E17F}"/>
-              </a:ext>
-            </a:extLst>
-          </p:cNvPr>
-          <p:cNvSpPr>
-            <a:spLocks noGrp="1"/>
-          </p:cNvSpPr>
-          <p:nvPr>
-            <p:ph type="body" sz="quarter" idx="12"/>
-          </p:nvPr>
-        </p:nvSpPr>
-        <p:spPr>
-          <a:xfrm>
-            <a:off x="555625" y="5997388"/>
-            <a:ext cx="11036300" cy="564777"/>
-          </a:xfrm>
-        </p:spPr>
+      <p:sp>
+        <p:nvSpPr>
+          <p:cNvPr id="2" name="Content Placeholder 1">
+            <a:extLst>
+              <a:ext uri="{FF2B5EF4-FFF2-40B4-BE49-F238E27FC236}">
+                <a16:creationId xmlns:a16="http://schemas.microsoft.com/office/drawing/2014/main" id="{DCE1EC38-5EF7-715C-D8F2-5E9B86C3D27D}"/>
+              </a:ext>
+            </a:extLst>
+          </p:cNvPr>
+          <p:cNvSpPr>
+            <a:spLocks noGrp="1"/>
+          </p:cNvSpPr>
+          <p:nvPr>
+            <p:ph sz="half" idx="2"/>
+          </p:nvPr>
+        </p:nvSpPr>
+        <p:spPr/>
         <p:txBody>
           <a:bodyPr/>
           <a:lstStyle/>
           <a:p>
             <a:r>
               <a:rPr lang="en-US" dirty="0"/>
-              <a:t>Tabular Form of the Utility Tree for a System in the Healthcare Space</a:t>
+              <a:t>Once you have a utility tree filled out, you can use it to make important checks. For instance:</a:t>
+            </a:r>
+          </a:p>
+          <a:p>
+            <a:pPr lvl="1"/>
+            <a:r>
+              <a:rPr lang="en-US" dirty="0"/>
+              <a:t>A QA or QA refinement without any ASR scenario is not necessarily an error but rather an indication that you should investigate whether there are unrecorded ASR scenarios in that area.</a:t>
+            </a:r>
+          </a:p>
+          <a:p>
+            <a:pPr lvl="1"/>
+            <a:r>
+              <a:rPr lang="en-US" dirty="0"/>
+              <a:t>ASR scenarios that receive a (H, H) rating are obviously the ones that deserve the most attention from you; these are the most significant of the significant requirements.</a:t>
+            </a:r>
+          </a:p>
+        </p:txBody>
+      </p:sp>
+      <p:sp>
+        <p:nvSpPr>
+          <p:cNvPr id="3" name="Title 2">
+            <a:extLst>
+              <a:ext uri="{FF2B5EF4-FFF2-40B4-BE49-F238E27FC236}">
+                <a16:creationId xmlns:a16="http://schemas.microsoft.com/office/drawing/2014/main" id="{442BA08A-1AA8-7349-C3B3-0F2DF0B121BD}"/>
+              </a:ext>
+            </a:extLst>
+          </p:cNvPr>
+          <p:cNvSpPr>
+            <a:spLocks noGrp="1"/>
+          </p:cNvSpPr>
+          <p:nvPr>
+            <p:ph type="title"/>
+          </p:nvPr>
+        </p:nvSpPr>
+        <p:spPr/>
+        <p:txBody>
+          <a:bodyPr/>
+          <a:lstStyle/>
+          <a:p>
+            <a:r>
+              <a:rPr lang="en-US" dirty="0"/>
+              <a:t>19.4 ASRs From Utility Tree</a:t>
             </a:r>
           </a:p>
         </p:txBody>
@@ -5290,15 +5566,15 @@
           <p:cNvPr id="4" name="Slide Number Placeholder 3">
             <a:extLst>
               <a:ext uri="{FF2B5EF4-FFF2-40B4-BE49-F238E27FC236}">
-                <a16:creationId xmlns:a16="http://schemas.microsoft.com/office/drawing/2014/main" id="{194873B5-6D10-C2EA-CBB3-4D46C01AD8D7}"/>
-              </a:ext>
-            </a:extLst>
-          </p:cNvPr>
-          <p:cNvSpPr>
-            <a:spLocks noGrp="1"/>
-          </p:cNvSpPr>
-          <p:nvPr>
-            <p:ph type="sldNum" sz="quarter" idx="13"/>
+                <a16:creationId xmlns:a16="http://schemas.microsoft.com/office/drawing/2014/main" id="{BF86827B-3688-F3A4-A8F2-7BF3065B1F61}"/>
+              </a:ext>
+            </a:extLst>
+          </p:cNvPr>
+          <p:cNvSpPr>
+            <a:spLocks noGrp="1"/>
+          </p:cNvSpPr>
+          <p:nvPr>
+            <p:ph type="sldNum" sz="quarter" idx="10"/>
           </p:nvPr>
         </p:nvSpPr>
         <p:spPr/>
@@ -5318,7 +5594,7 @@
     </p:spTree>
     <p:extLst>
       <p:ext uri="{BB962C8B-B14F-4D97-AF65-F5344CB8AC3E}">
-        <p14:creationId xmlns:p14="http://schemas.microsoft.com/office/powerpoint/2010/main" val="897258297"/>
+        <p14:creationId xmlns:p14="http://schemas.microsoft.com/office/powerpoint/2010/main" val="659875520"/>
       </p:ext>
     </p:extLst>
   </p:cSld>
@@ -5345,88 +5621,69 @@
           <a:chExt cx="0" cy="0"/>
         </a:xfrm>
       </p:grpSpPr>
-      <p:sp>
-        <p:nvSpPr>
-          <p:cNvPr id="2" name="Content Placeholder 1">
-            <a:extLst>
-              <a:ext uri="{FF2B5EF4-FFF2-40B4-BE49-F238E27FC236}">
-                <a16:creationId xmlns:a16="http://schemas.microsoft.com/office/drawing/2014/main" id="{E939A8F6-495A-E355-8FE4-FCE17007979F}"/>
-              </a:ext>
-            </a:extLst>
-          </p:cNvPr>
-          <p:cNvSpPr>
-            <a:spLocks noGrp="1"/>
-          </p:cNvSpPr>
-          <p:nvPr>
-            <p:ph sz="half" idx="2"/>
-          </p:nvPr>
-        </p:nvSpPr>
-        <p:spPr/>
+      <p:pic>
+        <p:nvPicPr>
+          <p:cNvPr id="6" name="Picture Placeholder 5">
+            <a:extLst>
+              <a:ext uri="{FF2B5EF4-FFF2-40B4-BE49-F238E27FC236}">
+                <a16:creationId xmlns:a16="http://schemas.microsoft.com/office/drawing/2014/main" id="{8AAFBBE4-E28B-7CB1-A7FA-1851933F9FCB}"/>
+              </a:ext>
+            </a:extLst>
+          </p:cNvPr>
+          <p:cNvPicPr>
+            <a:picLocks noGrp="1" noChangeAspect="1"/>
+          </p:cNvPicPr>
+          <p:nvPr>
+            <p:ph type="pic" sz="quarter" idx="11"/>
+          </p:nvPr>
+        </p:nvPicPr>
+        <p:blipFill rotWithShape="1">
+          <a:blip r:embed="rId2">
+            <a:extLst>
+              <a:ext uri="{28A0092B-C50C-407E-A947-70E740481C1C}">
+                <a14:useLocalDpi xmlns:a14="http://schemas.microsoft.com/office/drawing/2010/main" val="0"/>
+              </a:ext>
+            </a:extLst>
+          </a:blip>
+          <a:srcRect l="-38527" t="1339" r="-38527"/>
+          <a:stretch/>
+        </p:blipFill>
+        <p:spPr>
+          <a:xfrm>
+            <a:off x="1226228" y="489334"/>
+            <a:ext cx="9740579" cy="5405717"/>
+          </a:xfrm>
+        </p:spPr>
+      </p:pic>
+      <p:sp>
+        <p:nvSpPr>
+          <p:cNvPr id="3" name="Text Placeholder 2">
+            <a:extLst>
+              <a:ext uri="{FF2B5EF4-FFF2-40B4-BE49-F238E27FC236}">
+                <a16:creationId xmlns:a16="http://schemas.microsoft.com/office/drawing/2014/main" id="{744AA59E-6FA6-87E5-5D26-97B5DD59E17F}"/>
+              </a:ext>
+            </a:extLst>
+          </p:cNvPr>
+          <p:cNvSpPr>
+            <a:spLocks noGrp="1"/>
+          </p:cNvSpPr>
+          <p:nvPr>
+            <p:ph type="body" sz="quarter" idx="12"/>
+          </p:nvPr>
+        </p:nvSpPr>
+        <p:spPr>
+          <a:xfrm>
+            <a:off x="555625" y="5997388"/>
+            <a:ext cx="11036300" cy="564777"/>
+          </a:xfrm>
+        </p:spPr>
         <p:txBody>
           <a:bodyPr/>
           <a:lstStyle/>
           <a:p>
             <a:r>
               <a:rPr lang="en-US" dirty="0"/>
-              <a:t>Requirements—whether captured or not—change all the time.</a:t>
-            </a:r>
-          </a:p>
-          <a:p>
-            <a:r>
-              <a:rPr lang="en-US" dirty="0"/>
-              <a:t>Architects have to adapt and keep up, to ensure that their architectures are still the right ones that will bring success to the project.</a:t>
-            </a:r>
-          </a:p>
-          <a:p>
-            <a:r>
-              <a:rPr lang="en-US" dirty="0"/>
-              <a:t>Always keep a channel open to the key stakeholders who determine the ASRs so you can keep up with changing requirements.</a:t>
-            </a:r>
-          </a:p>
-          <a:p>
-            <a:r>
-              <a:rPr lang="en-US" dirty="0"/>
-              <a:t>Even better than keeping up with change is staying one step ahead of it.</a:t>
-            </a:r>
-          </a:p>
-          <a:p>
-            <a:r>
-              <a:rPr lang="en-US" dirty="0"/>
-              <a:t>If you get wind of a change to the ASRs, you can take preliminary steps to design for it to understand the implications.</a:t>
-            </a:r>
-          </a:p>
-          <a:p>
-            <a:r>
-              <a:rPr lang="en-US" dirty="0"/>
-              <a:t>If the change will be prohibitively expensive, sharing that information with the stakeholders will be a valuable contribution, and the earlier they know it, the better.</a:t>
-            </a:r>
-          </a:p>
-        </p:txBody>
-      </p:sp>
-      <p:sp>
-        <p:nvSpPr>
-          <p:cNvPr id="3" name="Title 2">
-            <a:extLst>
-              <a:ext uri="{FF2B5EF4-FFF2-40B4-BE49-F238E27FC236}">
-                <a16:creationId xmlns:a16="http://schemas.microsoft.com/office/drawing/2014/main" id="{20D958EE-B50E-75EF-961A-ECC948F93F7F}"/>
-              </a:ext>
-            </a:extLst>
-          </p:cNvPr>
-          <p:cNvSpPr>
-            <a:spLocks noGrp="1"/>
-          </p:cNvSpPr>
-          <p:nvPr>
-            <p:ph type="title"/>
-          </p:nvPr>
-        </p:nvSpPr>
-        <p:spPr/>
-        <p:txBody>
-          <a:bodyPr/>
-          <a:lstStyle/>
-          <a:p>
-            <a:r>
-              <a:rPr lang="en-US" dirty="0"/>
-              <a:t>19.5 Change Happens</a:t>
+              <a:t>Tabular Form of the Utility Tree for a System in the Healthcare Space</a:t>
             </a:r>
           </a:p>
         </p:txBody>
@@ -5436,15 +5693,15 @@
           <p:cNvPr id="4" name="Slide Number Placeholder 3">
             <a:extLst>
               <a:ext uri="{FF2B5EF4-FFF2-40B4-BE49-F238E27FC236}">
-                <a16:creationId xmlns:a16="http://schemas.microsoft.com/office/drawing/2014/main" id="{8E96CA32-A3AF-F463-3141-6C12AC089173}"/>
-              </a:ext>
-            </a:extLst>
-          </p:cNvPr>
-          <p:cNvSpPr>
-            <a:spLocks noGrp="1"/>
-          </p:cNvSpPr>
-          <p:nvPr>
-            <p:ph type="sldNum" sz="quarter" idx="10"/>
+                <a16:creationId xmlns:a16="http://schemas.microsoft.com/office/drawing/2014/main" id="{194873B5-6D10-C2EA-CBB3-4D46C01AD8D7}"/>
+              </a:ext>
+            </a:extLst>
+          </p:cNvPr>
+          <p:cNvSpPr>
+            <a:spLocks noGrp="1"/>
+          </p:cNvSpPr>
+          <p:nvPr>
+            <p:ph type="sldNum" sz="quarter" idx="13"/>
           </p:nvPr>
         </p:nvSpPr>
         <p:spPr/>
@@ -5464,7 +5721,7 @@
     </p:spTree>
     <p:extLst>
       <p:ext uri="{BB962C8B-B14F-4D97-AF65-F5344CB8AC3E}">
-        <p14:creationId xmlns:p14="http://schemas.microsoft.com/office/powerpoint/2010/main" val="1895953766"/>
+        <p14:creationId xmlns:p14="http://schemas.microsoft.com/office/powerpoint/2010/main" val="897258297"/>
       </p:ext>
     </p:extLst>
   </p:cSld>
@@ -5496,7 +5753,7 @@
           <p:cNvPr id="2" name="Content Placeholder 1">
             <a:extLst>
               <a:ext uri="{FF2B5EF4-FFF2-40B4-BE49-F238E27FC236}">
-                <a16:creationId xmlns:a16="http://schemas.microsoft.com/office/drawing/2014/main" id="{0915A95B-2AB4-1738-FC05-2057F32B1407}"/>
+                <a16:creationId xmlns:a16="http://schemas.microsoft.com/office/drawing/2014/main" id="{E939A8F6-495A-E355-8FE4-FCE17007979F}"/>
               </a:ext>
             </a:extLst>
           </p:cNvPr>
@@ -5514,65 +5771,38 @@
           <a:p>
             <a:r>
               <a:rPr lang="en-US" dirty="0"/>
-              <a:t>Architectures are driven by architecturally significant requirements: requirements that will have profound effects on the architecture. </a:t>
-            </a:r>
-          </a:p>
-          <a:p>
-            <a:pPr lvl="1"/>
-            <a:r>
-              <a:rPr lang="en-US" dirty="0"/>
-              <a:t>Architecturally significant requirements may be captured from requirements documents, by interviewing stakeholders, or by conducting a Quality Attribute Workshop.</a:t>
-            </a:r>
-          </a:p>
-          <a:p>
-            <a:r>
-              <a:rPr lang="en-US" dirty="0"/>
-              <a:t>Be mindful of the business goals of the organization. </a:t>
-            </a:r>
-          </a:p>
-          <a:p>
-            <a:pPr lvl="1"/>
-            <a:r>
-              <a:rPr lang="en-US" dirty="0"/>
-              <a:t>Business goals can be expressed in a common, structured form and represented as scenarios. </a:t>
-            </a:r>
-          </a:p>
-          <a:p>
-            <a:pPr lvl="1"/>
-            <a:r>
-              <a:rPr lang="en-US" dirty="0"/>
-              <a:t>Business goals may be elicited and documented using a structured facilitation method called PALM.</a:t>
-            </a:r>
-          </a:p>
-          <a:p>
-            <a:r>
-              <a:rPr lang="en-US" dirty="0"/>
-              <a:t>A useful representation of quality attribute requirements is in a utility tree. </a:t>
-            </a:r>
-          </a:p>
-          <a:p>
-            <a:pPr lvl="1"/>
-            <a:r>
-              <a:rPr lang="en-US" dirty="0"/>
-              <a:t>The utility tree helps to capture these requirements in a structured form.</a:t>
-            </a:r>
-          </a:p>
-          <a:p>
-            <a:pPr lvl="1"/>
-            <a:r>
-              <a:rPr lang="en-US" dirty="0"/>
-              <a:t>Scenarios are prioritized.</a:t>
-            </a:r>
-          </a:p>
-          <a:p>
-            <a:pPr lvl="1"/>
-            <a:r>
-              <a:rPr lang="en-US" dirty="0"/>
-              <a:t>This prioritized set defines your “marching orders” as an architect.</a:t>
-            </a:r>
-          </a:p>
-          <a:p>
-            <a:endParaRPr lang="en-US" dirty="0"/>
+              <a:t>Requirements—whether captured or not—change all the time.</a:t>
+            </a:r>
+          </a:p>
+          <a:p>
+            <a:r>
+              <a:rPr lang="en-US" dirty="0"/>
+              <a:t>Architects have to adapt and keep up, to ensure that their architectures are still the right ones that will bring success to the project.</a:t>
+            </a:r>
+          </a:p>
+          <a:p>
+            <a:r>
+              <a:rPr lang="en-US" dirty="0"/>
+              <a:t>Always keep a channel open to the key stakeholders who determine the ASRs so you can keep up with changing requirements.</a:t>
+            </a:r>
+          </a:p>
+          <a:p>
+            <a:r>
+              <a:rPr lang="en-US" dirty="0"/>
+              <a:t>Even better than keeping up with change is staying one step ahead of it.</a:t>
+            </a:r>
+          </a:p>
+          <a:p>
+            <a:r>
+              <a:rPr lang="en-US" dirty="0"/>
+              <a:t>If you get wind of a change to the ASRs, you can take preliminary steps to design for it to understand the implications.</a:t>
+            </a:r>
+          </a:p>
+          <a:p>
+            <a:r>
+              <a:rPr lang="en-US" dirty="0"/>
+              <a:t>If the change will be prohibitively expensive, sharing that information with the stakeholders will be a valuable contribution, and the earlier they know it, the better.</a:t>
+            </a:r>
           </a:p>
         </p:txBody>
       </p:sp>
@@ -5581,7 +5811,7 @@
           <p:cNvPr id="3" name="Title 2">
             <a:extLst>
               <a:ext uri="{FF2B5EF4-FFF2-40B4-BE49-F238E27FC236}">
-                <a16:creationId xmlns:a16="http://schemas.microsoft.com/office/drawing/2014/main" id="{9CE7D61F-EDDB-C36C-6C63-10317690C9F3}"/>
+                <a16:creationId xmlns:a16="http://schemas.microsoft.com/office/drawing/2014/main" id="{20D958EE-B50E-75EF-961A-ECC948F93F7F}"/>
               </a:ext>
             </a:extLst>
           </p:cNvPr>
@@ -5599,7 +5829,7 @@
           <a:p>
             <a:r>
               <a:rPr lang="en-US" dirty="0"/>
-              <a:t>19.6 Summary</a:t>
+              <a:t>19.5 Change Happens</a:t>
             </a:r>
           </a:p>
         </p:txBody>
@@ -5609,7 +5839,7 @@
           <p:cNvPr id="4" name="Slide Number Placeholder 3">
             <a:extLst>
               <a:ext uri="{FF2B5EF4-FFF2-40B4-BE49-F238E27FC236}">
-                <a16:creationId xmlns:a16="http://schemas.microsoft.com/office/drawing/2014/main" id="{672C22DB-C4CB-3974-E7B1-4E6A19405B71}"/>
+                <a16:creationId xmlns:a16="http://schemas.microsoft.com/office/drawing/2014/main" id="{8E96CA32-A3AF-F463-3141-6C12AC089173}"/>
               </a:ext>
             </a:extLst>
           </p:cNvPr>
@@ -5629,6 +5859,179 @@
               <a:rPr lang="en-US" smtClean="0"/>
               <a:pPr/>
               <a:t>23</a:t>
+            </a:fld>
+            <a:endParaRPr lang="en-US" dirty="0"/>
+          </a:p>
+        </p:txBody>
+      </p:sp>
+    </p:spTree>
+    <p:extLst>
+      <p:ext uri="{BB962C8B-B14F-4D97-AF65-F5344CB8AC3E}">
+        <p14:creationId xmlns:p14="http://schemas.microsoft.com/office/powerpoint/2010/main" val="1895953766"/>
+      </p:ext>
+    </p:extLst>
+  </p:cSld>
+  <p:clrMapOvr>
+    <a:masterClrMapping/>
+  </p:clrMapOvr>
+</p:sld>
+</file>
+
+<file path=ppt/slides/slide24.xml><?xml version="1.0" encoding="utf-8"?>
+<p:sld xmlns:a="http://schemas.openxmlformats.org/drawingml/2006/main" xmlns:r="http://schemas.openxmlformats.org/officeDocument/2006/relationships" xmlns:p="http://schemas.openxmlformats.org/presentationml/2006/main">
+  <p:cSld>
+    <p:spTree>
+      <p:nvGrpSpPr>
+        <p:cNvPr id="1" name=""/>
+        <p:cNvGrpSpPr/>
+        <p:nvPr/>
+      </p:nvGrpSpPr>
+      <p:grpSpPr>
+        <a:xfrm>
+          <a:off x="0" y="0"/>
+          <a:ext cx="0" cy="0"/>
+          <a:chOff x="0" y="0"/>
+          <a:chExt cx="0" cy="0"/>
+        </a:xfrm>
+      </p:grpSpPr>
+      <p:sp>
+        <p:nvSpPr>
+          <p:cNvPr id="2" name="Content Placeholder 1">
+            <a:extLst>
+              <a:ext uri="{FF2B5EF4-FFF2-40B4-BE49-F238E27FC236}">
+                <a16:creationId xmlns:a16="http://schemas.microsoft.com/office/drawing/2014/main" id="{0915A95B-2AB4-1738-FC05-2057F32B1407}"/>
+              </a:ext>
+            </a:extLst>
+          </p:cNvPr>
+          <p:cNvSpPr>
+            <a:spLocks noGrp="1"/>
+          </p:cNvSpPr>
+          <p:nvPr>
+            <p:ph sz="half" idx="2"/>
+          </p:nvPr>
+        </p:nvSpPr>
+        <p:spPr/>
+        <p:txBody>
+          <a:bodyPr/>
+          <a:lstStyle/>
+          <a:p>
+            <a:r>
+              <a:rPr lang="en-US" dirty="0"/>
+              <a:t>Architectures are driven by architecturally significant requirements: requirements that will have profound effects on the architecture. </a:t>
+            </a:r>
+          </a:p>
+          <a:p>
+            <a:pPr lvl="1"/>
+            <a:r>
+              <a:rPr lang="en-US" dirty="0"/>
+              <a:t>Architecturally significant requirements may be captured from requirements documents, by interviewing stakeholders, or by conducting a Quality Attribute Workshop.</a:t>
+            </a:r>
+          </a:p>
+          <a:p>
+            <a:r>
+              <a:rPr lang="en-US" dirty="0"/>
+              <a:t>Be mindful of the business goals of the organization. </a:t>
+            </a:r>
+          </a:p>
+          <a:p>
+            <a:pPr lvl="1"/>
+            <a:r>
+              <a:rPr lang="en-US" dirty="0"/>
+              <a:t>Business goals can be expressed in a common, structured form and represented as scenarios. </a:t>
+            </a:r>
+          </a:p>
+          <a:p>
+            <a:pPr lvl="1"/>
+            <a:r>
+              <a:rPr lang="en-US" dirty="0"/>
+              <a:t>Business goals may be elicited and documented using a structured facilitation method called PALM.</a:t>
+            </a:r>
+          </a:p>
+          <a:p>
+            <a:r>
+              <a:rPr lang="en-US" dirty="0"/>
+              <a:t>A useful representation of quality attribute requirements is in a utility tree. </a:t>
+            </a:r>
+          </a:p>
+          <a:p>
+            <a:pPr lvl="1"/>
+            <a:r>
+              <a:rPr lang="en-US" dirty="0"/>
+              <a:t>The utility tree helps to capture these requirements in a structured form.</a:t>
+            </a:r>
+          </a:p>
+          <a:p>
+            <a:pPr lvl="1"/>
+            <a:r>
+              <a:rPr lang="en-US" dirty="0"/>
+              <a:t>Scenarios are prioritized.</a:t>
+            </a:r>
+          </a:p>
+          <a:p>
+            <a:pPr lvl="1"/>
+            <a:r>
+              <a:rPr lang="en-US" dirty="0"/>
+              <a:t>This prioritized set defines your “marching orders” as an architect.</a:t>
+            </a:r>
+          </a:p>
+          <a:p>
+            <a:endParaRPr lang="en-US" dirty="0"/>
+          </a:p>
+        </p:txBody>
+      </p:sp>
+      <p:sp>
+        <p:nvSpPr>
+          <p:cNvPr id="3" name="Title 2">
+            <a:extLst>
+              <a:ext uri="{FF2B5EF4-FFF2-40B4-BE49-F238E27FC236}">
+                <a16:creationId xmlns:a16="http://schemas.microsoft.com/office/drawing/2014/main" id="{9CE7D61F-EDDB-C36C-6C63-10317690C9F3}"/>
+              </a:ext>
+            </a:extLst>
+          </p:cNvPr>
+          <p:cNvSpPr>
+            <a:spLocks noGrp="1"/>
+          </p:cNvSpPr>
+          <p:nvPr>
+            <p:ph type="title"/>
+          </p:nvPr>
+        </p:nvSpPr>
+        <p:spPr/>
+        <p:txBody>
+          <a:bodyPr/>
+          <a:lstStyle/>
+          <a:p>
+            <a:r>
+              <a:rPr lang="en-US" dirty="0"/>
+              <a:t>19.6 Summary</a:t>
+            </a:r>
+          </a:p>
+        </p:txBody>
+      </p:sp>
+      <p:sp>
+        <p:nvSpPr>
+          <p:cNvPr id="4" name="Slide Number Placeholder 3">
+            <a:extLst>
+              <a:ext uri="{FF2B5EF4-FFF2-40B4-BE49-F238E27FC236}">
+                <a16:creationId xmlns:a16="http://schemas.microsoft.com/office/drawing/2014/main" id="{672C22DB-C4CB-3974-E7B1-4E6A19405B71}"/>
+              </a:ext>
+            </a:extLst>
+          </p:cNvPr>
+          <p:cNvSpPr>
+            <a:spLocks noGrp="1"/>
+          </p:cNvSpPr>
+          <p:nvPr>
+            <p:ph type="sldNum" sz="quarter" idx="10"/>
+          </p:nvPr>
+        </p:nvSpPr>
+        <p:spPr/>
+        <p:txBody>
+          <a:bodyPr/>
+          <a:lstStyle/>
+          <a:p>
+            <a:fld id="{AE311D09-C3D9-45E8-99CE-78E12234EEAD}" type="slidenum">
+              <a:rPr lang="en-US" smtClean="0"/>
+              <a:pPr/>
+              <a:t>24</a:t>
             </a:fld>
             <a:endParaRPr lang="en-US" dirty="0"/>
           </a:p>
@@ -5752,105 +6155,10 @@
       </p:grpSpPr>
       <p:sp>
         <p:nvSpPr>
-          <p:cNvPr id="2" name="Content Placeholder 1">
-            <a:extLst>
-              <a:ext uri="{FF2B5EF4-FFF2-40B4-BE49-F238E27FC236}">
-                <a16:creationId xmlns:a16="http://schemas.microsoft.com/office/drawing/2014/main" id="{F2482658-2BE8-68DC-2E49-3E16AB1B08DB}"/>
-              </a:ext>
-            </a:extLst>
-          </p:cNvPr>
-          <p:cNvSpPr>
-            <a:spLocks noGrp="1"/>
-          </p:cNvSpPr>
-          <p:nvPr>
-            <p:ph sz="half" idx="2"/>
-          </p:nvPr>
-        </p:nvSpPr>
-        <p:spPr/>
-        <p:txBody>
-          <a:bodyPr/>
-          <a:lstStyle/>
-          <a:p>
-            <a:r>
-              <a:rPr lang="en-US" dirty="0"/>
-              <a:t>Introduction</a:t>
-            </a:r>
-          </a:p>
-          <a:p>
-            <a:r>
-              <a:rPr lang="en-US" dirty="0"/>
-              <a:t>Gathering ASRs from Requirements Documents</a:t>
-            </a:r>
-          </a:p>
-          <a:p>
-            <a:r>
-              <a:rPr lang="en-US" dirty="0"/>
-              <a:t>Gathering ASRs by Interviewing Stakeholders</a:t>
-            </a:r>
-          </a:p>
-          <a:p>
-            <a:r>
-              <a:rPr lang="en-US" dirty="0"/>
-              <a:t>Gathering ASRs by Understanding the Business Goals</a:t>
-            </a:r>
-          </a:p>
-          <a:p>
-            <a:r>
-              <a:rPr lang="en-US" dirty="0"/>
-              <a:t>Capturing ASRs in a Utility Tree</a:t>
-            </a:r>
-          </a:p>
-          <a:p>
-            <a:r>
-              <a:rPr lang="en-US" dirty="0"/>
-              <a:t>Change Happens </a:t>
-            </a:r>
-          </a:p>
-          <a:p>
-            <a:r>
-              <a:rPr lang="en-US" dirty="0"/>
-              <a:t>Summary </a:t>
-            </a:r>
-          </a:p>
-          <a:p>
-            <a:endParaRPr lang="en-US" dirty="0"/>
-          </a:p>
-        </p:txBody>
-      </p:sp>
-      <p:sp>
-        <p:nvSpPr>
-          <p:cNvPr id="3" name="Title 2">
-            <a:extLst>
-              <a:ext uri="{FF2B5EF4-FFF2-40B4-BE49-F238E27FC236}">
-                <a16:creationId xmlns:a16="http://schemas.microsoft.com/office/drawing/2014/main" id="{DEA50FF4-3542-AD6D-6F54-5EF273AB4BF6}"/>
-              </a:ext>
-            </a:extLst>
-          </p:cNvPr>
-          <p:cNvSpPr>
-            <a:spLocks noGrp="1"/>
-          </p:cNvSpPr>
-          <p:nvPr>
-            <p:ph type="title"/>
-          </p:nvPr>
-        </p:nvSpPr>
-        <p:spPr/>
-        <p:txBody>
-          <a:bodyPr/>
-          <a:lstStyle/>
-          <a:p>
-            <a:r>
-              <a:rPr lang="en-US" dirty="0"/>
-              <a:t>Chapter Outline</a:t>
-            </a:r>
-          </a:p>
-        </p:txBody>
-      </p:sp>
-      <p:sp>
-        <p:nvSpPr>
-          <p:cNvPr id="4" name="Slide Number Placeholder 3">
-            <a:extLst>
-              <a:ext uri="{FF2B5EF4-FFF2-40B4-BE49-F238E27FC236}">
-                <a16:creationId xmlns:a16="http://schemas.microsoft.com/office/drawing/2014/main" id="{CF7B9C1B-F8C3-F07B-728F-B0949F03145A}"/>
+          <p:cNvPr id="2" name="Slide Number Placeholder 1">
+            <a:extLst>
+              <a:ext uri="{FF2B5EF4-FFF2-40B4-BE49-F238E27FC236}">
+                <a16:creationId xmlns:a16="http://schemas.microsoft.com/office/drawing/2014/main" id="{25EE8AC3-0CFB-E7A5-B0A3-1209B7306FDC}"/>
               </a:ext>
             </a:extLst>
           </p:cNvPr>
@@ -5875,10 +6183,66 @@
           </a:p>
         </p:txBody>
       </p:sp>
+      <p:sp>
+        <p:nvSpPr>
+          <p:cNvPr id="3" name="Text Placeholder 2">
+            <a:extLst>
+              <a:ext uri="{FF2B5EF4-FFF2-40B4-BE49-F238E27FC236}">
+                <a16:creationId xmlns:a16="http://schemas.microsoft.com/office/drawing/2014/main" id="{86184399-18C9-8D5B-9FE5-06823219945A}"/>
+              </a:ext>
+            </a:extLst>
+          </p:cNvPr>
+          <p:cNvSpPr>
+            <a:spLocks noGrp="1"/>
+          </p:cNvSpPr>
+          <p:nvPr>
+            <p:ph type="body" sz="quarter" idx="11"/>
+          </p:nvPr>
+        </p:nvSpPr>
+        <p:spPr/>
+        <p:txBody>
+          <a:bodyPr/>
+          <a:lstStyle/>
+          <a:p>
+            <a:r>
+              <a:rPr lang="en-US" dirty="0"/>
+              <a:t>The most important single aspect of software development is to be clear about what you are trying to build.</a:t>
+            </a:r>
+          </a:p>
+        </p:txBody>
+      </p:sp>
+      <p:sp>
+        <p:nvSpPr>
+          <p:cNvPr id="4" name="Text Placeholder 3">
+            <a:extLst>
+              <a:ext uri="{FF2B5EF4-FFF2-40B4-BE49-F238E27FC236}">
+                <a16:creationId xmlns:a16="http://schemas.microsoft.com/office/drawing/2014/main" id="{B78361B7-8D44-DC2E-724E-6FEE3B3A1774}"/>
+              </a:ext>
+            </a:extLst>
+          </p:cNvPr>
+          <p:cNvSpPr>
+            <a:spLocks noGrp="1"/>
+          </p:cNvSpPr>
+          <p:nvPr>
+            <p:ph type="body" sz="quarter" idx="12"/>
+          </p:nvPr>
+        </p:nvSpPr>
+        <p:spPr/>
+        <p:txBody>
+          <a:bodyPr/>
+          <a:lstStyle/>
+          <a:p>
+            <a:r>
+              <a:rPr lang="en-US" dirty="0"/>
+              <a:t>—Bjarne Stroustrup, creator of C++</a:t>
+            </a:r>
+          </a:p>
+        </p:txBody>
+      </p:sp>
     </p:spTree>
     <p:extLst>
       <p:ext uri="{BB962C8B-B14F-4D97-AF65-F5344CB8AC3E}">
-        <p14:creationId xmlns:p14="http://schemas.microsoft.com/office/powerpoint/2010/main" val="2355826668"/>
+        <p14:creationId xmlns:p14="http://schemas.microsoft.com/office/powerpoint/2010/main" val="3755934400"/>
       </p:ext>
     </p:extLst>
   </p:cSld>
@@ -5910,7 +6274,7 @@
           <p:cNvPr id="2" name="Content Placeholder 1">
             <a:extLst>
               <a:ext uri="{FF2B5EF4-FFF2-40B4-BE49-F238E27FC236}">
-                <a16:creationId xmlns:a16="http://schemas.microsoft.com/office/drawing/2014/main" id="{59B97532-9429-EE07-0A4D-1B613670D9CA}"/>
+                <a16:creationId xmlns:a16="http://schemas.microsoft.com/office/drawing/2014/main" id="{F2482658-2BE8-68DC-2E49-3E16AB1B08DB}"/>
               </a:ext>
             </a:extLst>
           </p:cNvPr>
@@ -5928,65 +6292,44 @@
           <a:p>
             <a:r>
               <a:rPr lang="en-US" dirty="0"/>
-              <a:t>Architectures exist to build systems that satisfy requirements. </a:t>
-            </a:r>
-          </a:p>
-          <a:p>
-            <a:r>
-              <a:rPr lang="en-US" dirty="0"/>
-              <a:t>To an architect, not all requirements are created equal. </a:t>
-            </a:r>
-          </a:p>
-          <a:p>
-            <a:r>
-              <a:rPr lang="en-US" dirty="0"/>
-              <a:t>An </a:t>
-            </a:r>
-            <a:r>
-              <a:rPr lang="en-US" i="1" dirty="0">
-                <a:solidFill>
-                  <a:schemeClr val="accent1"/>
-                </a:solidFill>
-              </a:rPr>
-              <a:t>architecturally significant requirement </a:t>
-            </a:r>
-            <a:r>
-              <a:rPr lang="en-US" dirty="0"/>
-              <a:t>(</a:t>
-            </a:r>
-            <a:r>
-              <a:rPr lang="en-US" dirty="0">
-                <a:solidFill>
-                  <a:schemeClr val="accent1"/>
-                </a:solidFill>
-              </a:rPr>
-              <a:t>ASR</a:t>
-            </a:r>
-            <a:r>
-              <a:rPr lang="en-US" dirty="0"/>
-              <a:t>) is a requirement that will have a profound effect on the architecture.</a:t>
-            </a:r>
-          </a:p>
-          <a:p>
-            <a:r>
-              <a:rPr lang="en-US" dirty="0"/>
-              <a:t>You cannot hope to design a successful architecture if you do not know the ASRs.</a:t>
-            </a:r>
-          </a:p>
-          <a:p>
-            <a:r>
-              <a:rPr lang="en-US" dirty="0"/>
-              <a:t>ASRs often, but not always, take the form of quality attribute requirements—the performance, security, modifiability, availability, usability, and so forth.</a:t>
-            </a:r>
-          </a:p>
-          <a:p>
-            <a:r>
-              <a:rPr lang="en-US" dirty="0"/>
-              <a:t>How do we find those?</a:t>
-            </a:r>
-          </a:p>
-          <a:p>
-            <a:endParaRPr lang="en-AU" dirty="0"/>
+              <a:t>Introduction</a:t>
+            </a:r>
+          </a:p>
+          <a:p>
+            <a:r>
+              <a:rPr lang="en-US" dirty="0"/>
+              <a:t>19.1 Gathering ASRs from Requirements Documents</a:t>
+            </a:r>
+          </a:p>
+          <a:p>
+            <a:r>
+              <a:rPr lang="en-US" dirty="0"/>
+              <a:t>19.2 Gathering ASRs by Interviewing Stakeholders</a:t>
+            </a:r>
+          </a:p>
+          <a:p>
+            <a:r>
+              <a:rPr lang="en-US" dirty="0"/>
+              <a:t>19.3 Gathering ASRs by Understanding the Business Goals</a:t>
+            </a:r>
+          </a:p>
+          <a:p>
+            <a:r>
+              <a:rPr lang="en-US" dirty="0"/>
+              <a:t>19.4 Capturing ASRs in a Utility Tree</a:t>
+            </a:r>
+          </a:p>
+          <a:p>
+            <a:r>
+              <a:rPr lang="en-US" dirty="0"/>
+              <a:t>19.5 Change Happens </a:t>
+            </a:r>
+          </a:p>
+          <a:p>
+            <a:r>
+              <a:rPr lang="en-US" dirty="0"/>
+              <a:t>Summary </a:t>
+            </a:r>
           </a:p>
           <a:p>
             <a:endParaRPr lang="en-US" dirty="0"/>
@@ -5998,7 +6341,7 @@
           <p:cNvPr id="3" name="Title 2">
             <a:extLst>
               <a:ext uri="{FF2B5EF4-FFF2-40B4-BE49-F238E27FC236}">
-                <a16:creationId xmlns:a16="http://schemas.microsoft.com/office/drawing/2014/main" id="{B1057378-79F9-372E-6016-3BCD6356F3D0}"/>
+                <a16:creationId xmlns:a16="http://schemas.microsoft.com/office/drawing/2014/main" id="{DEA50FF4-3542-AD6D-6F54-5EF273AB4BF6}"/>
               </a:ext>
             </a:extLst>
           </p:cNvPr>
@@ -6015,10 +6358,9 @@
           <a:lstStyle/>
           <a:p>
             <a:r>
-              <a:rPr lang="en-AU" dirty="0"/>
-              <a:t>Introduction</a:t>
-            </a:r>
-            <a:endParaRPr lang="en-US" dirty="0"/>
+              <a:rPr lang="en-US" dirty="0"/>
+              <a:t>Chapter Outline</a:t>
+            </a:r>
           </a:p>
         </p:txBody>
       </p:sp>
@@ -6027,7 +6369,7 @@
           <p:cNvPr id="4" name="Slide Number Placeholder 3">
             <a:extLst>
               <a:ext uri="{FF2B5EF4-FFF2-40B4-BE49-F238E27FC236}">
-                <a16:creationId xmlns:a16="http://schemas.microsoft.com/office/drawing/2014/main" id="{DCA83186-BE58-90F0-300B-382300DB4127}"/>
+                <a16:creationId xmlns:a16="http://schemas.microsoft.com/office/drawing/2014/main" id="{CF7B9C1B-F8C3-F07B-728F-B0949F03145A}"/>
               </a:ext>
             </a:extLst>
           </p:cNvPr>
@@ -6055,7 +6397,7 @@
     </p:spTree>
     <p:extLst>
       <p:ext uri="{BB962C8B-B14F-4D97-AF65-F5344CB8AC3E}">
-        <p14:creationId xmlns:p14="http://schemas.microsoft.com/office/powerpoint/2010/main" val="1978531554"/>
+        <p14:creationId xmlns:p14="http://schemas.microsoft.com/office/powerpoint/2010/main" val="2355826668"/>
       </p:ext>
     </p:extLst>
   </p:cSld>
@@ -6087,7 +6429,7 @@
           <p:cNvPr id="2" name="Content Placeholder 1">
             <a:extLst>
               <a:ext uri="{FF2B5EF4-FFF2-40B4-BE49-F238E27FC236}">
-                <a16:creationId xmlns:a16="http://schemas.microsoft.com/office/drawing/2014/main" id="{6ED8837D-1496-84CD-FEF2-05C85D7CD495}"/>
+                <a16:creationId xmlns:a16="http://schemas.microsoft.com/office/drawing/2014/main" id="{59B97532-9429-EE07-0A4D-1B613670D9CA}"/>
               </a:ext>
             </a:extLst>
           </p:cNvPr>
@@ -6105,26 +6447,79 @@
           <a:p>
             <a:r>
               <a:rPr lang="en-US" dirty="0"/>
-              <a:t>An obvious location to look for candidate ASRs is in the requirements documents or in user stories.</a:t>
-            </a:r>
-          </a:p>
-          <a:p>
-            <a:r>
-              <a:rPr lang="en-US" dirty="0"/>
-              <a:t>Requirements should be in requirements documents! </a:t>
-            </a:r>
-          </a:p>
-          <a:p>
-            <a:r>
-              <a:rPr lang="en-US" dirty="0"/>
-              <a:t>Unfortunately, this is not usually the case.</a:t>
-            </a:r>
-          </a:p>
-          <a:p>
-            <a:r>
-              <a:rPr lang="en-US" dirty="0"/>
-              <a:t>Why?</a:t>
-            </a:r>
+              <a:t>Architectures exist to build systems that satisfy requirements. </a:t>
+            </a:r>
+          </a:p>
+          <a:p>
+            <a:r>
+              <a:rPr lang="en-US" dirty="0"/>
+              <a:t>To an architect, not all requirements are important equally. </a:t>
+            </a:r>
+          </a:p>
+          <a:p>
+            <a:r>
+              <a:rPr lang="en-US" dirty="0"/>
+              <a:t>An </a:t>
+            </a:r>
+            <a:r>
+              <a:rPr lang="en-US" i="1" dirty="0">
+                <a:solidFill>
+                  <a:schemeClr val="accent1"/>
+                </a:solidFill>
+              </a:rPr>
+              <a:t>architecturally significant requirement </a:t>
+            </a:r>
+            <a:r>
+              <a:rPr lang="en-US" dirty="0"/>
+              <a:t>(</a:t>
+            </a:r>
+            <a:r>
+              <a:rPr lang="en-US" dirty="0">
+                <a:solidFill>
+                  <a:schemeClr val="accent1"/>
+                </a:solidFill>
+              </a:rPr>
+              <a:t>ASR</a:t>
+            </a:r>
+            <a:r>
+              <a:rPr lang="en-US" dirty="0"/>
+              <a:t>) is a requirement that will have a profound effect on the architecture.</a:t>
+            </a:r>
+          </a:p>
+          <a:p>
+            <a:r>
+              <a:rPr lang="en-US" dirty="0"/>
+              <a:t>You cannot hope to design a successful architecture if you do not know the ASRs.</a:t>
+            </a:r>
+          </a:p>
+          <a:p>
+            <a:r>
+              <a:rPr lang="en-US" dirty="0"/>
+              <a:t>ASRs are often quality attribute requirements (but not always).</a:t>
+            </a:r>
+          </a:p>
+          <a:p>
+            <a:pPr lvl="1"/>
+            <a:r>
+              <a:rPr lang="en-US" dirty="0"/>
+              <a:t>Like performance, security, modifiability, availability, usability, etc.</a:t>
+            </a:r>
+          </a:p>
+          <a:p>
+            <a:pPr lvl="1"/>
+            <a:r>
+              <a:rPr lang="en-US" dirty="0"/>
+              <a:t>So, finding ASRs is mostly about finding important QAs. </a:t>
+            </a:r>
+          </a:p>
+          <a:p>
+            <a:r>
+              <a:rPr lang="en-US" dirty="0"/>
+              <a:t>But how do we find those?</a:t>
+            </a:r>
+          </a:p>
+          <a:p>
+            <a:endParaRPr lang="en-AU" dirty="0"/>
           </a:p>
           <a:p>
             <a:endParaRPr lang="en-US" dirty="0"/>
@@ -6136,7 +6531,7 @@
           <p:cNvPr id="3" name="Title 2">
             <a:extLst>
               <a:ext uri="{FF2B5EF4-FFF2-40B4-BE49-F238E27FC236}">
-                <a16:creationId xmlns:a16="http://schemas.microsoft.com/office/drawing/2014/main" id="{AED15B01-A07D-AA52-1C1D-499A3B3DBAC0}"/>
+                <a16:creationId xmlns:a16="http://schemas.microsoft.com/office/drawing/2014/main" id="{B1057378-79F9-372E-6016-3BCD6356F3D0}"/>
               </a:ext>
             </a:extLst>
           </p:cNvPr>
@@ -6153,9 +6548,10 @@
           <a:lstStyle/>
           <a:p>
             <a:r>
-              <a:rPr lang="en-US" dirty="0"/>
-              <a:t>19.1 ASRs from Requirements Documents</a:t>
-            </a:r>
+              <a:rPr lang="en-AU" dirty="0"/>
+              <a:t>Introduction</a:t>
+            </a:r>
+            <a:endParaRPr lang="en-US" dirty="0"/>
           </a:p>
         </p:txBody>
       </p:sp>
@@ -6164,7 +6560,7 @@
           <p:cNvPr id="4" name="Slide Number Placeholder 3">
             <a:extLst>
               <a:ext uri="{FF2B5EF4-FFF2-40B4-BE49-F238E27FC236}">
-                <a16:creationId xmlns:a16="http://schemas.microsoft.com/office/drawing/2014/main" id="{967A3232-E29C-2F48-AA46-51D429C2FF27}"/>
+                <a16:creationId xmlns:a16="http://schemas.microsoft.com/office/drawing/2014/main" id="{DCA83186-BE58-90F0-300B-382300DB4127}"/>
               </a:ext>
             </a:extLst>
           </p:cNvPr>
@@ -6192,7 +6588,7 @@
     </p:spTree>
     <p:extLst>
       <p:ext uri="{BB962C8B-B14F-4D97-AF65-F5344CB8AC3E}">
-        <p14:creationId xmlns:p14="http://schemas.microsoft.com/office/powerpoint/2010/main" val="1696324435"/>
+        <p14:creationId xmlns:p14="http://schemas.microsoft.com/office/powerpoint/2010/main" val="1978531554"/>
       </p:ext>
     </p:extLst>
   </p:cSld>
@@ -6224,7 +6620,7 @@
           <p:cNvPr id="2" name="Content Placeholder 1">
             <a:extLst>
               <a:ext uri="{FF2B5EF4-FFF2-40B4-BE49-F238E27FC236}">
-                <a16:creationId xmlns:a16="http://schemas.microsoft.com/office/drawing/2014/main" id="{3F52918D-2B26-B107-BEB1-A876AE4E55F3}"/>
+                <a16:creationId xmlns:a16="http://schemas.microsoft.com/office/drawing/2014/main" id="{6ED8837D-1496-84CD-FEF2-05C85D7CD495}"/>
               </a:ext>
             </a:extLst>
           </p:cNvPr>
@@ -6242,28 +6638,29 @@
           <a:p>
             <a:r>
               <a:rPr lang="en-US" dirty="0"/>
-              <a:t>Many projects don’t create or maintain the kind of requirements document that professors in classes love to prescribe.</a:t>
-            </a:r>
-          </a:p>
-          <a:p>
-            <a:r>
-              <a:rPr lang="en-US" dirty="0"/>
-              <a:t>No architect just sits and waits until the requirements are “finished” before starting work. The architect </a:t>
-            </a:r>
-            <a:r>
-              <a:rPr lang="en-US" i="1" dirty="0"/>
-              <a:t>must</a:t>
-            </a:r>
-            <a:r>
-              <a:rPr lang="en-US" dirty="0"/>
-              <a:t> begin while the requirements are still in flux.</a:t>
-            </a:r>
-          </a:p>
-          <a:p>
-            <a:r>
-              <a:rPr lang="en-US" dirty="0"/>
-              <a:t>The QA requirements are quite likely to be uncertain when the architect starts work.</a:t>
-            </a:r>
+              <a:t>An obvious location to look for candidate ASRs is in the requirements documents or in user stories.</a:t>
+            </a:r>
+          </a:p>
+          <a:p>
+            <a:r>
+              <a:rPr lang="en-US" dirty="0"/>
+              <a:t>Requirements should be in requirements documents, don’t they?! </a:t>
+            </a:r>
+          </a:p>
+          <a:p>
+            <a:r>
+              <a:rPr lang="en-US" dirty="0"/>
+              <a:t>Unfortunately, this is not usually the case.</a:t>
+            </a:r>
+          </a:p>
+          <a:p>
+            <a:r>
+              <a:rPr lang="en-US" dirty="0"/>
+              <a:t>Why?</a:t>
+            </a:r>
+          </a:p>
+          <a:p>
+            <a:endParaRPr lang="en-US" dirty="0"/>
           </a:p>
         </p:txBody>
       </p:sp>
@@ -6272,7 +6669,7 @@
           <p:cNvPr id="3" name="Title 2">
             <a:extLst>
               <a:ext uri="{FF2B5EF4-FFF2-40B4-BE49-F238E27FC236}">
-                <a16:creationId xmlns:a16="http://schemas.microsoft.com/office/drawing/2014/main" id="{86BA97CE-C5E9-3129-56B4-09DAC9419472}"/>
+                <a16:creationId xmlns:a16="http://schemas.microsoft.com/office/drawing/2014/main" id="{AED15B01-A07D-AA52-1C1D-499A3B3DBAC0}"/>
               </a:ext>
             </a:extLst>
           </p:cNvPr>
@@ -6290,7 +6687,7 @@
           <a:p>
             <a:r>
               <a:rPr lang="en-US" dirty="0"/>
-              <a:t>Don’t Get Your Hopes Up</a:t>
+              <a:t>19.1 ASRs from Requirements Documents</a:t>
             </a:r>
           </a:p>
         </p:txBody>
@@ -6300,7 +6697,7 @@
           <p:cNvPr id="4" name="Slide Number Placeholder 3">
             <a:extLst>
               <a:ext uri="{FF2B5EF4-FFF2-40B4-BE49-F238E27FC236}">
-                <a16:creationId xmlns:a16="http://schemas.microsoft.com/office/drawing/2014/main" id="{8A338184-F1E7-0696-4DBE-AE7C37424063}"/>
+                <a16:creationId xmlns:a16="http://schemas.microsoft.com/office/drawing/2014/main" id="{967A3232-E29C-2F48-AA46-51D429C2FF27}"/>
               </a:ext>
             </a:extLst>
           </p:cNvPr>
@@ -6328,7 +6725,7 @@
     </p:spTree>
     <p:extLst>
       <p:ext uri="{BB962C8B-B14F-4D97-AF65-F5344CB8AC3E}">
-        <p14:creationId xmlns:p14="http://schemas.microsoft.com/office/powerpoint/2010/main" val="1070745033"/>
+        <p14:creationId xmlns:p14="http://schemas.microsoft.com/office/powerpoint/2010/main" val="1696324435"/>
       </p:ext>
     </p:extLst>
   </p:cSld>
@@ -6360,7 +6757,7 @@
           <p:cNvPr id="2" name="Content Placeholder 1">
             <a:extLst>
               <a:ext uri="{FF2B5EF4-FFF2-40B4-BE49-F238E27FC236}">
-                <a16:creationId xmlns:a16="http://schemas.microsoft.com/office/drawing/2014/main" id="{6737EABD-5BBA-D9AF-0BD6-CE56C421F5E3}"/>
+                <a16:creationId xmlns:a16="http://schemas.microsoft.com/office/drawing/2014/main" id="{3F52918D-2B26-B107-BEB1-A876AE4E55F3}"/>
               </a:ext>
             </a:extLst>
           </p:cNvPr>
@@ -6378,55 +6775,62 @@
           <a:p>
             <a:r>
               <a:rPr lang="en-US" dirty="0"/>
-              <a:t>Even where they exist and are stable, requirements documents often fail an architect in two ways:</a:t>
-            </a:r>
-          </a:p>
-          <a:p>
-            <a:r>
-              <a:rPr lang="en-US" dirty="0"/>
-              <a:t>Quality attributes, even when captured, are often captured poorly.</a:t>
+              <a:t>Requirements documents are often unavailable or uncertain when the architect should start work. </a:t>
+            </a:r>
+          </a:p>
+          <a:p>
+            <a:r>
+              <a:rPr lang="en-US" dirty="0"/>
+              <a:t>Even where they exist and are stable, they often fail an architect in two ways:</a:t>
+            </a:r>
+          </a:p>
+          <a:p>
+            <a:r>
+              <a:rPr lang="en-US" b="1" dirty="0">
+                <a:solidFill>
+                  <a:schemeClr val="accent4">
+                    <a:lumMod val="50000"/>
+                  </a:schemeClr>
+                </a:solidFill>
+              </a:rPr>
+              <a:t>First;</a:t>
+            </a:r>
+          </a:p>
+          <a:p>
+            <a:r>
+              <a:rPr lang="en-US" dirty="0"/>
+              <a:t>As we’ve seen, architectures are mostly influenced by QA requirements. </a:t>
+            </a:r>
+            <a:endParaRPr lang="en-US" dirty="0">
+              <a:solidFill>
+                <a:schemeClr val="accent4">
+                  <a:lumMod val="50000"/>
+                </a:schemeClr>
+              </a:solidFill>
+            </a:endParaRPr>
+          </a:p>
+          <a:p>
+            <a:r>
+              <a:rPr lang="en-US" dirty="0"/>
+              <a:t>The best software engineering practices do prescribe capturing QA requirements. </a:t>
             </a:r>
           </a:p>
           <a:p>
             <a:pPr lvl="1"/>
             <a:r>
               <a:rPr lang="en-US" dirty="0"/>
-              <a:t>“The system shall be modular” </a:t>
+              <a:t>For example, the Software Engineering Body of Knowledge says that important QA requirements must be captured and they should be specified unambiguously and be testable.</a:t>
+            </a:r>
+          </a:p>
+          <a:p>
+            <a:r>
+              <a:rPr lang="en-US" dirty="0"/>
+              <a:t>But most requirements documents focus on the required features and functionality of a system, which shape the architecture the least.</a:t>
             </a:r>
           </a:p>
           <a:p>
             <a:pPr lvl="1"/>
-            <a:r>
-              <a:rPr lang="en-US" dirty="0"/>
-              <a:t>“The system shall exhibit high usability” </a:t>
-            </a:r>
-          </a:p>
-          <a:p>
-            <a:pPr lvl="1"/>
-            <a:r>
-              <a:rPr lang="en-US" dirty="0"/>
-              <a:t>These are not useful requirements because they are not testable</a:t>
-            </a:r>
-          </a:p>
-          <a:p>
-            <a:r>
-              <a:rPr lang="en-US" dirty="0"/>
-              <a:t>Much of what is useful to an architect is not in even the best requirements document. </a:t>
-            </a:r>
-          </a:p>
-          <a:p>
-            <a:pPr lvl="1"/>
-            <a:r>
-              <a:rPr lang="en-US" dirty="0"/>
-              <a:t>Stakeholders, the technical environment, and the organization itself all play a role in influencing architectures.</a:t>
-            </a:r>
-          </a:p>
-          <a:p>
-            <a:pPr lvl="1"/>
-            <a:r>
-              <a:rPr lang="en-US" dirty="0"/>
-              <a:t>For example, you will rarely see a requirements document that describes teaming assumptions.</a:t>
-            </a:r>
+            <a:endParaRPr lang="en-US" b="1" dirty="0"/>
           </a:p>
         </p:txBody>
       </p:sp>
@@ -6435,7 +6839,7 @@
           <p:cNvPr id="3" name="Title 2">
             <a:extLst>
               <a:ext uri="{FF2B5EF4-FFF2-40B4-BE49-F238E27FC236}">
-                <a16:creationId xmlns:a16="http://schemas.microsoft.com/office/drawing/2014/main" id="{FF241E29-49A2-9228-8DDF-405036ABB6C3}"/>
+                <a16:creationId xmlns:a16="http://schemas.microsoft.com/office/drawing/2014/main" id="{86BA97CE-C5E9-3129-56B4-09DAC9419472}"/>
               </a:ext>
             </a:extLst>
           </p:cNvPr>
@@ -6463,7 +6867,7 @@
           <p:cNvPr id="4" name="Slide Number Placeholder 3">
             <a:extLst>
               <a:ext uri="{FF2B5EF4-FFF2-40B4-BE49-F238E27FC236}">
-                <a16:creationId xmlns:a16="http://schemas.microsoft.com/office/drawing/2014/main" id="{2A5D2AD1-18EB-F728-9FB6-5D18ED6911CB}"/>
+                <a16:creationId xmlns:a16="http://schemas.microsoft.com/office/drawing/2014/main" id="{8A338184-F1E7-0696-4DBE-AE7C37424063}"/>
               </a:ext>
             </a:extLst>
           </p:cNvPr>
@@ -6491,7 +6895,7 @@
     </p:spTree>
     <p:extLst>
       <p:ext uri="{BB962C8B-B14F-4D97-AF65-F5344CB8AC3E}">
-        <p14:creationId xmlns:p14="http://schemas.microsoft.com/office/powerpoint/2010/main" val="1934064646"/>
+        <p14:creationId xmlns:p14="http://schemas.microsoft.com/office/powerpoint/2010/main" val="1070745033"/>
       </p:ext>
     </p:extLst>
   </p:cSld>
@@ -6520,10 +6924,10 @@
       </p:grpSpPr>
       <p:sp>
         <p:nvSpPr>
-          <p:cNvPr id="7" name="Content Placeholder 6">
-            <a:extLst>
-              <a:ext uri="{FF2B5EF4-FFF2-40B4-BE49-F238E27FC236}">
-                <a16:creationId xmlns:a16="http://schemas.microsoft.com/office/drawing/2014/main" id="{B7D3045C-6E27-B893-D935-62D8387F3A49}"/>
+          <p:cNvPr id="2" name="Content Placeholder 1">
+            <a:extLst>
+              <a:ext uri="{FF2B5EF4-FFF2-40B4-BE49-F238E27FC236}">
+                <a16:creationId xmlns:a16="http://schemas.microsoft.com/office/drawing/2014/main" id="{6737EABD-5BBA-D9AF-0BD6-CE56C421F5E3}"/>
               </a:ext>
             </a:extLst>
           </p:cNvPr>
@@ -6541,48 +6945,65 @@
           <a:p>
             <a:r>
               <a:rPr lang="en-US" dirty="0"/>
-              <a:t>The architect should perform a bit of investigation to extract ASRs from Requirements Document.</a:t>
-            </a:r>
-          </a:p>
-          <a:p>
-            <a:r>
-              <a:rPr lang="en-US" dirty="0"/>
-              <a:t>Look for information like:</a:t>
+              <a:t>Quality attributes, even when captured, are often captured poorly.</a:t>
             </a:r>
           </a:p>
           <a:p>
             <a:pPr lvl="1"/>
             <a:r>
               <a:rPr lang="en-US" dirty="0"/>
-              <a:t>Plans for teaming, skill sets, team coordination. </a:t>
+              <a:t>For example, “The system shall be modular”.</a:t>
             </a:r>
           </a:p>
           <a:p>
             <a:pPr lvl="1"/>
             <a:r>
               <a:rPr lang="en-US" dirty="0"/>
-              <a:t>Network properties and configurations.</a:t>
+              <a:t>This is not a useful requirement because it’s ambiguous and therefore not testable.</a:t>
+            </a:r>
+            <a:endParaRPr lang="en-US" b="1" dirty="0"/>
+          </a:p>
+          <a:p>
+            <a:r>
+              <a:rPr lang="en-US" b="1" dirty="0">
+                <a:solidFill>
+                  <a:schemeClr val="accent4">
+                    <a:lumMod val="50000"/>
+                  </a:schemeClr>
+                </a:solidFill>
+              </a:rPr>
+              <a:t>Second</a:t>
+            </a:r>
+            <a:r>
+              <a:rPr lang="en-US" dirty="0">
+                <a:solidFill>
+                  <a:schemeClr val="accent4">
+                    <a:lumMod val="50000"/>
+                  </a:schemeClr>
+                </a:solidFill>
+              </a:rPr>
+              <a:t>: </a:t>
             </a:r>
           </a:p>
           <a:p>
             <a:pPr lvl="1"/>
             <a:r>
               <a:rPr lang="en-US" dirty="0"/>
-              <a:t>User roles, permissions, authentication.</a:t>
+              <a:t>Much of what is useful to an architect is not in even the best requirements document. </a:t>
             </a:r>
           </a:p>
           <a:p>
             <a:pPr lvl="1"/>
             <a:r>
               <a:rPr lang="en-US" dirty="0"/>
-              <a:t>Hardware choices</a:t>
+              <a:t>Stakeholders, the technical environment, and the organization itself all play a role in influencing architectures.</a:t>
             </a:r>
           </a:p>
           <a:p>
             <a:pPr lvl="1"/>
             <a:r>
               <a:rPr lang="en-US" dirty="0"/>
-              <a:t>Data persistence requirements</a:t>
+              <a:t>For example, you will rarely see a requirements document that describes teaming assumptions.</a:t>
             </a:r>
           </a:p>
         </p:txBody>
@@ -6592,7 +7013,7 @@
           <p:cNvPr id="3" name="Title 2">
             <a:extLst>
               <a:ext uri="{FF2B5EF4-FFF2-40B4-BE49-F238E27FC236}">
-                <a16:creationId xmlns:a16="http://schemas.microsoft.com/office/drawing/2014/main" id="{2C5E397B-265B-86B2-0A56-2E84C143D0EA}"/>
+                <a16:creationId xmlns:a16="http://schemas.microsoft.com/office/drawing/2014/main" id="{FF241E29-49A2-9228-8DDF-405036ABB6C3}"/>
               </a:ext>
             </a:extLst>
           </p:cNvPr>
@@ -6603,19 +7024,14 @@
             <p:ph type="title"/>
           </p:nvPr>
         </p:nvSpPr>
-        <p:spPr>
-          <a:xfrm>
-            <a:off x="878889" y="153671"/>
-            <a:ext cx="10436810" cy="641281"/>
-          </a:xfrm>
-        </p:spPr>
+        <p:spPr/>
         <p:txBody>
           <a:bodyPr/>
           <a:lstStyle/>
           <a:p>
             <a:r>
               <a:rPr lang="en-US" dirty="0"/>
-              <a:t>Sniffing Out ASRs</a:t>
+              <a:t>Don’t Get Your Hopes Up</a:t>
             </a:r>
           </a:p>
         </p:txBody>
@@ -6625,7 +7041,7 @@
           <p:cNvPr id="4" name="Slide Number Placeholder 3">
             <a:extLst>
               <a:ext uri="{FF2B5EF4-FFF2-40B4-BE49-F238E27FC236}">
-                <a16:creationId xmlns:a16="http://schemas.microsoft.com/office/drawing/2014/main" id="{95B0966A-4AD1-5751-80F8-60A9BEEA2D10}"/>
+                <a16:creationId xmlns:a16="http://schemas.microsoft.com/office/drawing/2014/main" id="{2A5D2AD1-18EB-F728-9FB6-5D18ED6911CB}"/>
               </a:ext>
             </a:extLst>
           </p:cNvPr>
@@ -6636,12 +7052,7 @@
             <p:ph type="sldNum" sz="quarter" idx="10"/>
           </p:nvPr>
         </p:nvSpPr>
-        <p:spPr>
-          <a:xfrm>
-            <a:off x="556149" y="153671"/>
-            <a:ext cx="670079" cy="641281"/>
-          </a:xfrm>
-        </p:spPr>
+        <p:spPr/>
         <p:txBody>
           <a:bodyPr/>
           <a:lstStyle/>
@@ -6658,7 +7069,7 @@
     </p:spTree>
     <p:extLst>
       <p:ext uri="{BB962C8B-B14F-4D97-AF65-F5344CB8AC3E}">
-        <p14:creationId xmlns:p14="http://schemas.microsoft.com/office/powerpoint/2010/main" val="1275786396"/>
+        <p14:creationId xmlns:p14="http://schemas.microsoft.com/office/powerpoint/2010/main" val="1934064646"/>
       </p:ext>
     </p:extLst>
   </p:cSld>

--- a/chapter 19.pptx
+++ b/chapter 19.pptx
@@ -249,7 +249,7 @@
           <a:p>
             <a:fld id="{13928E3B-7122-43E6-B3BB-09448C56C96C}" type="datetimeFigureOut">
               <a:rPr lang="en-US" smtClean="0"/>
-              <a:t>25/06/14</a:t>
+              <a:t>25/07/20</a:t>
             </a:fld>
             <a:endParaRPr lang="en-US" dirty="0"/>
           </a:p>
@@ -427,7 +427,7 @@
           <a:p>
             <a:fld id="{B98C9CAF-43DF-44BF-8016-DC193E4E594B}" type="datetimeFigureOut">
               <a:rPr lang="en-US" smtClean="0"/>
-              <a:t>25/06/14</a:t>
+              <a:t>25/07/20</a:t>
             </a:fld>
             <a:endParaRPr lang="en-US" dirty="0"/>
           </a:p>

--- a/chapter 19.pptx
+++ b/chapter 19.pptx
@@ -249,7 +249,7 @@
           <a:p>
             <a:fld id="{13928E3B-7122-43E6-B3BB-09448C56C96C}" type="datetimeFigureOut">
               <a:rPr lang="en-US" smtClean="0"/>
-              <a:t>25/07/20</a:t>
+              <a:t>25/07/24</a:t>
             </a:fld>
             <a:endParaRPr lang="en-US" dirty="0"/>
           </a:p>
@@ -427,7 +427,7 @@
           <a:p>
             <a:fld id="{B98C9CAF-43DF-44BF-8016-DC193E4E594B}" type="datetimeFigureOut">
               <a:rPr lang="en-US" smtClean="0"/>
-              <a:t>25/07/20</a:t>
+              <a:t>25/07/24</a:t>
             </a:fld>
             <a:endParaRPr lang="en-US" dirty="0"/>
           </a:p>
@@ -3585,7 +3585,7 @@
           <a:p>
             <a:r>
               <a:rPr lang="en-US" dirty="0"/>
-              <a:t>19.2 ASRs from Interviewing Stakeholders</a:t>
+              <a:t>ASRs from Interviewing Stakeholders</a:t>
             </a:r>
           </a:p>
         </p:txBody>
@@ -3752,7 +3752,7 @@
           <a:p>
             <a:r>
               <a:rPr lang="en-US" dirty="0"/>
-              <a:t>19.3 ASRs From Business Goals</a:t>
+              <a:t>ASRs From Business Goals</a:t>
             </a:r>
           </a:p>
         </p:txBody>
@@ -4677,7 +4677,7 @@
           <a:p>
             <a:r>
               <a:rPr lang="en-US" dirty="0"/>
-              <a:t>19.3 ASRs From Business Goals</a:t>
+              <a:t>ASRs From Business Goals</a:t>
             </a:r>
           </a:p>
         </p:txBody>
@@ -4876,7 +4876,7 @@
           <a:p>
             <a:r>
               <a:rPr lang="en-US" dirty="0"/>
-              <a:t>19.3 ASRs From Business Goals</a:t>
+              <a:t>ASRs From Business Goals</a:t>
             </a:r>
           </a:p>
         </p:txBody>
@@ -5062,7 +5062,7 @@
           <a:p>
             <a:r>
               <a:rPr lang="en-US" dirty="0"/>
-              <a:t>19.4 ASRs From Utility Tree</a:t>
+              <a:t>ASRs From Utility Tree</a:t>
             </a:r>
           </a:p>
         </p:txBody>
@@ -5426,7 +5426,7 @@
           <a:p>
             <a:r>
               <a:rPr lang="en-US" dirty="0"/>
-              <a:t>19.4 ASRs From Utility Tree</a:t>
+              <a:t>ASRs From Utility Tree</a:t>
             </a:r>
           </a:p>
         </p:txBody>
@@ -5556,7 +5556,7 @@
           <a:p>
             <a:r>
               <a:rPr lang="en-US" dirty="0"/>
-              <a:t>19.4 ASRs From Utility Tree</a:t>
+              <a:t>ASRs From Utility Tree</a:t>
             </a:r>
           </a:p>
         </p:txBody>
@@ -5829,7 +5829,7 @@
           <a:p>
             <a:r>
               <a:rPr lang="en-US" dirty="0"/>
-              <a:t>19.5 Change Happens</a:t>
+              <a:t>Change Happens</a:t>
             </a:r>
           </a:p>
         </p:txBody>
@@ -6002,7 +6002,7 @@
           <a:p>
             <a:r>
               <a:rPr lang="en-US" dirty="0"/>
-              <a:t>19.6 Summary</a:t>
+              <a:t>Summary</a:t>
             </a:r>
           </a:p>
         </p:txBody>
@@ -6297,32 +6297,36 @@
           </a:p>
           <a:p>
             <a:r>
-              <a:rPr lang="en-US" dirty="0"/>
-              <a:t>19.1 Gathering ASRs from Requirements Documents</a:t>
-            </a:r>
-          </a:p>
-          <a:p>
-            <a:r>
-              <a:rPr lang="en-US" dirty="0"/>
-              <a:t>19.2 Gathering ASRs by Interviewing Stakeholders</a:t>
-            </a:r>
-          </a:p>
-          <a:p>
-            <a:r>
-              <a:rPr lang="en-US" dirty="0"/>
-              <a:t>19.3 Gathering ASRs by Understanding the Business Goals</a:t>
-            </a:r>
-          </a:p>
-          <a:p>
-            <a:r>
-              <a:rPr lang="en-US" dirty="0"/>
-              <a:t>19.4 Capturing ASRs in a Utility Tree</a:t>
-            </a:r>
-          </a:p>
-          <a:p>
-            <a:r>
-              <a:rPr lang="en-US" dirty="0"/>
-              <a:t>19.5 Change Happens </a:t>
+              <a:rPr lang="en-US"/>
+              <a:t>Gathering </a:t>
+            </a:r>
+            <a:r>
+              <a:rPr lang="en-US" dirty="0"/>
+              <a:t>ASRs from Requirements Documents</a:t>
+            </a:r>
+          </a:p>
+          <a:p>
+            <a:r>
+              <a:rPr lang="en-US" dirty="0"/>
+              <a:t>Gathering ASRs by Interviewing Stakeholders</a:t>
+            </a:r>
+          </a:p>
+          <a:p>
+            <a:r>
+              <a:rPr lang="en-US" dirty="0"/>
+              <a:t>Gathering ASRs by Understanding the Business Goals</a:t>
+            </a:r>
+          </a:p>
+          <a:p>
+            <a:r>
+              <a:rPr lang="en-US" dirty="0"/>
+              <a:t>Capturing ASRs in a Utility Tree</a:t>
+            </a:r>
+          </a:p>
+          <a:p>
+            <a:r>
+              <a:rPr lang="en-US" dirty="0"/>
+              <a:t>Change Happens </a:t>
             </a:r>
           </a:p>
           <a:p>
@@ -6687,7 +6691,7 @@
           <a:p>
             <a:r>
               <a:rPr lang="en-US" dirty="0"/>
-              <a:t>19.1 ASRs from Requirements Documents</a:t>
+              <a:t>ASRs from Requirements Documents</a:t>
             </a:r>
           </a:p>
         </p:txBody>

--- a/chapter 19.pptx
+++ b/chapter 19.pptx
@@ -5,10 +5,10 @@
     <p:sldMasterId id="2147483648" r:id="rId1"/>
   </p:sldMasterIdLst>
   <p:notesMasterIdLst>
-    <p:notesMasterId r:id="rId26"/>
+    <p:notesMasterId r:id="rId27"/>
   </p:notesMasterIdLst>
   <p:handoutMasterIdLst>
-    <p:handoutMasterId r:id="rId27"/>
+    <p:handoutMasterId r:id="rId28"/>
   </p:handoutMasterIdLst>
   <p:sldIdLst>
     <p:sldId id="259" r:id="rId2"/>
@@ -26,15 +26,16 @@
     <p:sldId id="293" r:id="rId14"/>
     <p:sldId id="296" r:id="rId15"/>
     <p:sldId id="297" r:id="rId16"/>
-    <p:sldId id="298" r:id="rId17"/>
+    <p:sldId id="310" r:id="rId17"/>
     <p:sldId id="295" r:id="rId18"/>
     <p:sldId id="299" r:id="rId19"/>
     <p:sldId id="300" r:id="rId20"/>
     <p:sldId id="301" r:id="rId21"/>
     <p:sldId id="302" r:id="rId22"/>
-    <p:sldId id="304" r:id="rId23"/>
-    <p:sldId id="306" r:id="rId24"/>
-    <p:sldId id="307" r:id="rId25"/>
+    <p:sldId id="309" r:id="rId23"/>
+    <p:sldId id="304" r:id="rId24"/>
+    <p:sldId id="306" r:id="rId25"/>
+    <p:sldId id="307" r:id="rId26"/>
   </p:sldIdLst>
   <p:sldSz cx="12192000" cy="6858000"/>
   <p:notesSz cx="6858000" cy="9144000"/>
@@ -249,7 +250,7 @@
           <a:p>
             <a:fld id="{13928E3B-7122-43E6-B3BB-09448C56C96C}" type="datetimeFigureOut">
               <a:rPr lang="en-US" smtClean="0"/>
-              <a:t>25/07/24</a:t>
+              <a:t>25/07/25</a:t>
             </a:fld>
             <a:endParaRPr lang="en-US" dirty="0"/>
           </a:p>
@@ -427,7 +428,7 @@
           <a:p>
             <a:fld id="{B98C9CAF-43DF-44BF-8016-DC193E4E594B}" type="datetimeFigureOut">
               <a:rPr lang="en-US" smtClean="0"/>
-              <a:t>25/07/24</a:t>
+              <a:t>25/07/25</a:t>
             </a:fld>
             <a:endParaRPr lang="en-US" dirty="0"/>
           </a:p>
@@ -4357,10 +4358,10 @@
       </p:grpSpPr>
       <p:sp>
         <p:nvSpPr>
-          <p:cNvPr id="2" name="Content Placeholder 1">
-            <a:extLst>
-              <a:ext uri="{FF2B5EF4-FFF2-40B4-BE49-F238E27FC236}">
-                <a16:creationId xmlns:a16="http://schemas.microsoft.com/office/drawing/2014/main" id="{6812E38F-C3A0-EA9B-AA6C-4C44E09D008F}"/>
+          <p:cNvPr id="3" name="Content Placeholder 2">
+            <a:extLst>
+              <a:ext uri="{FF2B5EF4-FFF2-40B4-BE49-F238E27FC236}">
+                <a16:creationId xmlns:a16="http://schemas.microsoft.com/office/drawing/2014/main" id="{419DB0F0-7DAC-00E6-1BC3-23C5C36D17A5}"/>
               </a:ext>
             </a:extLst>
           </p:cNvPr>
@@ -4371,12 +4372,7 @@
             <p:ph sz="half" idx="2"/>
           </p:nvPr>
         </p:nvSpPr>
-        <p:spPr>
-          <a:xfrm>
-            <a:off x="588977" y="1015164"/>
-            <a:ext cx="11058526" cy="5676247"/>
-          </a:xfrm>
-        </p:spPr>
+        <p:spPr/>
         <p:txBody>
           <a:bodyPr/>
           <a:lstStyle/>
@@ -4426,6 +4422,58 @@
               <a:rPr lang="en-US" dirty="0"/>
               <a:t>Prioritization of the scenarios is accomplished by allocating each stakeholder a number of votes equal to 30 percent of the total number of scenarios</a:t>
             </a:r>
+            <a:endParaRPr lang="en-US" dirty="0">
+              <a:solidFill>
+                <a:schemeClr val="accent4">
+                  <a:lumMod val="50000"/>
+                </a:schemeClr>
+              </a:solidFill>
+            </a:endParaRPr>
+          </a:p>
+          <a:p>
+            <a:endParaRPr lang="en-US" dirty="0"/>
+          </a:p>
+        </p:txBody>
+      </p:sp>
+      <p:sp>
+        <p:nvSpPr>
+          <p:cNvPr id="4" name="Content Placeholder 3">
+            <a:extLst>
+              <a:ext uri="{FF2B5EF4-FFF2-40B4-BE49-F238E27FC236}">
+                <a16:creationId xmlns:a16="http://schemas.microsoft.com/office/drawing/2014/main" id="{EC69EE3F-CEF7-40C9-55BD-3D3D0575ADBC}"/>
+              </a:ext>
+            </a:extLst>
+          </p:cNvPr>
+          <p:cNvSpPr>
+            <a:spLocks noGrp="1"/>
+          </p:cNvSpPr>
+          <p:nvPr>
+            <p:ph sz="half" idx="12"/>
+          </p:nvPr>
+        </p:nvSpPr>
+        <p:spPr/>
+        <p:txBody>
+          <a:bodyPr/>
+          <a:lstStyle/>
+          <a:p>
+            <a:pPr lvl="1"/>
+            <a:endParaRPr lang="en-US" dirty="0">
+              <a:solidFill>
+                <a:schemeClr val="accent4">
+                  <a:lumMod val="50000"/>
+                </a:schemeClr>
+              </a:solidFill>
+            </a:endParaRPr>
+          </a:p>
+          <a:p>
+            <a:pPr lvl="1"/>
+            <a:endParaRPr lang="en-US" dirty="0">
+              <a:solidFill>
+                <a:schemeClr val="accent4">
+                  <a:lumMod val="50000"/>
+                </a:schemeClr>
+              </a:solidFill>
+            </a:endParaRPr>
           </a:p>
           <a:p>
             <a:pPr lvl="1"/>
@@ -4461,10 +4509,10 @@
       </p:sp>
       <p:sp>
         <p:nvSpPr>
-          <p:cNvPr id="7" name="Title 6">
-            <a:extLst>
-              <a:ext uri="{FF2B5EF4-FFF2-40B4-BE49-F238E27FC236}">
-                <a16:creationId xmlns:a16="http://schemas.microsoft.com/office/drawing/2014/main" id="{B7F8EA2B-3F6B-0DBE-3E7A-8C0901C08919}"/>
+          <p:cNvPr id="5" name="Title 4">
+            <a:extLst>
+              <a:ext uri="{FF2B5EF4-FFF2-40B4-BE49-F238E27FC236}">
+                <a16:creationId xmlns:a16="http://schemas.microsoft.com/office/drawing/2014/main" id="{CF3FC980-E7F7-B48B-5CFB-4DA6196D0157}"/>
               </a:ext>
             </a:extLst>
           </p:cNvPr>
@@ -4489,26 +4537,21 @@
       </p:sp>
       <p:sp>
         <p:nvSpPr>
-          <p:cNvPr id="4" name="Slide Number Placeholder 3">
-            <a:extLst>
-              <a:ext uri="{FF2B5EF4-FFF2-40B4-BE49-F238E27FC236}">
-                <a16:creationId xmlns:a16="http://schemas.microsoft.com/office/drawing/2014/main" id="{4B131E44-B6EF-81BA-8277-0A7C8DAD7118}"/>
-              </a:ext>
-            </a:extLst>
-          </p:cNvPr>
-          <p:cNvSpPr>
-            <a:spLocks noGrp="1"/>
-          </p:cNvSpPr>
-          <p:nvPr>
-            <p:ph type="sldNum" sz="quarter" idx="10"/>
-          </p:nvPr>
-        </p:nvSpPr>
-        <p:spPr>
-          <a:xfrm>
-            <a:off x="556149" y="153671"/>
-            <a:ext cx="670079" cy="641281"/>
-          </a:xfrm>
-        </p:spPr>
+          <p:cNvPr id="6" name="Slide Number Placeholder 5">
+            <a:extLst>
+              <a:ext uri="{FF2B5EF4-FFF2-40B4-BE49-F238E27FC236}">
+                <a16:creationId xmlns:a16="http://schemas.microsoft.com/office/drawing/2014/main" id="{3A2D9E1C-8F00-25D7-A452-77A1DA483466}"/>
+              </a:ext>
+            </a:extLst>
+          </p:cNvPr>
+          <p:cNvSpPr>
+            <a:spLocks noGrp="1"/>
+          </p:cNvSpPr>
+          <p:nvPr>
+            <p:ph type="sldNum" sz="quarter" idx="13"/>
+          </p:nvPr>
+        </p:nvSpPr>
+        <p:spPr/>
         <p:txBody>
           <a:bodyPr/>
           <a:lstStyle/>
@@ -4522,10 +4565,46 @@
           </a:p>
         </p:txBody>
       </p:sp>
+      <p:pic>
+        <p:nvPicPr>
+          <p:cNvPr id="12" name="Picture Placeholder 11">
+            <a:extLst>
+              <a:ext uri="{FF2B5EF4-FFF2-40B4-BE49-F238E27FC236}">
+                <a16:creationId xmlns:a16="http://schemas.microsoft.com/office/drawing/2014/main" id="{23798C72-05DD-E713-D47E-A674C9F0717A}"/>
+              </a:ext>
+            </a:extLst>
+          </p:cNvPr>
+          <p:cNvPicPr>
+            <a:picLocks noGrp="1" noChangeAspect="1"/>
+          </p:cNvPicPr>
+          <p:nvPr>
+            <p:ph type="pic" sz="quarter" idx="11"/>
+          </p:nvPr>
+        </p:nvPicPr>
+        <p:blipFill>
+          <a:blip r:embed="rId2">
+            <a:extLst>
+              <a:ext uri="{28A0092B-C50C-407E-A947-70E740481C1C}">
+                <a14:useLocalDpi xmlns:a14="http://schemas.microsoft.com/office/drawing/2010/main" val="0"/>
+              </a:ext>
+            </a:extLst>
+          </a:blip>
+          <a:srcRect t="14154" b="10090"/>
+          <a:stretch>
+            <a:fillRect/>
+          </a:stretch>
+        </p:blipFill>
+        <p:spPr>
+          <a:xfrm>
+            <a:off x="5809426" y="1192305"/>
+            <a:ext cx="5826425" cy="2992227"/>
+          </a:xfrm>
+        </p:spPr>
+      </p:pic>
     </p:spTree>
     <p:extLst>
       <p:ext uri="{BB962C8B-B14F-4D97-AF65-F5344CB8AC3E}">
-        <p14:creationId xmlns:p14="http://schemas.microsoft.com/office/powerpoint/2010/main" val="4003044262"/>
+        <p14:creationId xmlns:p14="http://schemas.microsoft.com/office/powerpoint/2010/main" val="1642516246"/>
       </p:ext>
     </p:extLst>
   </p:cSld>
@@ -5626,7 +5705,7 @@
           <p:cNvPr id="6" name="Picture Placeholder 5">
             <a:extLst>
               <a:ext uri="{FF2B5EF4-FFF2-40B4-BE49-F238E27FC236}">
-                <a16:creationId xmlns:a16="http://schemas.microsoft.com/office/drawing/2014/main" id="{8AAFBBE4-E28B-7CB1-A7FA-1851933F9FCB}"/>
+                <a16:creationId xmlns:a16="http://schemas.microsoft.com/office/drawing/2014/main" id="{AAE71760-293D-330E-AB4B-F3BD5298953F}"/>
               </a:ext>
             </a:extLst>
           </p:cNvPr>
@@ -5637,7 +5716,7 @@
             <p:ph type="pic" sz="quarter" idx="11"/>
           </p:nvPr>
         </p:nvPicPr>
-        <p:blipFill rotWithShape="1">
+        <p:blipFill>
           <a:blip r:embed="rId2">
             <a:extLst>
               <a:ext uri="{28A0092B-C50C-407E-A947-70E740481C1C}">
@@ -5645,22 +5724,19 @@
               </a:ext>
             </a:extLst>
           </a:blip>
-          <a:srcRect l="-38527" t="1339" r="-38527"/>
-          <a:stretch/>
+          <a:srcRect t="1804" b="1804"/>
+          <a:stretch>
+            <a:fillRect/>
+          </a:stretch>
         </p:blipFill>
-        <p:spPr>
-          <a:xfrm>
-            <a:off x="1226228" y="489334"/>
-            <a:ext cx="9740579" cy="5405717"/>
-          </a:xfrm>
-        </p:spPr>
+        <p:spPr/>
       </p:pic>
       <p:sp>
         <p:nvSpPr>
           <p:cNvPr id="3" name="Text Placeholder 2">
             <a:extLst>
               <a:ext uri="{FF2B5EF4-FFF2-40B4-BE49-F238E27FC236}">
-                <a16:creationId xmlns:a16="http://schemas.microsoft.com/office/drawing/2014/main" id="{744AA59E-6FA6-87E5-5D26-97B5DD59E17F}"/>
+                <a16:creationId xmlns:a16="http://schemas.microsoft.com/office/drawing/2014/main" id="{A2529886-87A4-FB96-D218-3DD7E17EB452}"/>
               </a:ext>
             </a:extLst>
           </p:cNvPr>
@@ -5671,19 +5747,14 @@
             <p:ph type="body" sz="quarter" idx="12"/>
           </p:nvPr>
         </p:nvSpPr>
-        <p:spPr>
-          <a:xfrm>
-            <a:off x="555625" y="5997388"/>
-            <a:ext cx="11036300" cy="564777"/>
-          </a:xfrm>
-        </p:spPr>
+        <p:spPr/>
         <p:txBody>
           <a:bodyPr/>
           <a:lstStyle/>
           <a:p>
             <a:r>
               <a:rPr lang="en-US" dirty="0"/>
-              <a:t>Tabular Form of the Utility Tree for a System in the Healthcare Space</a:t>
+              <a:t>An example of tree Form of the Utility Tree</a:t>
             </a:r>
           </a:p>
         </p:txBody>
@@ -5693,7 +5764,7 @@
           <p:cNvPr id="4" name="Slide Number Placeholder 3">
             <a:extLst>
               <a:ext uri="{FF2B5EF4-FFF2-40B4-BE49-F238E27FC236}">
-                <a16:creationId xmlns:a16="http://schemas.microsoft.com/office/drawing/2014/main" id="{194873B5-6D10-C2EA-CBB3-4D46C01AD8D7}"/>
+                <a16:creationId xmlns:a16="http://schemas.microsoft.com/office/drawing/2014/main" id="{5F6FA6CF-231E-1074-F3D9-5BA21838ACE8}"/>
               </a:ext>
             </a:extLst>
           </p:cNvPr>
@@ -5721,7 +5792,7 @@
     </p:spTree>
     <p:extLst>
       <p:ext uri="{BB962C8B-B14F-4D97-AF65-F5344CB8AC3E}">
-        <p14:creationId xmlns:p14="http://schemas.microsoft.com/office/powerpoint/2010/main" val="897258297"/>
+        <p14:creationId xmlns:p14="http://schemas.microsoft.com/office/powerpoint/2010/main" val="19755220"/>
       </p:ext>
     </p:extLst>
   </p:cSld>
@@ -5748,88 +5819,69 @@
           <a:chExt cx="0" cy="0"/>
         </a:xfrm>
       </p:grpSpPr>
-      <p:sp>
-        <p:nvSpPr>
-          <p:cNvPr id="2" name="Content Placeholder 1">
-            <a:extLst>
-              <a:ext uri="{FF2B5EF4-FFF2-40B4-BE49-F238E27FC236}">
-                <a16:creationId xmlns:a16="http://schemas.microsoft.com/office/drawing/2014/main" id="{E939A8F6-495A-E355-8FE4-FCE17007979F}"/>
-              </a:ext>
-            </a:extLst>
-          </p:cNvPr>
-          <p:cNvSpPr>
-            <a:spLocks noGrp="1"/>
-          </p:cNvSpPr>
-          <p:nvPr>
-            <p:ph sz="half" idx="2"/>
-          </p:nvPr>
-        </p:nvSpPr>
-        <p:spPr/>
+      <p:pic>
+        <p:nvPicPr>
+          <p:cNvPr id="6" name="Picture Placeholder 5">
+            <a:extLst>
+              <a:ext uri="{FF2B5EF4-FFF2-40B4-BE49-F238E27FC236}">
+                <a16:creationId xmlns:a16="http://schemas.microsoft.com/office/drawing/2014/main" id="{8AAFBBE4-E28B-7CB1-A7FA-1851933F9FCB}"/>
+              </a:ext>
+            </a:extLst>
+          </p:cNvPr>
+          <p:cNvPicPr>
+            <a:picLocks noGrp="1" noChangeAspect="1"/>
+          </p:cNvPicPr>
+          <p:nvPr>
+            <p:ph type="pic" sz="quarter" idx="11"/>
+          </p:nvPr>
+        </p:nvPicPr>
+        <p:blipFill rotWithShape="1">
+          <a:blip r:embed="rId2">
+            <a:extLst>
+              <a:ext uri="{28A0092B-C50C-407E-A947-70E740481C1C}">
+                <a14:useLocalDpi xmlns:a14="http://schemas.microsoft.com/office/drawing/2010/main" val="0"/>
+              </a:ext>
+            </a:extLst>
+          </a:blip>
+          <a:srcRect l="-38527" t="1339" r="-38527"/>
+          <a:stretch/>
+        </p:blipFill>
+        <p:spPr>
+          <a:xfrm>
+            <a:off x="1226228" y="489334"/>
+            <a:ext cx="9740579" cy="5405717"/>
+          </a:xfrm>
+        </p:spPr>
+      </p:pic>
+      <p:sp>
+        <p:nvSpPr>
+          <p:cNvPr id="3" name="Text Placeholder 2">
+            <a:extLst>
+              <a:ext uri="{FF2B5EF4-FFF2-40B4-BE49-F238E27FC236}">
+                <a16:creationId xmlns:a16="http://schemas.microsoft.com/office/drawing/2014/main" id="{744AA59E-6FA6-87E5-5D26-97B5DD59E17F}"/>
+              </a:ext>
+            </a:extLst>
+          </p:cNvPr>
+          <p:cNvSpPr>
+            <a:spLocks noGrp="1"/>
+          </p:cNvSpPr>
+          <p:nvPr>
+            <p:ph type="body" sz="quarter" idx="12"/>
+          </p:nvPr>
+        </p:nvSpPr>
+        <p:spPr>
+          <a:xfrm>
+            <a:off x="555625" y="5997388"/>
+            <a:ext cx="11036300" cy="564777"/>
+          </a:xfrm>
+        </p:spPr>
         <p:txBody>
           <a:bodyPr/>
           <a:lstStyle/>
           <a:p>
             <a:r>
               <a:rPr lang="en-US" dirty="0"/>
-              <a:t>Requirements—whether captured or not—change all the time.</a:t>
-            </a:r>
-          </a:p>
-          <a:p>
-            <a:r>
-              <a:rPr lang="en-US" dirty="0"/>
-              <a:t>Architects have to adapt and keep up, to ensure that their architectures are still the right ones that will bring success to the project.</a:t>
-            </a:r>
-          </a:p>
-          <a:p>
-            <a:r>
-              <a:rPr lang="en-US" dirty="0"/>
-              <a:t>Always keep a channel open to the key stakeholders who determine the ASRs so you can keep up with changing requirements.</a:t>
-            </a:r>
-          </a:p>
-          <a:p>
-            <a:r>
-              <a:rPr lang="en-US" dirty="0"/>
-              <a:t>Even better than keeping up with change is staying one step ahead of it.</a:t>
-            </a:r>
-          </a:p>
-          <a:p>
-            <a:r>
-              <a:rPr lang="en-US" dirty="0"/>
-              <a:t>If you get wind of a change to the ASRs, you can take preliminary steps to design for it to understand the implications.</a:t>
-            </a:r>
-          </a:p>
-          <a:p>
-            <a:r>
-              <a:rPr lang="en-US" dirty="0"/>
-              <a:t>If the change will be prohibitively expensive, sharing that information with the stakeholders will be a valuable contribution, and the earlier they know it, the better.</a:t>
-            </a:r>
-          </a:p>
-        </p:txBody>
-      </p:sp>
-      <p:sp>
-        <p:nvSpPr>
-          <p:cNvPr id="3" name="Title 2">
-            <a:extLst>
-              <a:ext uri="{FF2B5EF4-FFF2-40B4-BE49-F238E27FC236}">
-                <a16:creationId xmlns:a16="http://schemas.microsoft.com/office/drawing/2014/main" id="{20D958EE-B50E-75EF-961A-ECC948F93F7F}"/>
-              </a:ext>
-            </a:extLst>
-          </p:cNvPr>
-          <p:cNvSpPr>
-            <a:spLocks noGrp="1"/>
-          </p:cNvSpPr>
-          <p:nvPr>
-            <p:ph type="title"/>
-          </p:nvPr>
-        </p:nvSpPr>
-        <p:spPr/>
-        <p:txBody>
-          <a:bodyPr/>
-          <a:lstStyle/>
-          <a:p>
-            <a:r>
-              <a:rPr lang="en-US" dirty="0"/>
-              <a:t>Change Happens</a:t>
+              <a:t>Tabular Form of the Utility Tree for a System in the Healthcare Space</a:t>
             </a:r>
           </a:p>
         </p:txBody>
@@ -5839,15 +5891,15 @@
           <p:cNvPr id="4" name="Slide Number Placeholder 3">
             <a:extLst>
               <a:ext uri="{FF2B5EF4-FFF2-40B4-BE49-F238E27FC236}">
-                <a16:creationId xmlns:a16="http://schemas.microsoft.com/office/drawing/2014/main" id="{8E96CA32-A3AF-F463-3141-6C12AC089173}"/>
-              </a:ext>
-            </a:extLst>
-          </p:cNvPr>
-          <p:cNvSpPr>
-            <a:spLocks noGrp="1"/>
-          </p:cNvSpPr>
-          <p:nvPr>
-            <p:ph type="sldNum" sz="quarter" idx="10"/>
+                <a16:creationId xmlns:a16="http://schemas.microsoft.com/office/drawing/2014/main" id="{194873B5-6D10-C2EA-CBB3-4D46C01AD8D7}"/>
+              </a:ext>
+            </a:extLst>
+          </p:cNvPr>
+          <p:cNvSpPr>
+            <a:spLocks noGrp="1"/>
+          </p:cNvSpPr>
+          <p:nvPr>
+            <p:ph type="sldNum" sz="quarter" idx="13"/>
           </p:nvPr>
         </p:nvSpPr>
         <p:spPr/>
@@ -5867,7 +5919,7 @@
     </p:spTree>
     <p:extLst>
       <p:ext uri="{BB962C8B-B14F-4D97-AF65-F5344CB8AC3E}">
-        <p14:creationId xmlns:p14="http://schemas.microsoft.com/office/powerpoint/2010/main" val="1895953766"/>
+        <p14:creationId xmlns:p14="http://schemas.microsoft.com/office/powerpoint/2010/main" val="897258297"/>
       </p:ext>
     </p:extLst>
   </p:cSld>
@@ -5899,7 +5951,7 @@
           <p:cNvPr id="2" name="Content Placeholder 1">
             <a:extLst>
               <a:ext uri="{FF2B5EF4-FFF2-40B4-BE49-F238E27FC236}">
-                <a16:creationId xmlns:a16="http://schemas.microsoft.com/office/drawing/2014/main" id="{0915A95B-2AB4-1738-FC05-2057F32B1407}"/>
+                <a16:creationId xmlns:a16="http://schemas.microsoft.com/office/drawing/2014/main" id="{E939A8F6-495A-E355-8FE4-FCE17007979F}"/>
               </a:ext>
             </a:extLst>
           </p:cNvPr>
@@ -5917,65 +5969,38 @@
           <a:p>
             <a:r>
               <a:rPr lang="en-US" dirty="0"/>
-              <a:t>Architectures are driven by architecturally significant requirements: requirements that will have profound effects on the architecture. </a:t>
-            </a:r>
-          </a:p>
-          <a:p>
-            <a:pPr lvl="1"/>
-            <a:r>
-              <a:rPr lang="en-US" dirty="0"/>
-              <a:t>Architecturally significant requirements may be captured from requirements documents, by interviewing stakeholders, or by conducting a Quality Attribute Workshop.</a:t>
-            </a:r>
-          </a:p>
-          <a:p>
-            <a:r>
-              <a:rPr lang="en-US" dirty="0"/>
-              <a:t>Be mindful of the business goals of the organization. </a:t>
-            </a:r>
-          </a:p>
-          <a:p>
-            <a:pPr lvl="1"/>
-            <a:r>
-              <a:rPr lang="en-US" dirty="0"/>
-              <a:t>Business goals can be expressed in a common, structured form and represented as scenarios. </a:t>
-            </a:r>
-          </a:p>
-          <a:p>
-            <a:pPr lvl="1"/>
-            <a:r>
-              <a:rPr lang="en-US" dirty="0"/>
-              <a:t>Business goals may be elicited and documented using a structured facilitation method called PALM.</a:t>
-            </a:r>
-          </a:p>
-          <a:p>
-            <a:r>
-              <a:rPr lang="en-US" dirty="0"/>
-              <a:t>A useful representation of quality attribute requirements is in a utility tree. </a:t>
-            </a:r>
-          </a:p>
-          <a:p>
-            <a:pPr lvl="1"/>
-            <a:r>
-              <a:rPr lang="en-US" dirty="0"/>
-              <a:t>The utility tree helps to capture these requirements in a structured form.</a:t>
-            </a:r>
-          </a:p>
-          <a:p>
-            <a:pPr lvl="1"/>
-            <a:r>
-              <a:rPr lang="en-US" dirty="0"/>
-              <a:t>Scenarios are prioritized.</a:t>
-            </a:r>
-          </a:p>
-          <a:p>
-            <a:pPr lvl="1"/>
-            <a:r>
-              <a:rPr lang="en-US" dirty="0"/>
-              <a:t>This prioritized set defines your “marching orders” as an architect.</a:t>
-            </a:r>
-          </a:p>
-          <a:p>
-            <a:endParaRPr lang="en-US" dirty="0"/>
+              <a:t>Requirements, whether captured or not, change all the time.</a:t>
+            </a:r>
+          </a:p>
+          <a:p>
+            <a:r>
+              <a:rPr lang="en-US" dirty="0"/>
+              <a:t>Architects have to adapt and keep up, to ensure that their architectures are still the right ones that will bring success to the project.</a:t>
+            </a:r>
+          </a:p>
+          <a:p>
+            <a:r>
+              <a:rPr lang="en-US" dirty="0"/>
+              <a:t>Always keep a channel open to the key stakeholders who determine the ASRs so you can keep up with changing requirements.</a:t>
+            </a:r>
+          </a:p>
+          <a:p>
+            <a:r>
+              <a:rPr lang="en-US" dirty="0"/>
+              <a:t>Even better than keeping up with change is staying one step ahead of it.</a:t>
+            </a:r>
+          </a:p>
+          <a:p>
+            <a:r>
+              <a:rPr lang="en-US" dirty="0"/>
+              <a:t>If you get wind of a change to the ASRs, you can take preliminary steps to design for it to understand the implications.</a:t>
+            </a:r>
+          </a:p>
+          <a:p>
+            <a:r>
+              <a:rPr lang="en-US" dirty="0"/>
+              <a:t>If the change will be prohibitively expensive, sharing that information with the stakeholders will be a valuable contribution, and the earlier they know it, the better.</a:t>
+            </a:r>
           </a:p>
         </p:txBody>
       </p:sp>
@@ -5984,7 +6009,7 @@
           <p:cNvPr id="3" name="Title 2">
             <a:extLst>
               <a:ext uri="{FF2B5EF4-FFF2-40B4-BE49-F238E27FC236}">
-                <a16:creationId xmlns:a16="http://schemas.microsoft.com/office/drawing/2014/main" id="{9CE7D61F-EDDB-C36C-6C63-10317690C9F3}"/>
+                <a16:creationId xmlns:a16="http://schemas.microsoft.com/office/drawing/2014/main" id="{20D958EE-B50E-75EF-961A-ECC948F93F7F}"/>
               </a:ext>
             </a:extLst>
           </p:cNvPr>
@@ -6002,7 +6027,7 @@
           <a:p>
             <a:r>
               <a:rPr lang="en-US" dirty="0"/>
-              <a:t>Summary</a:t>
+              <a:t>Change Happens</a:t>
             </a:r>
           </a:p>
         </p:txBody>
@@ -6012,7 +6037,7 @@
           <p:cNvPr id="4" name="Slide Number Placeholder 3">
             <a:extLst>
               <a:ext uri="{FF2B5EF4-FFF2-40B4-BE49-F238E27FC236}">
-                <a16:creationId xmlns:a16="http://schemas.microsoft.com/office/drawing/2014/main" id="{672C22DB-C4CB-3974-E7B1-4E6A19405B71}"/>
+                <a16:creationId xmlns:a16="http://schemas.microsoft.com/office/drawing/2014/main" id="{8E96CA32-A3AF-F463-3141-6C12AC089173}"/>
               </a:ext>
             </a:extLst>
           </p:cNvPr>
@@ -6032,6 +6057,179 @@
               <a:rPr lang="en-US" smtClean="0"/>
               <a:pPr/>
               <a:t>24</a:t>
+            </a:fld>
+            <a:endParaRPr lang="en-US" dirty="0"/>
+          </a:p>
+        </p:txBody>
+      </p:sp>
+    </p:spTree>
+    <p:extLst>
+      <p:ext uri="{BB962C8B-B14F-4D97-AF65-F5344CB8AC3E}">
+        <p14:creationId xmlns:p14="http://schemas.microsoft.com/office/powerpoint/2010/main" val="1895953766"/>
+      </p:ext>
+    </p:extLst>
+  </p:cSld>
+  <p:clrMapOvr>
+    <a:masterClrMapping/>
+  </p:clrMapOvr>
+</p:sld>
+</file>
+
+<file path=ppt/slides/slide25.xml><?xml version="1.0" encoding="utf-8"?>
+<p:sld xmlns:a="http://schemas.openxmlformats.org/drawingml/2006/main" xmlns:r="http://schemas.openxmlformats.org/officeDocument/2006/relationships" xmlns:p="http://schemas.openxmlformats.org/presentationml/2006/main">
+  <p:cSld>
+    <p:spTree>
+      <p:nvGrpSpPr>
+        <p:cNvPr id="1" name=""/>
+        <p:cNvGrpSpPr/>
+        <p:nvPr/>
+      </p:nvGrpSpPr>
+      <p:grpSpPr>
+        <a:xfrm>
+          <a:off x="0" y="0"/>
+          <a:ext cx="0" cy="0"/>
+          <a:chOff x="0" y="0"/>
+          <a:chExt cx="0" cy="0"/>
+        </a:xfrm>
+      </p:grpSpPr>
+      <p:sp>
+        <p:nvSpPr>
+          <p:cNvPr id="2" name="Content Placeholder 1">
+            <a:extLst>
+              <a:ext uri="{FF2B5EF4-FFF2-40B4-BE49-F238E27FC236}">
+                <a16:creationId xmlns:a16="http://schemas.microsoft.com/office/drawing/2014/main" id="{0915A95B-2AB4-1738-FC05-2057F32B1407}"/>
+              </a:ext>
+            </a:extLst>
+          </p:cNvPr>
+          <p:cNvSpPr>
+            <a:spLocks noGrp="1"/>
+          </p:cNvSpPr>
+          <p:nvPr>
+            <p:ph sz="half" idx="2"/>
+          </p:nvPr>
+        </p:nvSpPr>
+        <p:spPr/>
+        <p:txBody>
+          <a:bodyPr/>
+          <a:lstStyle/>
+          <a:p>
+            <a:r>
+              <a:rPr lang="en-US" dirty="0"/>
+              <a:t>Architectures are driven by architecturally significant requirements: requirements that will have profound effects on the architecture. </a:t>
+            </a:r>
+          </a:p>
+          <a:p>
+            <a:pPr lvl="1"/>
+            <a:r>
+              <a:rPr lang="en-US" dirty="0"/>
+              <a:t>Architecturally significant requirements may be captured from requirements documents, by interviewing stakeholders, or by conducting a Quality Attribute Workshop.</a:t>
+            </a:r>
+          </a:p>
+          <a:p>
+            <a:r>
+              <a:rPr lang="en-US" dirty="0"/>
+              <a:t>Be mindful of the business goals of the organization. </a:t>
+            </a:r>
+          </a:p>
+          <a:p>
+            <a:pPr lvl="1"/>
+            <a:r>
+              <a:rPr lang="en-US" dirty="0"/>
+              <a:t>Business goals can be expressed in a common, structured form and represented as scenarios. </a:t>
+            </a:r>
+          </a:p>
+          <a:p>
+            <a:pPr lvl="1"/>
+            <a:r>
+              <a:rPr lang="en-US" dirty="0"/>
+              <a:t>Business goals may be elicited and documented using a structured facilitation method called PALM.</a:t>
+            </a:r>
+          </a:p>
+          <a:p>
+            <a:r>
+              <a:rPr lang="en-US" dirty="0"/>
+              <a:t>A useful representation of quality attribute requirements is in a utility tree. </a:t>
+            </a:r>
+          </a:p>
+          <a:p>
+            <a:pPr lvl="1"/>
+            <a:r>
+              <a:rPr lang="en-US" dirty="0"/>
+              <a:t>The utility tree helps to capture these requirements in a structured form.</a:t>
+            </a:r>
+          </a:p>
+          <a:p>
+            <a:pPr lvl="1"/>
+            <a:r>
+              <a:rPr lang="en-US" dirty="0"/>
+              <a:t>Scenarios are prioritized.</a:t>
+            </a:r>
+          </a:p>
+          <a:p>
+            <a:pPr lvl="1"/>
+            <a:r>
+              <a:rPr lang="en-US" dirty="0"/>
+              <a:t>This prioritized set defines your “marching orders” as an architect.</a:t>
+            </a:r>
+          </a:p>
+          <a:p>
+            <a:endParaRPr lang="en-US" dirty="0"/>
+          </a:p>
+        </p:txBody>
+      </p:sp>
+      <p:sp>
+        <p:nvSpPr>
+          <p:cNvPr id="3" name="Title 2">
+            <a:extLst>
+              <a:ext uri="{FF2B5EF4-FFF2-40B4-BE49-F238E27FC236}">
+                <a16:creationId xmlns:a16="http://schemas.microsoft.com/office/drawing/2014/main" id="{9CE7D61F-EDDB-C36C-6C63-10317690C9F3}"/>
+              </a:ext>
+            </a:extLst>
+          </p:cNvPr>
+          <p:cNvSpPr>
+            <a:spLocks noGrp="1"/>
+          </p:cNvSpPr>
+          <p:nvPr>
+            <p:ph type="title"/>
+          </p:nvPr>
+        </p:nvSpPr>
+        <p:spPr/>
+        <p:txBody>
+          <a:bodyPr/>
+          <a:lstStyle/>
+          <a:p>
+            <a:r>
+              <a:rPr lang="en-US" dirty="0"/>
+              <a:t>Summary</a:t>
+            </a:r>
+          </a:p>
+        </p:txBody>
+      </p:sp>
+      <p:sp>
+        <p:nvSpPr>
+          <p:cNvPr id="4" name="Slide Number Placeholder 3">
+            <a:extLst>
+              <a:ext uri="{FF2B5EF4-FFF2-40B4-BE49-F238E27FC236}">
+                <a16:creationId xmlns:a16="http://schemas.microsoft.com/office/drawing/2014/main" id="{672C22DB-C4CB-3974-E7B1-4E6A19405B71}"/>
+              </a:ext>
+            </a:extLst>
+          </p:cNvPr>
+          <p:cNvSpPr>
+            <a:spLocks noGrp="1"/>
+          </p:cNvSpPr>
+          <p:nvPr>
+            <p:ph type="sldNum" sz="quarter" idx="10"/>
+          </p:nvPr>
+        </p:nvSpPr>
+        <p:spPr/>
+        <p:txBody>
+          <a:bodyPr/>
+          <a:lstStyle/>
+          <a:p>
+            <a:fld id="{AE311D09-C3D9-45E8-99CE-78E12234EEAD}" type="slidenum">
+              <a:rPr lang="en-US" smtClean="0"/>
+              <a:pPr/>
+              <a:t>25</a:t>
             </a:fld>
             <a:endParaRPr lang="en-US" dirty="0"/>
           </a:p>

--- a/chapter 19.pptx
+++ b/chapter 19.pptx
@@ -5,10 +5,10 @@
     <p:sldMasterId id="2147483648" r:id="rId1"/>
   </p:sldMasterIdLst>
   <p:notesMasterIdLst>
-    <p:notesMasterId r:id="rId27"/>
+    <p:notesMasterId r:id="rId29"/>
   </p:notesMasterIdLst>
   <p:handoutMasterIdLst>
-    <p:handoutMasterId r:id="rId28"/>
+    <p:handoutMasterId r:id="rId30"/>
   </p:handoutMasterIdLst>
   <p:sldIdLst>
     <p:sldId id="259" r:id="rId2"/>
@@ -19,23 +19,25 @@
     <p:sldId id="267" r:id="rId7"/>
     <p:sldId id="268" r:id="rId8"/>
     <p:sldId id="269" r:id="rId9"/>
-    <p:sldId id="291" r:id="rId10"/>
+    <p:sldId id="311" r:id="rId10"/>
     <p:sldId id="272" r:id="rId11"/>
     <p:sldId id="273" r:id="rId12"/>
-    <p:sldId id="292" r:id="rId13"/>
-    <p:sldId id="293" r:id="rId14"/>
-    <p:sldId id="296" r:id="rId15"/>
-    <p:sldId id="297" r:id="rId16"/>
-    <p:sldId id="310" r:id="rId17"/>
-    <p:sldId id="295" r:id="rId18"/>
-    <p:sldId id="299" r:id="rId19"/>
-    <p:sldId id="300" r:id="rId20"/>
-    <p:sldId id="301" r:id="rId21"/>
-    <p:sldId id="302" r:id="rId22"/>
-    <p:sldId id="309" r:id="rId23"/>
-    <p:sldId id="304" r:id="rId24"/>
-    <p:sldId id="306" r:id="rId25"/>
-    <p:sldId id="307" r:id="rId26"/>
+    <p:sldId id="296" r:id="rId13"/>
+    <p:sldId id="297" r:id="rId14"/>
+    <p:sldId id="312" r:id="rId15"/>
+    <p:sldId id="310" r:id="rId16"/>
+    <p:sldId id="292" r:id="rId17"/>
+    <p:sldId id="293" r:id="rId18"/>
+    <p:sldId id="295" r:id="rId19"/>
+    <p:sldId id="313" r:id="rId20"/>
+    <p:sldId id="299" r:id="rId21"/>
+    <p:sldId id="300" r:id="rId22"/>
+    <p:sldId id="301" r:id="rId23"/>
+    <p:sldId id="309" r:id="rId24"/>
+    <p:sldId id="302" r:id="rId25"/>
+    <p:sldId id="304" r:id="rId26"/>
+    <p:sldId id="306" r:id="rId27"/>
+    <p:sldId id="307" r:id="rId28"/>
   </p:sldIdLst>
   <p:sldSz cx="12192000" cy="6858000"/>
   <p:notesSz cx="6858000" cy="9144000"/>
@@ -250,7 +252,7 @@
           <a:p>
             <a:fld id="{13928E3B-7122-43E6-B3BB-09448C56C96C}" type="datetimeFigureOut">
               <a:rPr lang="en-US" smtClean="0"/>
-              <a:t>25/07/25</a:t>
+              <a:t>25/07/26</a:t>
             </a:fld>
             <a:endParaRPr lang="en-US" dirty="0"/>
           </a:p>
@@ -428,7 +430,7 @@
           <a:p>
             <a:fld id="{B98C9CAF-43DF-44BF-8016-DC193E4E594B}" type="datetimeFigureOut">
               <a:rPr lang="en-US" smtClean="0"/>
-              <a:t>25/07/25</a:t>
+              <a:t>25/07/26</a:t>
             </a:fld>
             <a:endParaRPr lang="en-US" dirty="0"/>
           </a:p>
@@ -3552,7 +3554,7 @@
           <a:p>
             <a:r>
               <a:rPr lang="en-US" dirty="0"/>
-              <a:t>Architects help stakeholders understand tradeoffs—like cost versus quality—and may even suggest better options than stakeholders expected.</a:t>
+              <a:t>Architects help stakeholders understand tradeoffs (like cost versus quality) and may even suggest better options than stakeholders expected.</a:t>
             </a:r>
           </a:p>
           <a:p>
@@ -3656,7 +3658,7 @@
           <p:cNvPr id="2" name="Content Placeholder 1">
             <a:extLst>
               <a:ext uri="{FF2B5EF4-FFF2-40B4-BE49-F238E27FC236}">
-                <a16:creationId xmlns:a16="http://schemas.microsoft.com/office/drawing/2014/main" id="{7AD72FFE-EA9B-D03D-458D-57F50401660C}"/>
+                <a16:creationId xmlns:a16="http://schemas.microsoft.com/office/drawing/2014/main" id="{FE134588-EB9E-5BC1-28A9-0D637DB39D9E}"/>
               </a:ext>
             </a:extLst>
           </p:cNvPr>
@@ -3674,57 +3676,100 @@
           <a:p>
             <a:r>
               <a:rPr lang="en-US" dirty="0"/>
-              <a:t>Business goals are the reason systems are built.</a:t>
-            </a:r>
-          </a:p>
-          <a:p>
-            <a:r>
-              <a:rPr lang="en-US" dirty="0"/>
-              <a:t>Business goals are of interest to architects because they frequently lead directly to ASRs.</a:t>
-            </a:r>
-          </a:p>
-          <a:p>
-            <a:r>
-              <a:rPr lang="en-US" dirty="0"/>
-              <a:t>There are three possible relationships between business goals and an architecture:</a:t>
-            </a:r>
-          </a:p>
-          <a:p>
-            <a:pPr marL="228600" indent="-457200">
-              <a:buFont typeface="+mj-lt"/>
-              <a:buAutoNum type="arabicPeriod"/>
+              <a:t>The </a:t>
+            </a:r>
+            <a:r>
+              <a:rPr lang="en-US" dirty="0">
+                <a:solidFill>
+                  <a:schemeClr val="accent1"/>
+                </a:solidFill>
+              </a:rPr>
+              <a:t>Quality Attribute Workshop </a:t>
+            </a:r>
+            <a:r>
+              <a:rPr lang="en-US" dirty="0"/>
+              <a:t>(QAW) is a stakeholder-driven session to create and sharpen quality-attribute scenarios before finalizing the architecture. </a:t>
+            </a:r>
+          </a:p>
+          <a:p>
+            <a:r>
+              <a:rPr lang="en-US" dirty="0"/>
+              <a:t>The </a:t>
+            </a:r>
+            <a:r>
+              <a:rPr lang="en-US" dirty="0">
+                <a:solidFill>
+                  <a:schemeClr val="accent1"/>
+                </a:solidFill>
+              </a:rPr>
+              <a:t>QAW</a:t>
+            </a:r>
+            <a:r>
+              <a:rPr lang="en-US" dirty="0"/>
+              <a:t> involves the following elements:</a:t>
+            </a:r>
+          </a:p>
+          <a:p>
+            <a:r>
+              <a:rPr lang="en-US" dirty="0">
+                <a:solidFill>
+                  <a:schemeClr val="accent4">
+                    <a:lumMod val="50000"/>
+                  </a:schemeClr>
+                </a:solidFill>
+              </a:rPr>
+              <a:t>Step 1: </a:t>
+            </a:r>
+            <a:r>
+              <a:rPr lang="en-US" dirty="0"/>
+              <a:t>QAW Presentation and Introductions.</a:t>
+            </a:r>
+          </a:p>
+          <a:p>
+            <a:pPr lvl="1"/>
+            <a:r>
+              <a:rPr lang="en-US" sz="1800" dirty="0"/>
+              <a:t>QAW facilitators describe the motivation for the QAW and explain each step of the method.</a:t>
+            </a:r>
+          </a:p>
+          <a:p>
+            <a:r>
+              <a:rPr lang="en-US" dirty="0">
+                <a:solidFill>
+                  <a:schemeClr val="accent4">
+                    <a:lumMod val="50000"/>
+                  </a:schemeClr>
+                </a:solidFill>
+              </a:rPr>
+              <a:t>Step 2: </a:t>
+            </a:r>
+            <a:r>
+              <a:rPr lang="en-US" dirty="0"/>
+              <a:t>Business/Mission Presentation.</a:t>
+            </a:r>
+          </a:p>
+          <a:p>
+            <a:pPr lvl="1"/>
+            <a:r>
+              <a:rPr lang="en-US" sz="1800" dirty="0"/>
+              <a:t>The stakeholder representing the business concerns behind the system presents the system’s business context, broad functional requirements, constraints, and known quality attribute requirements. </a:t>
+            </a:r>
+          </a:p>
+          <a:p>
+            <a:pPr lvl="1"/>
+            <a:r>
+              <a:rPr lang="en-US" sz="1800" dirty="0"/>
+              <a:t>The quality attributes that will be refined in later steps will be derived largely from the business/mission needs presented in this step.</a:t>
+            </a:r>
+          </a:p>
+          <a:p>
+            <a:pPr marL="0" indent="0">
+              <a:buNone/>
             </a:pPr>
-            <a:r>
-              <a:rPr lang="en-US" dirty="0"/>
-              <a:t>Business goals often lead to quality attribute requirements.</a:t>
-            </a:r>
-          </a:p>
-          <a:p>
-            <a:pPr marL="228600" indent="-457200">
-              <a:buFont typeface="+mj-lt"/>
-              <a:buAutoNum type="arabicPeriod"/>
-            </a:pPr>
-            <a:r>
-              <a:rPr lang="en-US" dirty="0"/>
-              <a:t>Business goals may affect the architecture without inducing a quality attribute requirement at all.</a:t>
-            </a:r>
-          </a:p>
-          <a:p>
-            <a:pPr lvl="1"/>
-            <a:r>
-              <a:rPr lang="en-US" dirty="0"/>
-              <a:t>For example, the manager wants to include a database, because the organization had a database unit employing a number of highly paid technical staff who were currently unassigned.</a:t>
-            </a:r>
-          </a:p>
-          <a:p>
-            <a:pPr marL="228600" indent="-457200">
-              <a:buFont typeface="+mj-lt"/>
-              <a:buAutoNum type="arabicPeriod"/>
-            </a:pPr>
-            <a:r>
-              <a:rPr lang="en-US" dirty="0"/>
-              <a:t>Not all business goals lead to quality attributes.</a:t>
-            </a:r>
+            <a:endParaRPr lang="en-US" dirty="0"/>
+          </a:p>
+          <a:p>
+            <a:endParaRPr lang="en-US" dirty="0"/>
           </a:p>
         </p:txBody>
       </p:sp>
@@ -3733,7 +3778,7 @@
           <p:cNvPr id="3" name="Title 2">
             <a:extLst>
               <a:ext uri="{FF2B5EF4-FFF2-40B4-BE49-F238E27FC236}">
-                <a16:creationId xmlns:a16="http://schemas.microsoft.com/office/drawing/2014/main" id="{D60CF6AE-892C-7270-392B-0406163179AA}"/>
+                <a16:creationId xmlns:a16="http://schemas.microsoft.com/office/drawing/2014/main" id="{8276B5EA-12F9-FC2C-5912-42C805D03A12}"/>
               </a:ext>
             </a:extLst>
           </p:cNvPr>
@@ -3746,14 +3791,12 @@
         </p:nvSpPr>
         <p:spPr/>
         <p:txBody>
-          <a:bodyPr>
-            <a:normAutofit/>
-          </a:bodyPr>
-          <a:lstStyle/>
-          <a:p>
-            <a:r>
-              <a:rPr lang="en-US" dirty="0"/>
-              <a:t>ASRs From Business Goals</a:t>
+          <a:bodyPr/>
+          <a:lstStyle/>
+          <a:p>
+            <a:r>
+              <a:rPr lang="en-US" dirty="0"/>
+              <a:t>Quality Attribute Workshop</a:t>
             </a:r>
           </a:p>
         </p:txBody>
@@ -3763,7 +3806,7 @@
           <p:cNvPr id="4" name="Slide Number Placeholder 3">
             <a:extLst>
               <a:ext uri="{FF2B5EF4-FFF2-40B4-BE49-F238E27FC236}">
-                <a16:creationId xmlns:a16="http://schemas.microsoft.com/office/drawing/2014/main" id="{D415AA41-67D8-AB56-AD2D-14BBCDB5C867}"/>
+                <a16:creationId xmlns:a16="http://schemas.microsoft.com/office/drawing/2014/main" id="{83D6C042-899D-D3B1-D45A-43B633787A73}"/>
               </a:ext>
             </a:extLst>
           </p:cNvPr>
@@ -3791,7 +3834,7 @@
     </p:spTree>
     <p:extLst>
       <p:ext uri="{BB962C8B-B14F-4D97-AF65-F5344CB8AC3E}">
-        <p14:creationId xmlns:p14="http://schemas.microsoft.com/office/powerpoint/2010/main" val="2143180145"/>
+        <p14:creationId xmlns:p14="http://schemas.microsoft.com/office/powerpoint/2010/main" val="3157308822"/>
       </p:ext>
     </p:extLst>
   </p:cSld>
@@ -3818,59 +3861,121 @@
           <a:chExt cx="0" cy="0"/>
         </a:xfrm>
       </p:grpSpPr>
-      <p:pic>
-        <p:nvPicPr>
-          <p:cNvPr id="6" name="Picture Placeholder 5">
-            <a:extLst>
-              <a:ext uri="{FF2B5EF4-FFF2-40B4-BE49-F238E27FC236}">
-                <a16:creationId xmlns:a16="http://schemas.microsoft.com/office/drawing/2014/main" id="{CD374C5A-DF41-46FF-C628-1DB65322C6B8}"/>
-              </a:ext>
-            </a:extLst>
-          </p:cNvPr>
-          <p:cNvPicPr>
-            <a:picLocks noGrp="1" noChangeAspect="1"/>
-          </p:cNvPicPr>
-          <p:nvPr>
-            <p:ph type="pic" sz="quarter" idx="11"/>
-          </p:nvPr>
-        </p:nvPicPr>
-        <p:blipFill rotWithShape="1">
-          <a:blip r:embed="rId2">
-            <a:extLst>
-              <a:ext uri="{28A0092B-C50C-407E-A947-70E740481C1C}">
-                <a14:useLocalDpi xmlns:a14="http://schemas.microsoft.com/office/drawing/2010/main" val="0"/>
-              </a:ext>
-            </a:extLst>
-          </a:blip>
-          <a:srcRect t="-41740" b="-41740"/>
-          <a:stretch/>
-        </p:blipFill>
+      <p:sp>
+        <p:nvSpPr>
+          <p:cNvPr id="2" name="Content Placeholder 1">
+            <a:extLst>
+              <a:ext uri="{FF2B5EF4-FFF2-40B4-BE49-F238E27FC236}">
+                <a16:creationId xmlns:a16="http://schemas.microsoft.com/office/drawing/2014/main" id="{6E98DBF6-281D-5559-A90B-7947CB223DB0}"/>
+              </a:ext>
+            </a:extLst>
+          </p:cNvPr>
+          <p:cNvSpPr>
+            <a:spLocks noGrp="1"/>
+          </p:cNvSpPr>
+          <p:nvPr>
+            <p:ph sz="half" idx="2"/>
+          </p:nvPr>
+        </p:nvSpPr>
+        <p:spPr>
+          <a:xfrm>
+            <a:off x="588977" y="1015164"/>
+            <a:ext cx="11058526" cy="5676247"/>
+          </a:xfrm>
+        </p:spPr>
+        <p:txBody>
+          <a:bodyPr/>
+          <a:lstStyle/>
+          <a:p>
+            <a:r>
+              <a:rPr lang="en-US" dirty="0">
+                <a:solidFill>
+                  <a:schemeClr val="accent4">
+                    <a:lumMod val="50000"/>
+                  </a:schemeClr>
+                </a:solidFill>
+              </a:rPr>
+              <a:t>Step 3: </a:t>
+            </a:r>
+            <a:r>
+              <a:rPr lang="en-US" dirty="0"/>
+              <a:t>Architectural Plan Presentation.</a:t>
+            </a:r>
+          </a:p>
+          <a:p>
+            <a:pPr lvl="1"/>
+            <a:r>
+              <a:rPr lang="en-US" dirty="0"/>
+              <a:t>The architect will present the system architectural plans as they stand. </a:t>
+            </a:r>
+          </a:p>
+          <a:p>
+            <a:pPr lvl="1"/>
+            <a:r>
+              <a:rPr lang="en-US" dirty="0"/>
+              <a:t>This lets stakeholders know the current architectural thinking, to the extent that it exists.</a:t>
+            </a:r>
+          </a:p>
+          <a:p>
+            <a:r>
+              <a:rPr lang="en-US" dirty="0">
+                <a:solidFill>
+                  <a:schemeClr val="accent4">
+                    <a:lumMod val="50000"/>
+                  </a:schemeClr>
+                </a:solidFill>
+              </a:rPr>
+              <a:t>Step 4: </a:t>
+            </a:r>
+            <a:r>
+              <a:rPr lang="en-US" dirty="0"/>
+              <a:t>Identification of Architectural Drivers.</a:t>
+            </a:r>
+          </a:p>
+          <a:p>
+            <a:pPr lvl="1"/>
+            <a:r>
+              <a:rPr lang="en-US" dirty="0"/>
+              <a:t>The facilitators will share their list of key architectural drivers that they assembled during Steps 2 and 3, and ask the stakeholders for clarifications, additions, deletions, and corrections. </a:t>
+            </a:r>
+          </a:p>
+          <a:p>
+            <a:pPr lvl="1"/>
+            <a:r>
+              <a:rPr lang="en-US" dirty="0"/>
+              <a:t>The idea is to reach a consensus on a distilled list of architectural drivers that includes overall requirements, business drivers, constraints, and quality attributes. </a:t>
+            </a:r>
+          </a:p>
+          <a:p>
+            <a:pPr lvl="1"/>
+            <a:endParaRPr lang="en-US" dirty="0"/>
+          </a:p>
+        </p:txBody>
+      </p:sp>
+      <p:sp>
+        <p:nvSpPr>
+          <p:cNvPr id="7" name="Title 6">
+            <a:extLst>
+              <a:ext uri="{FF2B5EF4-FFF2-40B4-BE49-F238E27FC236}">
+                <a16:creationId xmlns:a16="http://schemas.microsoft.com/office/drawing/2014/main" id="{C56B8F85-9B93-B0E3-0E49-5478EB2F5044}"/>
+              </a:ext>
+            </a:extLst>
+          </p:cNvPr>
+          <p:cNvSpPr>
+            <a:spLocks noGrp="1"/>
+          </p:cNvSpPr>
+          <p:nvPr>
+            <p:ph type="title"/>
+          </p:nvPr>
+        </p:nvSpPr>
         <p:spPr/>
-      </p:pic>
-      <p:sp>
-        <p:nvSpPr>
-          <p:cNvPr id="3" name="Text Placeholder 2">
-            <a:extLst>
-              <a:ext uri="{FF2B5EF4-FFF2-40B4-BE49-F238E27FC236}">
-                <a16:creationId xmlns:a16="http://schemas.microsoft.com/office/drawing/2014/main" id="{9D58E866-B4F4-A24F-D45F-26B099CC1176}"/>
-              </a:ext>
-            </a:extLst>
-          </p:cNvPr>
-          <p:cNvSpPr>
-            <a:spLocks noGrp="1"/>
-          </p:cNvSpPr>
-          <p:nvPr>
-            <p:ph type="body" sz="quarter" idx="12"/>
-          </p:nvPr>
-        </p:nvSpPr>
-        <p:spPr/>
         <p:txBody>
           <a:bodyPr/>
           <a:lstStyle/>
           <a:p>
             <a:r>
               <a:rPr lang="en-US" dirty="0"/>
-              <a:t>Some business goals may lead to quality attribute requirements, or lead directly to architectural decisions, or lead to non-architectural solutions.</a:t>
+              <a:t>Quality Attribute Workshop</a:t>
             </a:r>
           </a:p>
         </p:txBody>
@@ -3880,18 +3985,23 @@
           <p:cNvPr id="4" name="Slide Number Placeholder 3">
             <a:extLst>
               <a:ext uri="{FF2B5EF4-FFF2-40B4-BE49-F238E27FC236}">
-                <a16:creationId xmlns:a16="http://schemas.microsoft.com/office/drawing/2014/main" id="{E8F8395D-C56D-DC81-415F-91C273815DC0}"/>
-              </a:ext>
-            </a:extLst>
-          </p:cNvPr>
-          <p:cNvSpPr>
-            <a:spLocks noGrp="1"/>
-          </p:cNvSpPr>
-          <p:nvPr>
-            <p:ph type="sldNum" sz="quarter" idx="13"/>
-          </p:nvPr>
-        </p:nvSpPr>
-        <p:spPr/>
+                <a16:creationId xmlns:a16="http://schemas.microsoft.com/office/drawing/2014/main" id="{8E1CBBE6-8806-6A1D-CB05-2B326425F535}"/>
+              </a:ext>
+            </a:extLst>
+          </p:cNvPr>
+          <p:cNvSpPr>
+            <a:spLocks noGrp="1"/>
+          </p:cNvSpPr>
+          <p:nvPr>
+            <p:ph type="sldNum" sz="quarter" idx="10"/>
+          </p:nvPr>
+        </p:nvSpPr>
+        <p:spPr>
+          <a:xfrm>
+            <a:off x="556149" y="153671"/>
+            <a:ext cx="670079" cy="641281"/>
+          </a:xfrm>
+        </p:spPr>
         <p:txBody>
           <a:bodyPr/>
           <a:lstStyle/>
@@ -3908,7 +4018,7 @@
     </p:spTree>
     <p:extLst>
       <p:ext uri="{BB962C8B-B14F-4D97-AF65-F5344CB8AC3E}">
-        <p14:creationId xmlns:p14="http://schemas.microsoft.com/office/powerpoint/2010/main" val="1506094575"/>
+        <p14:creationId xmlns:p14="http://schemas.microsoft.com/office/powerpoint/2010/main" val="3329056718"/>
       </p:ext>
     </p:extLst>
   </p:cSld>
@@ -3940,7 +4050,7 @@
           <p:cNvPr id="2" name="Content Placeholder 1">
             <a:extLst>
               <a:ext uri="{FF2B5EF4-FFF2-40B4-BE49-F238E27FC236}">
-                <a16:creationId xmlns:a16="http://schemas.microsoft.com/office/drawing/2014/main" id="{FE134588-EB9E-5BC1-28A9-0D637DB39D9E}"/>
+                <a16:creationId xmlns:a16="http://schemas.microsoft.com/office/drawing/2014/main" id="{D0CBFE05-7A2B-BC3C-DC5E-AECA638FAACC}"/>
               </a:ext>
             </a:extLst>
           </p:cNvPr>
@@ -3956,49 +4066,6 @@
           <a:bodyPr/>
           <a:lstStyle/>
           <a:p>
-            <a:r>
-              <a:rPr lang="en-US" dirty="0"/>
-              <a:t>The is a stakeholder-driven session to create and sharpen quality-attribute scenarios before finalizing the architecture.</a:t>
-            </a:r>
-          </a:p>
-          <a:p>
-            <a:r>
-              <a:rPr lang="en-US" dirty="0"/>
-              <a:t>The </a:t>
-            </a:r>
-            <a:r>
-              <a:rPr lang="en-US" dirty="0">
-                <a:solidFill>
-                  <a:schemeClr val="accent1"/>
-                </a:solidFill>
-              </a:rPr>
-              <a:t>Quality Attribute Workshop </a:t>
-            </a:r>
-            <a:r>
-              <a:rPr lang="en-US" dirty="0"/>
-              <a:t>(QAW) is a stakeholder-driven session to create and sharpen quality-attribute scenarios before finalizing the architecture. </a:t>
-            </a:r>
-          </a:p>
-          <a:p>
-            <a:r>
-              <a:rPr lang="en-US" dirty="0"/>
-              <a:t>The </a:t>
-            </a:r>
-            <a:r>
-              <a:rPr lang="en-US" dirty="0">
-                <a:solidFill>
-                  <a:schemeClr val="accent1"/>
-                </a:solidFill>
-              </a:rPr>
-              <a:t>QAW</a:t>
-            </a:r>
-            <a:r>
-              <a:rPr lang="en-US" dirty="0"/>
-              <a:t> involves the following elements:</a:t>
-            </a:r>
-          </a:p>
-          <a:p>
-            <a:pPr lvl="1"/>
             <a:r>
               <a:rPr lang="en-US" dirty="0">
                 <a:solidFill>
@@ -4007,18 +4074,42 @@
                   </a:schemeClr>
                 </a:solidFill>
               </a:rPr>
-              <a:t>Step 1: QAW Presentation and Introductions.</a:t>
-            </a:r>
-          </a:p>
-          <a:p>
-            <a:pPr lvl="2"/>
-            <a:r>
-              <a:rPr lang="en-US" sz="1800" dirty="0"/>
-              <a:t>QAW facilitators describe the motivation for the QAW and explain each step of the method.</a:t>
+              <a:t>Step 5: </a:t>
+            </a:r>
+            <a:r>
+              <a:rPr lang="en-US" dirty="0"/>
+              <a:t>Scenario Brainstorming. </a:t>
             </a:r>
           </a:p>
           <a:p>
             <a:pPr lvl="1"/>
+            <a:r>
+              <a:rPr lang="en-US" dirty="0"/>
+              <a:t>Each stakeholder expresses a scenario representing his or her concerns with respect to the system. </a:t>
+            </a:r>
+          </a:p>
+          <a:p>
+            <a:pPr lvl="1"/>
+            <a:r>
+              <a:rPr lang="en-US" dirty="0"/>
+              <a:t>Facilitators ensure that each scenario has an explicit stimulus and response. </a:t>
+            </a:r>
+          </a:p>
+          <a:p>
+            <a:pPr lvl="1"/>
+            <a:r>
+              <a:rPr lang="en-US" dirty="0"/>
+              <a:t>The facilitators ensure that at least one representative scenario exists for each architectural driver listed in Step 4.</a:t>
+            </a:r>
+            <a:endParaRPr lang="en-US" dirty="0">
+              <a:solidFill>
+                <a:schemeClr val="accent4">
+                  <a:lumMod val="50000"/>
+                </a:schemeClr>
+              </a:solidFill>
+            </a:endParaRPr>
+          </a:p>
+          <a:p>
             <a:r>
               <a:rPr lang="en-US" dirty="0">
                 <a:solidFill>
@@ -4027,33 +4118,30 @@
                   </a:schemeClr>
                 </a:solidFill>
               </a:rPr>
-              <a:t>Step 2: Business/Mission Presentation.</a:t>
-            </a:r>
+              <a:t>Step 6: </a:t>
+            </a:r>
+            <a:r>
+              <a:rPr lang="en-US" dirty="0"/>
+              <a:t>Scenario Consolidation. </a:t>
+            </a:r>
+          </a:p>
+          <a:p>
+            <a:pPr lvl="1"/>
+            <a:r>
+              <a:rPr lang="en-US" dirty="0"/>
+              <a:t>Similar scenarios are consolidated where reasonable. </a:t>
+            </a:r>
+          </a:p>
+          <a:p>
+            <a:pPr lvl="1"/>
+            <a:r>
+              <a:rPr lang="en-US" dirty="0"/>
+              <a:t>Consolidation helps to prevent votes from being spread across several scenarios that are expressing the same concern. </a:t>
+            </a:r>
+          </a:p>
+          <a:p>
             <a:endParaRPr lang="en-US" dirty="0"/>
           </a:p>
-          <a:p>
-            <a:pPr lvl="2"/>
-            <a:r>
-              <a:rPr lang="en-US" sz="1800" dirty="0"/>
-              <a:t>The stakeholder representing the business concerns behind the system presents the system’s business context, broad functional requirements, constraints, and known quality attribute requirements. </a:t>
-            </a:r>
-          </a:p>
-          <a:p>
-            <a:pPr lvl="2"/>
-            <a:r>
-              <a:rPr lang="en-US" sz="1800" dirty="0"/>
-              <a:t>The quality attributes that will be refined in later steps will be derived largely from the business/mission needs presented in this step.</a:t>
-            </a:r>
-          </a:p>
-          <a:p>
-            <a:pPr marL="0" indent="0">
-              <a:buNone/>
-            </a:pPr>
-            <a:endParaRPr lang="en-US" dirty="0"/>
-          </a:p>
-          <a:p>
-            <a:endParaRPr lang="en-US" dirty="0"/>
-          </a:p>
         </p:txBody>
       </p:sp>
       <p:sp>
@@ -4061,7 +4149,7 @@
           <p:cNvPr id="3" name="Title 2">
             <a:extLst>
               <a:ext uri="{FF2B5EF4-FFF2-40B4-BE49-F238E27FC236}">
-                <a16:creationId xmlns:a16="http://schemas.microsoft.com/office/drawing/2014/main" id="{8276B5EA-12F9-FC2C-5912-42C805D03A12}"/>
+                <a16:creationId xmlns:a16="http://schemas.microsoft.com/office/drawing/2014/main" id="{102D2696-7545-A71F-A292-C78B07E42329}"/>
               </a:ext>
             </a:extLst>
           </p:cNvPr>
@@ -4089,7 +4177,7 @@
           <p:cNvPr id="4" name="Slide Number Placeholder 3">
             <a:extLst>
               <a:ext uri="{FF2B5EF4-FFF2-40B4-BE49-F238E27FC236}">
-                <a16:creationId xmlns:a16="http://schemas.microsoft.com/office/drawing/2014/main" id="{83D6C042-899D-D3B1-D45A-43B633787A73}"/>
+                <a16:creationId xmlns:a16="http://schemas.microsoft.com/office/drawing/2014/main" id="{8B5F4049-27FB-9DB0-7F02-4F21C1999649}"/>
               </a:ext>
             </a:extLst>
           </p:cNvPr>
@@ -4117,7 +4205,7 @@
     </p:spTree>
     <p:extLst>
       <p:ext uri="{BB962C8B-B14F-4D97-AF65-F5344CB8AC3E}">
-        <p14:creationId xmlns:p14="http://schemas.microsoft.com/office/powerpoint/2010/main" val="3157308822"/>
+        <p14:creationId xmlns:p14="http://schemas.microsoft.com/office/powerpoint/2010/main" val="3591091326"/>
       </p:ext>
     </p:extLst>
   </p:cSld>
@@ -4146,10 +4234,10 @@
       </p:grpSpPr>
       <p:sp>
         <p:nvSpPr>
-          <p:cNvPr id="2" name="Content Placeholder 1">
-            <a:extLst>
-              <a:ext uri="{FF2B5EF4-FFF2-40B4-BE49-F238E27FC236}">
-                <a16:creationId xmlns:a16="http://schemas.microsoft.com/office/drawing/2014/main" id="{6E98DBF6-281D-5559-A90B-7947CB223DB0}"/>
+          <p:cNvPr id="3" name="Content Placeholder 2">
+            <a:extLst>
+              <a:ext uri="{FF2B5EF4-FFF2-40B4-BE49-F238E27FC236}">
+                <a16:creationId xmlns:a16="http://schemas.microsoft.com/office/drawing/2014/main" id="{419DB0F0-7DAC-00E6-1BC3-23C5C36D17A5}"/>
               </a:ext>
             </a:extLst>
           </p:cNvPr>
@@ -4160,17 +4248,20 @@
             <p:ph sz="half" idx="2"/>
           </p:nvPr>
         </p:nvSpPr>
-        <p:spPr>
-          <a:xfrm>
-            <a:off x="588977" y="1015164"/>
-            <a:ext cx="11058526" cy="5676247"/>
-          </a:xfrm>
-        </p:spPr>
+        <p:spPr/>
         <p:txBody>
           <a:bodyPr/>
           <a:lstStyle/>
           <a:p>
-            <a:pPr lvl="1"/>
+            <a:endParaRPr lang="en-US" dirty="0">
+              <a:solidFill>
+                <a:schemeClr val="accent4">
+                  <a:lumMod val="50000"/>
+                </a:schemeClr>
+              </a:solidFill>
+            </a:endParaRPr>
+          </a:p>
+          <a:p>
             <a:r>
               <a:rPr lang="en-US" dirty="0">
                 <a:solidFill>
@@ -4179,25 +4270,53 @@
                   </a:schemeClr>
                 </a:solidFill>
               </a:rPr>
-              <a:t>Step 3: Architectural Plan Presentation.</a:t>
-            </a:r>
-          </a:p>
-          <a:p>
-            <a:pPr lvl="2"/>
-            <a:r>
-              <a:rPr lang="en-US" dirty="0"/>
-              <a:t>The architect will present the system architectural plans as they stand. </a:t>
-            </a:r>
-          </a:p>
-          <a:p>
-            <a:pPr lvl="2"/>
-            <a:r>
-              <a:rPr lang="en-US" dirty="0"/>
-              <a:t>This lets stakeholders know the current architectural thinking, to the extent that it exists.</a:t>
+              <a:t>Step 7: </a:t>
+            </a:r>
+            <a:r>
+              <a:rPr lang="en-US" dirty="0"/>
+              <a:t>Scenario Prioritization. </a:t>
             </a:r>
           </a:p>
           <a:p>
             <a:pPr lvl="1"/>
+            <a:r>
+              <a:rPr lang="en-US" dirty="0"/>
+              <a:t>Prioritization of the scenarios is accomplished by allocating each stakeholder a number of votes equal to 30 percent of the total number of scenarios</a:t>
+            </a:r>
+            <a:endParaRPr lang="en-US" dirty="0">
+              <a:solidFill>
+                <a:schemeClr val="accent4">
+                  <a:lumMod val="50000"/>
+                </a:schemeClr>
+              </a:solidFill>
+            </a:endParaRPr>
+          </a:p>
+          <a:p>
+            <a:endParaRPr lang="en-US" dirty="0"/>
+          </a:p>
+        </p:txBody>
+      </p:sp>
+      <p:sp>
+        <p:nvSpPr>
+          <p:cNvPr id="4" name="Content Placeholder 3">
+            <a:extLst>
+              <a:ext uri="{FF2B5EF4-FFF2-40B4-BE49-F238E27FC236}">
+                <a16:creationId xmlns:a16="http://schemas.microsoft.com/office/drawing/2014/main" id="{EC69EE3F-CEF7-40C9-55BD-3D3D0575ADBC}"/>
+              </a:ext>
+            </a:extLst>
+          </p:cNvPr>
+          <p:cNvSpPr>
+            <a:spLocks noGrp="1"/>
+          </p:cNvSpPr>
+          <p:nvPr>
+            <p:ph sz="half" idx="12"/>
+          </p:nvPr>
+        </p:nvSpPr>
+        <p:spPr/>
+        <p:txBody>
+          <a:bodyPr/>
+          <a:lstStyle/>
+          <a:p>
             <a:r>
               <a:rPr lang="en-US" dirty="0">
                 <a:solidFill>
@@ -4206,69 +4325,38 @@
                   </a:schemeClr>
                 </a:solidFill>
               </a:rPr>
-              <a:t>Step 4: Identification of Architectural Drivers.</a:t>
-            </a:r>
-          </a:p>
-          <a:p>
-            <a:pPr lvl="2"/>
-            <a:r>
-              <a:rPr lang="en-US" dirty="0"/>
-              <a:t>The facilitators will share their list of key architectural drivers that they assembled during Steps 2 and 3, and ask the stakeholders for clarifications, additions, deletions, and corrections. </a:t>
-            </a:r>
-          </a:p>
-          <a:p>
-            <a:pPr lvl="2"/>
-            <a:r>
-              <a:rPr lang="en-US" dirty="0"/>
-              <a:t>The idea is to reach a consensus on a distilled list of architectural drivers that includes overall requirements, business drivers, constraints, and quality attributes. </a:t>
+              <a:t>Step 8: </a:t>
+            </a:r>
+            <a:r>
+              <a:rPr lang="en-US" dirty="0"/>
+              <a:t>Scenario Refinement. </a:t>
             </a:r>
           </a:p>
           <a:p>
             <a:pPr lvl="1"/>
             <a:r>
-              <a:rPr lang="en-US" dirty="0">
-                <a:solidFill>
-                  <a:schemeClr val="accent4">
-                    <a:lumMod val="50000"/>
-                  </a:schemeClr>
-                </a:solidFill>
-              </a:rPr>
-              <a:t>Step 5: Scenario Brainstorming. </a:t>
-            </a:r>
-          </a:p>
-          <a:p>
-            <a:pPr lvl="2"/>
-            <a:r>
-              <a:rPr lang="en-US" dirty="0"/>
-              <a:t>Each stakeholder expresses a scenario representing his or her concerns with respect to the system. </a:t>
-            </a:r>
-          </a:p>
-          <a:p>
-            <a:pPr lvl="2"/>
-            <a:r>
-              <a:rPr lang="en-US" dirty="0"/>
-              <a:t>Facilitators ensure that each scenario has an explicit stimulus and response. </a:t>
-            </a:r>
-          </a:p>
-          <a:p>
-            <a:pPr lvl="2"/>
-            <a:r>
-              <a:rPr lang="en-US" dirty="0"/>
-              <a:t>The facilitators ensure that at least one representative scenario exists for each architectural driver listed in Step 4.</a:t>
+              <a:rPr lang="en-US" dirty="0"/>
+              <a:t>The top scenarios are refined and elaborated. </a:t>
             </a:r>
           </a:p>
           <a:p>
             <a:pPr lvl="1"/>
+            <a:r>
+              <a:rPr lang="en-US" dirty="0"/>
+              <a:t>Facilitators help the stakeholders put the scenarios in the six-part scenario form of source-stimulus-artifact-environment-response-response measure. </a:t>
+            </a:r>
+          </a:p>
+          <a:p>
             <a:endParaRPr lang="en-US" dirty="0"/>
           </a:p>
         </p:txBody>
       </p:sp>
       <p:sp>
         <p:nvSpPr>
-          <p:cNvPr id="7" name="Title 6">
-            <a:extLst>
-              <a:ext uri="{FF2B5EF4-FFF2-40B4-BE49-F238E27FC236}">
-                <a16:creationId xmlns:a16="http://schemas.microsoft.com/office/drawing/2014/main" id="{C56B8F85-9B93-B0E3-0E49-5478EB2F5044}"/>
+          <p:cNvPr id="5" name="Title 4">
+            <a:extLst>
+              <a:ext uri="{FF2B5EF4-FFF2-40B4-BE49-F238E27FC236}">
+                <a16:creationId xmlns:a16="http://schemas.microsoft.com/office/drawing/2014/main" id="{CF3FC980-E7F7-B48B-5CFB-4DA6196D0157}"/>
               </a:ext>
             </a:extLst>
           </p:cNvPr>
@@ -4293,26 +4381,21 @@
       </p:sp>
       <p:sp>
         <p:nvSpPr>
-          <p:cNvPr id="4" name="Slide Number Placeholder 3">
-            <a:extLst>
-              <a:ext uri="{FF2B5EF4-FFF2-40B4-BE49-F238E27FC236}">
-                <a16:creationId xmlns:a16="http://schemas.microsoft.com/office/drawing/2014/main" id="{8E1CBBE6-8806-6A1D-CB05-2B326425F535}"/>
-              </a:ext>
-            </a:extLst>
-          </p:cNvPr>
-          <p:cNvSpPr>
-            <a:spLocks noGrp="1"/>
-          </p:cNvSpPr>
-          <p:nvPr>
-            <p:ph type="sldNum" sz="quarter" idx="10"/>
-          </p:nvPr>
-        </p:nvSpPr>
-        <p:spPr>
-          <a:xfrm>
-            <a:off x="556149" y="153671"/>
-            <a:ext cx="670079" cy="641281"/>
-          </a:xfrm>
-        </p:spPr>
+          <p:cNvPr id="6" name="Slide Number Placeholder 5">
+            <a:extLst>
+              <a:ext uri="{FF2B5EF4-FFF2-40B4-BE49-F238E27FC236}">
+                <a16:creationId xmlns:a16="http://schemas.microsoft.com/office/drawing/2014/main" id="{3A2D9E1C-8F00-25D7-A452-77A1DA483466}"/>
+              </a:ext>
+            </a:extLst>
+          </p:cNvPr>
+          <p:cNvSpPr>
+            <a:spLocks noGrp="1"/>
+          </p:cNvSpPr>
+          <p:nvPr>
+            <p:ph type="sldNum" sz="quarter" idx="13"/>
+          </p:nvPr>
+        </p:nvSpPr>
+        <p:spPr/>
         <p:txBody>
           <a:bodyPr/>
           <a:lstStyle/>
@@ -4326,10 +4409,46 @@
           </a:p>
         </p:txBody>
       </p:sp>
+      <p:pic>
+        <p:nvPicPr>
+          <p:cNvPr id="12" name="Picture Placeholder 11">
+            <a:extLst>
+              <a:ext uri="{FF2B5EF4-FFF2-40B4-BE49-F238E27FC236}">
+                <a16:creationId xmlns:a16="http://schemas.microsoft.com/office/drawing/2014/main" id="{23798C72-05DD-E713-D47E-A674C9F0717A}"/>
+              </a:ext>
+            </a:extLst>
+          </p:cNvPr>
+          <p:cNvPicPr>
+            <a:picLocks noGrp="1" noChangeAspect="1"/>
+          </p:cNvPicPr>
+          <p:nvPr>
+            <p:ph type="pic" sz="quarter" idx="11"/>
+          </p:nvPr>
+        </p:nvPicPr>
+        <p:blipFill>
+          <a:blip r:embed="rId2">
+            <a:extLst>
+              <a:ext uri="{28A0092B-C50C-407E-A947-70E740481C1C}">
+                <a14:useLocalDpi xmlns:a14="http://schemas.microsoft.com/office/drawing/2010/main" val="0"/>
+              </a:ext>
+            </a:extLst>
+          </a:blip>
+          <a:srcRect t="14154" b="10090"/>
+          <a:stretch>
+            <a:fillRect/>
+          </a:stretch>
+        </p:blipFill>
+        <p:spPr>
+          <a:xfrm>
+            <a:off x="5809426" y="1192305"/>
+            <a:ext cx="5826425" cy="2992227"/>
+          </a:xfrm>
+        </p:spPr>
+      </p:pic>
     </p:spTree>
     <p:extLst>
       <p:ext uri="{BB962C8B-B14F-4D97-AF65-F5344CB8AC3E}">
-        <p14:creationId xmlns:p14="http://schemas.microsoft.com/office/powerpoint/2010/main" val="3329056718"/>
+        <p14:creationId xmlns:p14="http://schemas.microsoft.com/office/powerpoint/2010/main" val="1642516246"/>
       </p:ext>
     </p:extLst>
   </p:cSld>
@@ -4358,10 +4477,10 @@
       </p:grpSpPr>
       <p:sp>
         <p:nvSpPr>
-          <p:cNvPr id="3" name="Content Placeholder 2">
-            <a:extLst>
-              <a:ext uri="{FF2B5EF4-FFF2-40B4-BE49-F238E27FC236}">
-                <a16:creationId xmlns:a16="http://schemas.microsoft.com/office/drawing/2014/main" id="{419DB0F0-7DAC-00E6-1BC3-23C5C36D17A5}"/>
+          <p:cNvPr id="2" name="Content Placeholder 1">
+            <a:extLst>
+              <a:ext uri="{FF2B5EF4-FFF2-40B4-BE49-F238E27FC236}">
+                <a16:creationId xmlns:a16="http://schemas.microsoft.com/office/drawing/2014/main" id="{7AD72FFE-EA9B-D03D-458D-57F50401660C}"/>
               </a:ext>
             </a:extLst>
           </p:cNvPr>
@@ -4377,178 +4496,126 @@
           <a:bodyPr/>
           <a:lstStyle/>
           <a:p>
-            <a:pPr lvl="1"/>
             <a:r>
               <a:rPr lang="en-US" dirty="0">
                 <a:solidFill>
-                  <a:schemeClr val="accent4">
-                    <a:lumMod val="50000"/>
-                  </a:schemeClr>
+                  <a:schemeClr val="accent1"/>
                 </a:solidFill>
               </a:rPr>
-              <a:t>Step 6: Scenario Consolidation. </a:t>
+              <a:t>Business goals </a:t>
+            </a:r>
+            <a:r>
+              <a:rPr lang="en-US" dirty="0"/>
+              <a:t>are the </a:t>
+            </a:r>
+            <a:r>
+              <a:rPr lang="en-US" dirty="0">
+                <a:solidFill>
+                  <a:schemeClr val="accent1"/>
+                </a:solidFill>
+              </a:rPr>
+              <a:t>reason</a:t>
+            </a:r>
+            <a:r>
+              <a:rPr lang="en-US" dirty="0"/>
+              <a:t> systems are built.</a:t>
+            </a:r>
+          </a:p>
+          <a:p>
+            <a:r>
+              <a:rPr lang="en-US" dirty="0"/>
+              <a:t>Business goals are of interest to architects because they frequently lead directly to ASRs.</a:t>
+            </a:r>
+          </a:p>
+          <a:p>
+            <a:r>
+              <a:rPr lang="en-US" dirty="0"/>
+              <a:t>There are three possible relationships between business goals and an architecture:</a:t>
+            </a:r>
+          </a:p>
+          <a:p>
+            <a:pPr marL="525780" lvl="1" indent="-457200">
+              <a:buFont typeface="+mj-lt"/>
+              <a:buAutoNum type="arabicPeriod"/>
+            </a:pPr>
+            <a:r>
+              <a:rPr lang="en-US" dirty="0"/>
+              <a:t>Business goals often lead to quality attribute requirements.</a:t>
+            </a:r>
+          </a:p>
+          <a:p>
+            <a:pPr marL="525780" lvl="1" indent="-457200">
+              <a:buFont typeface="+mj-lt"/>
+              <a:buAutoNum type="arabicPeriod"/>
+            </a:pPr>
+            <a:r>
+              <a:rPr lang="en-US" dirty="0"/>
+              <a:t>Business goals may affect the architecture without inducing a quality attribute requirement at all.</a:t>
             </a:r>
           </a:p>
           <a:p>
             <a:pPr lvl="2"/>
             <a:r>
               <a:rPr lang="en-US" dirty="0"/>
-              <a:t>Similar scenarios are consolidated where reasonable. </a:t>
-            </a:r>
-          </a:p>
-          <a:p>
-            <a:pPr lvl="2"/>
-            <a:r>
-              <a:rPr lang="en-US" dirty="0"/>
-              <a:t>Consolidation helps to prevent votes from being spread across several scenarios that are expressing the same concern. </a:t>
-            </a:r>
-          </a:p>
-          <a:p>
-            <a:pPr lvl="1"/>
-            <a:r>
-              <a:rPr lang="en-US" dirty="0">
-                <a:solidFill>
-                  <a:schemeClr val="accent4">
-                    <a:lumMod val="50000"/>
-                  </a:schemeClr>
-                </a:solidFill>
-              </a:rPr>
-              <a:t>Step 7: Scenario Prioritization. </a:t>
-            </a:r>
-          </a:p>
-          <a:p>
-            <a:pPr lvl="2"/>
-            <a:r>
-              <a:rPr lang="en-US" dirty="0"/>
-              <a:t>Prioritization of the scenarios is accomplished by allocating each stakeholder a number of votes equal to 30 percent of the total number of scenarios</a:t>
-            </a:r>
-            <a:endParaRPr lang="en-US" dirty="0">
-              <a:solidFill>
-                <a:schemeClr val="accent4">
-                  <a:lumMod val="50000"/>
-                </a:schemeClr>
-              </a:solidFill>
-            </a:endParaRPr>
-          </a:p>
-          <a:p>
-            <a:endParaRPr lang="en-US" dirty="0"/>
-          </a:p>
-        </p:txBody>
-      </p:sp>
-      <p:sp>
-        <p:nvSpPr>
-          <p:cNvPr id="4" name="Content Placeholder 3">
-            <a:extLst>
-              <a:ext uri="{FF2B5EF4-FFF2-40B4-BE49-F238E27FC236}">
-                <a16:creationId xmlns:a16="http://schemas.microsoft.com/office/drawing/2014/main" id="{EC69EE3F-CEF7-40C9-55BD-3D3D0575ADBC}"/>
-              </a:ext>
-            </a:extLst>
-          </p:cNvPr>
-          <p:cNvSpPr>
-            <a:spLocks noGrp="1"/>
-          </p:cNvSpPr>
-          <p:nvPr>
-            <p:ph sz="half" idx="12"/>
+              <a:t>For example, the manager wants to include a database, because the organization had a database unit employing a number of highly paid technical staff who were currently unassigned.</a:t>
+            </a:r>
+          </a:p>
+          <a:p>
+            <a:pPr marL="525780" lvl="1" indent="-457200">
+              <a:buFont typeface="+mj-lt"/>
+              <a:buAutoNum type="arabicPeriod"/>
+            </a:pPr>
+            <a:r>
+              <a:rPr lang="en-US" dirty="0"/>
+              <a:t>Not all business goals lead to quality attributes.</a:t>
+            </a:r>
+          </a:p>
+        </p:txBody>
+      </p:sp>
+      <p:sp>
+        <p:nvSpPr>
+          <p:cNvPr id="3" name="Title 2">
+            <a:extLst>
+              <a:ext uri="{FF2B5EF4-FFF2-40B4-BE49-F238E27FC236}">
+                <a16:creationId xmlns:a16="http://schemas.microsoft.com/office/drawing/2014/main" id="{D60CF6AE-892C-7270-392B-0406163179AA}"/>
+              </a:ext>
+            </a:extLst>
+          </p:cNvPr>
+          <p:cNvSpPr>
+            <a:spLocks noGrp="1"/>
+          </p:cNvSpPr>
+          <p:nvPr>
+            <p:ph type="title"/>
           </p:nvPr>
         </p:nvSpPr>
         <p:spPr/>
         <p:txBody>
-          <a:bodyPr/>
-          <a:lstStyle/>
-          <a:p>
-            <a:pPr lvl="1"/>
-            <a:endParaRPr lang="en-US" dirty="0">
-              <a:solidFill>
-                <a:schemeClr val="accent4">
-                  <a:lumMod val="50000"/>
-                </a:schemeClr>
-              </a:solidFill>
-            </a:endParaRPr>
-          </a:p>
-          <a:p>
-            <a:pPr lvl="1"/>
-            <a:endParaRPr lang="en-US" dirty="0">
-              <a:solidFill>
-                <a:schemeClr val="accent4">
-                  <a:lumMod val="50000"/>
-                </a:schemeClr>
-              </a:solidFill>
-            </a:endParaRPr>
-          </a:p>
-          <a:p>
-            <a:pPr lvl="1"/>
-            <a:r>
-              <a:rPr lang="en-US" dirty="0">
-                <a:solidFill>
-                  <a:schemeClr val="accent4">
-                    <a:lumMod val="50000"/>
-                  </a:schemeClr>
-                </a:solidFill>
-              </a:rPr>
-              <a:t>Step 8: Scenario Refinement. </a:t>
-            </a:r>
-          </a:p>
-          <a:p>
-            <a:pPr lvl="2"/>
-            <a:r>
-              <a:rPr lang="en-US" dirty="0"/>
-              <a:t>The top scenarios are refined and elaborated. </a:t>
-            </a:r>
-          </a:p>
-          <a:p>
-            <a:pPr lvl="2"/>
-            <a:r>
-              <a:rPr lang="en-US" dirty="0"/>
-              <a:t>Facilitators help the stakeholders put the scenarios in the six-part scenario form of source-stimulus-artifact-environment-response-response measure. </a:t>
-            </a:r>
-          </a:p>
-          <a:p>
-            <a:endParaRPr lang="en-US" dirty="0"/>
-          </a:p>
-        </p:txBody>
-      </p:sp>
-      <p:sp>
-        <p:nvSpPr>
-          <p:cNvPr id="5" name="Title 4">
-            <a:extLst>
-              <a:ext uri="{FF2B5EF4-FFF2-40B4-BE49-F238E27FC236}">
-                <a16:creationId xmlns:a16="http://schemas.microsoft.com/office/drawing/2014/main" id="{CF3FC980-E7F7-B48B-5CFB-4DA6196D0157}"/>
-              </a:ext>
-            </a:extLst>
-          </p:cNvPr>
-          <p:cNvSpPr>
-            <a:spLocks noGrp="1"/>
-          </p:cNvSpPr>
-          <p:nvPr>
-            <p:ph type="title"/>
-          </p:nvPr>
-        </p:nvSpPr>
-        <p:spPr/>
-        <p:txBody>
-          <a:bodyPr/>
-          <a:lstStyle/>
-          <a:p>
-            <a:r>
-              <a:rPr lang="en-US" dirty="0"/>
-              <a:t>Quality Attribute Workshop</a:t>
-            </a:r>
-          </a:p>
-        </p:txBody>
-      </p:sp>
-      <p:sp>
-        <p:nvSpPr>
-          <p:cNvPr id="6" name="Slide Number Placeholder 5">
-            <a:extLst>
-              <a:ext uri="{FF2B5EF4-FFF2-40B4-BE49-F238E27FC236}">
-                <a16:creationId xmlns:a16="http://schemas.microsoft.com/office/drawing/2014/main" id="{3A2D9E1C-8F00-25D7-A452-77A1DA483466}"/>
-              </a:ext>
-            </a:extLst>
-          </p:cNvPr>
-          <p:cNvSpPr>
-            <a:spLocks noGrp="1"/>
-          </p:cNvSpPr>
-          <p:nvPr>
-            <p:ph type="sldNum" sz="quarter" idx="13"/>
+          <a:bodyPr>
+            <a:normAutofit/>
+          </a:bodyPr>
+          <a:lstStyle/>
+          <a:p>
+            <a:r>
+              <a:rPr lang="en-US" dirty="0"/>
+              <a:t>ASRs From Business Goals</a:t>
+            </a:r>
+          </a:p>
+        </p:txBody>
+      </p:sp>
+      <p:sp>
+        <p:nvSpPr>
+          <p:cNvPr id="4" name="Slide Number Placeholder 3">
+            <a:extLst>
+              <a:ext uri="{FF2B5EF4-FFF2-40B4-BE49-F238E27FC236}">
+                <a16:creationId xmlns:a16="http://schemas.microsoft.com/office/drawing/2014/main" id="{D415AA41-67D8-AB56-AD2D-14BBCDB5C867}"/>
+              </a:ext>
+            </a:extLst>
+          </p:cNvPr>
+          <p:cNvSpPr>
+            <a:spLocks noGrp="1"/>
+          </p:cNvSpPr>
+          <p:nvPr>
+            <p:ph type="sldNum" sz="quarter" idx="10"/>
           </p:nvPr>
         </p:nvSpPr>
         <p:spPr/>
@@ -4565,46 +4632,10 @@
           </a:p>
         </p:txBody>
       </p:sp>
-      <p:pic>
-        <p:nvPicPr>
-          <p:cNvPr id="12" name="Picture Placeholder 11">
-            <a:extLst>
-              <a:ext uri="{FF2B5EF4-FFF2-40B4-BE49-F238E27FC236}">
-                <a16:creationId xmlns:a16="http://schemas.microsoft.com/office/drawing/2014/main" id="{23798C72-05DD-E713-D47E-A674C9F0717A}"/>
-              </a:ext>
-            </a:extLst>
-          </p:cNvPr>
-          <p:cNvPicPr>
-            <a:picLocks noGrp="1" noChangeAspect="1"/>
-          </p:cNvPicPr>
-          <p:nvPr>
-            <p:ph type="pic" sz="quarter" idx="11"/>
-          </p:nvPr>
-        </p:nvPicPr>
-        <p:blipFill>
-          <a:blip r:embed="rId2">
-            <a:extLst>
-              <a:ext uri="{28A0092B-C50C-407E-A947-70E740481C1C}">
-                <a14:useLocalDpi xmlns:a14="http://schemas.microsoft.com/office/drawing/2010/main" val="0"/>
-              </a:ext>
-            </a:extLst>
-          </a:blip>
-          <a:srcRect t="14154" b="10090"/>
-          <a:stretch>
-            <a:fillRect/>
-          </a:stretch>
-        </p:blipFill>
-        <p:spPr>
-          <a:xfrm>
-            <a:off x="5809426" y="1192305"/>
-            <a:ext cx="5826425" cy="2992227"/>
-          </a:xfrm>
-        </p:spPr>
-      </p:pic>
     </p:spTree>
     <p:extLst>
       <p:ext uri="{BB962C8B-B14F-4D97-AF65-F5344CB8AC3E}">
-        <p14:creationId xmlns:p14="http://schemas.microsoft.com/office/powerpoint/2010/main" val="1642516246"/>
+        <p14:creationId xmlns:p14="http://schemas.microsoft.com/office/powerpoint/2010/main" val="2143180145"/>
       </p:ext>
     </p:extLst>
   </p:cSld>
@@ -4631,132 +4662,59 @@
           <a:chExt cx="0" cy="0"/>
         </a:xfrm>
       </p:grpSpPr>
-      <p:sp>
-        <p:nvSpPr>
-          <p:cNvPr id="2" name="Content Placeholder 1">
-            <a:extLst>
-              <a:ext uri="{FF2B5EF4-FFF2-40B4-BE49-F238E27FC236}">
-                <a16:creationId xmlns:a16="http://schemas.microsoft.com/office/drawing/2014/main" id="{E5C3C5F0-F6EE-1966-183C-7953ECF7A17D}"/>
-              </a:ext>
-            </a:extLst>
-          </p:cNvPr>
-          <p:cNvSpPr>
-            <a:spLocks noGrp="1"/>
-          </p:cNvSpPr>
-          <p:nvPr>
-            <p:ph sz="half" idx="2"/>
-          </p:nvPr>
-        </p:nvSpPr>
+      <p:pic>
+        <p:nvPicPr>
+          <p:cNvPr id="6" name="Picture Placeholder 5">
+            <a:extLst>
+              <a:ext uri="{FF2B5EF4-FFF2-40B4-BE49-F238E27FC236}">
+                <a16:creationId xmlns:a16="http://schemas.microsoft.com/office/drawing/2014/main" id="{CD374C5A-DF41-46FF-C628-1DB65322C6B8}"/>
+              </a:ext>
+            </a:extLst>
+          </p:cNvPr>
+          <p:cNvPicPr>
+            <a:picLocks noGrp="1" noChangeAspect="1"/>
+          </p:cNvPicPr>
+          <p:nvPr>
+            <p:ph type="pic" sz="quarter" idx="11"/>
+          </p:nvPr>
+        </p:nvPicPr>
+        <p:blipFill rotWithShape="1">
+          <a:blip r:embed="rId2">
+            <a:extLst>
+              <a:ext uri="{28A0092B-C50C-407E-A947-70E740481C1C}">
+                <a14:useLocalDpi xmlns:a14="http://schemas.microsoft.com/office/drawing/2010/main" val="0"/>
+              </a:ext>
+            </a:extLst>
+          </a:blip>
+          <a:srcRect t="-41740" b="-41740"/>
+          <a:stretch/>
+        </p:blipFill>
         <p:spPr/>
+      </p:pic>
+      <p:sp>
+        <p:nvSpPr>
+          <p:cNvPr id="3" name="Text Placeholder 2">
+            <a:extLst>
+              <a:ext uri="{FF2B5EF4-FFF2-40B4-BE49-F238E27FC236}">
+                <a16:creationId xmlns:a16="http://schemas.microsoft.com/office/drawing/2014/main" id="{9D58E866-B4F4-A24F-D45F-26B099CC1176}"/>
+              </a:ext>
+            </a:extLst>
+          </p:cNvPr>
+          <p:cNvSpPr>
+            <a:spLocks noGrp="1"/>
+          </p:cNvSpPr>
+          <p:nvPr>
+            <p:ph type="body" sz="quarter" idx="12"/>
+          </p:nvPr>
+        </p:nvSpPr>
+        <p:spPr/>
         <p:txBody>
           <a:bodyPr/>
           <a:lstStyle/>
           <a:p>
             <a:r>
               <a:rPr lang="en-US" dirty="0"/>
-              <a:t>Architects often become aware of an organization’s business and business goals via </a:t>
-            </a:r>
-            <a:r>
-              <a:rPr lang="en-US" dirty="0">
-                <a:solidFill>
-                  <a:schemeClr val="accent1"/>
-                </a:solidFill>
-              </a:rPr>
-              <a:t>osmosis</a:t>
-            </a:r>
-            <a:r>
-              <a:rPr lang="en-US" dirty="0"/>
-              <a:t>—working, listening, talking, and soaking up the goals that are at work in an organization.</a:t>
-            </a:r>
-          </a:p>
-          <a:p>
-            <a:r>
-              <a:rPr lang="en-US" dirty="0"/>
-              <a:t>More systematic ways of determining such goals are both possible and desirable.</a:t>
-            </a:r>
-          </a:p>
-          <a:p>
-            <a:r>
-              <a:rPr lang="en-US" dirty="0"/>
-              <a:t>It is worthwhile to capture business goals explicitly, because they often imply ASRs that would otherwise go undetected until it is too late or too expensive to address them.</a:t>
-            </a:r>
-          </a:p>
-          <a:p>
-            <a:r>
-              <a:rPr lang="en-US" dirty="0"/>
-              <a:t>One way to do this is to employ the </a:t>
-            </a:r>
-            <a:r>
-              <a:rPr lang="en-US" dirty="0">
-                <a:solidFill>
-                  <a:schemeClr val="accent1"/>
-                </a:solidFill>
-              </a:rPr>
-              <a:t>PALM</a:t>
-            </a:r>
-            <a:r>
-              <a:rPr lang="en-US" dirty="0"/>
-              <a:t> method, which entails holding a workshop with the architect and key business stakeholders.</a:t>
-            </a:r>
-          </a:p>
-          <a:p>
-            <a:r>
-              <a:rPr lang="en-US" dirty="0"/>
-              <a:t>PALM consists of these steps</a:t>
-            </a:r>
-          </a:p>
-          <a:p>
-            <a:pPr lvl="1"/>
-            <a:r>
-              <a:rPr lang="en-US" dirty="0">
-                <a:solidFill>
-                  <a:schemeClr val="accent4">
-                    <a:lumMod val="50000"/>
-                  </a:schemeClr>
-                </a:solidFill>
-              </a:rPr>
-              <a:t>Step 1: Business goals elicitation.</a:t>
-            </a:r>
-          </a:p>
-          <a:p>
-            <a:pPr lvl="2"/>
-            <a:r>
-              <a:rPr lang="en-US" dirty="0"/>
-              <a:t>Using the categories given later in this section to guide the discussion, capture from stakeholders the set of important business goals for this system.</a:t>
-            </a:r>
-          </a:p>
-          <a:p>
-            <a:pPr lvl="1" indent="0">
-              <a:buNone/>
-            </a:pPr>
-            <a:endParaRPr lang="en-US" dirty="0"/>
-          </a:p>
-        </p:txBody>
-      </p:sp>
-      <p:sp>
-        <p:nvSpPr>
-          <p:cNvPr id="3" name="Title 2">
-            <a:extLst>
-              <a:ext uri="{FF2B5EF4-FFF2-40B4-BE49-F238E27FC236}">
-                <a16:creationId xmlns:a16="http://schemas.microsoft.com/office/drawing/2014/main" id="{5E571760-8D24-A9A5-82F5-42A12FE4F6CB}"/>
-              </a:ext>
-            </a:extLst>
-          </p:cNvPr>
-          <p:cNvSpPr>
-            <a:spLocks noGrp="1"/>
-          </p:cNvSpPr>
-          <p:nvPr>
-            <p:ph type="title"/>
-          </p:nvPr>
-        </p:nvSpPr>
-        <p:spPr/>
-        <p:txBody>
-          <a:bodyPr/>
-          <a:lstStyle/>
-          <a:p>
-            <a:r>
-              <a:rPr lang="en-US" dirty="0"/>
-              <a:t>ASRs From Business Goals</a:t>
+              <a:t>Some business goals may lead to quality attribute requirements, or lead directly to architectural decisions, or lead to non-architectural solutions.</a:t>
             </a:r>
           </a:p>
         </p:txBody>
@@ -4766,15 +4724,15 @@
           <p:cNvPr id="4" name="Slide Number Placeholder 3">
             <a:extLst>
               <a:ext uri="{FF2B5EF4-FFF2-40B4-BE49-F238E27FC236}">
-                <a16:creationId xmlns:a16="http://schemas.microsoft.com/office/drawing/2014/main" id="{7CDF4EBF-35FE-CB5E-8C2B-2566CF9A9F38}"/>
-              </a:ext>
-            </a:extLst>
-          </p:cNvPr>
-          <p:cNvSpPr>
-            <a:spLocks noGrp="1"/>
-          </p:cNvSpPr>
-          <p:nvPr>
-            <p:ph type="sldNum" sz="quarter" idx="10"/>
+                <a16:creationId xmlns:a16="http://schemas.microsoft.com/office/drawing/2014/main" id="{E8F8395D-C56D-DC81-415F-91C273815DC0}"/>
+              </a:ext>
+            </a:extLst>
+          </p:cNvPr>
+          <p:cNvSpPr>
+            <a:spLocks noGrp="1"/>
+          </p:cNvSpPr>
+          <p:nvPr>
+            <p:ph type="sldNum" sz="quarter" idx="13"/>
           </p:nvPr>
         </p:nvSpPr>
         <p:spPr/>
@@ -4794,7 +4752,7 @@
     </p:spTree>
     <p:extLst>
       <p:ext uri="{BB962C8B-B14F-4D97-AF65-F5344CB8AC3E}">
-        <p14:creationId xmlns:p14="http://schemas.microsoft.com/office/powerpoint/2010/main" val="1924475710"/>
+        <p14:creationId xmlns:p14="http://schemas.microsoft.com/office/powerpoint/2010/main" val="1506094575"/>
       </p:ext>
     </p:extLst>
   </p:cSld>
@@ -4826,7 +4784,7 @@
           <p:cNvPr id="2" name="Content Placeholder 1">
             <a:extLst>
               <a:ext uri="{FF2B5EF4-FFF2-40B4-BE49-F238E27FC236}">
-                <a16:creationId xmlns:a16="http://schemas.microsoft.com/office/drawing/2014/main" id="{6C5273C9-BBFE-188E-DF0B-550AA3A8423C}"/>
+                <a16:creationId xmlns:a16="http://schemas.microsoft.com/office/drawing/2014/main" id="{E5C3C5F0-F6EE-1966-183C-7953ECF7A17D}"/>
               </a:ext>
             </a:extLst>
           </p:cNvPr>
@@ -4842,93 +4800,46 @@
           <a:bodyPr/>
           <a:lstStyle/>
           <a:p>
-            <a:pPr lvl="1"/>
+            <a:r>
+              <a:rPr lang="en-US" dirty="0"/>
+              <a:t>Architects often become aware of an organization’s business and business goals via working, listening, talking, and soaking up the goals that are at work in an organization.</a:t>
+            </a:r>
+          </a:p>
+          <a:p>
+            <a:r>
+              <a:rPr lang="en-US" dirty="0"/>
+              <a:t>More systematic ways of determining such goals are both possible and desirable.</a:t>
+            </a:r>
+          </a:p>
+          <a:p>
+            <a:r>
+              <a:rPr lang="en-US" dirty="0"/>
+              <a:t>It is worthwhile to capture business goals explicitly, because they often imply ASRs that would otherwise go undetected until it is too late or too expensive to address them.</a:t>
+            </a:r>
+          </a:p>
+          <a:p>
+            <a:r>
+              <a:rPr lang="en-US" dirty="0"/>
+              <a:t>One way to do this is to employ the </a:t>
+            </a:r>
             <a:r>
               <a:rPr lang="en-US" dirty="0">
                 <a:solidFill>
-                  <a:schemeClr val="accent4">
-                    <a:lumMod val="50000"/>
-                  </a:schemeClr>
+                  <a:schemeClr val="accent1"/>
                 </a:solidFill>
               </a:rPr>
-              <a:t>Step 2: Identify potential QAs from business goals.</a:t>
-            </a:r>
-          </a:p>
-          <a:p>
-            <a:pPr lvl="2"/>
-            <a:r>
-              <a:rPr lang="en-US" dirty="0"/>
-              <a:t>For each important business goal scenario, have the participants describe a QA and response measure value that would help achieve the goal.</a:t>
-            </a:r>
-            <a:endParaRPr lang="en-US" dirty="0">
-              <a:solidFill>
-                <a:schemeClr val="accent4">
-                  <a:lumMod val="50000"/>
-                </a:schemeClr>
-              </a:solidFill>
-            </a:endParaRPr>
-          </a:p>
-          <a:p>
-            <a:r>
-              <a:rPr lang="en-US" dirty="0"/>
-              <a:t>Using of categories for asking the stakeholders about business goals in each category, some assurance of coverage is gained.</a:t>
-            </a:r>
-          </a:p>
-          <a:p>
-            <a:pPr lvl="1"/>
-            <a:r>
-              <a:rPr lang="en-US" dirty="0"/>
-              <a:t>Growth and continuity of the organization</a:t>
-            </a:r>
-          </a:p>
-          <a:p>
-            <a:pPr lvl="1"/>
-            <a:r>
-              <a:rPr lang="en-US" dirty="0"/>
-              <a:t>Meeting financial objectives</a:t>
-            </a:r>
-          </a:p>
-          <a:p>
-            <a:pPr lvl="1"/>
-            <a:r>
-              <a:rPr lang="en-US" dirty="0"/>
-              <a:t>Meeting personal objectives</a:t>
-            </a:r>
-          </a:p>
-          <a:p>
-            <a:pPr lvl="1"/>
-            <a:r>
-              <a:rPr lang="en-US" dirty="0"/>
-              <a:t>Meeting responsibility to the employees</a:t>
-            </a:r>
-          </a:p>
-          <a:p>
-            <a:pPr lvl="1"/>
-            <a:r>
-              <a:rPr lang="en-US" dirty="0"/>
-              <a:t>Meeting responsibility to society</a:t>
-            </a:r>
-          </a:p>
-          <a:p>
-            <a:pPr lvl="1"/>
-            <a:r>
-              <a:rPr lang="en-US" dirty="0"/>
-              <a:t>Meeting responsibility to the state</a:t>
-            </a:r>
-          </a:p>
-          <a:p>
-            <a:pPr lvl="1"/>
-            <a:r>
-              <a:rPr lang="en-US" dirty="0"/>
-              <a:t>Meeting responsibility to the shareholders</a:t>
-            </a:r>
-          </a:p>
-          <a:p>
-            <a:pPr lvl="1"/>
-            <a:r>
-              <a:rPr lang="en-US" dirty="0"/>
-              <a:t>…</a:t>
-            </a:r>
+              <a:t>PALM</a:t>
+            </a:r>
+            <a:r>
+              <a:rPr lang="en-US" dirty="0"/>
+              <a:t> method, which entails holding a workshop with the architect and key business stakeholders.</a:t>
+            </a:r>
+          </a:p>
+          <a:p>
+            <a:pPr lvl="1" indent="0">
+              <a:buNone/>
+            </a:pPr>
+            <a:endParaRPr lang="en-US" dirty="0"/>
           </a:p>
         </p:txBody>
       </p:sp>
@@ -4937,7 +4848,7 @@
           <p:cNvPr id="3" name="Title 2">
             <a:extLst>
               <a:ext uri="{FF2B5EF4-FFF2-40B4-BE49-F238E27FC236}">
-                <a16:creationId xmlns:a16="http://schemas.microsoft.com/office/drawing/2014/main" id="{9838E1F2-D5AA-D40B-C86D-4B23A493766D}"/>
+                <a16:creationId xmlns:a16="http://schemas.microsoft.com/office/drawing/2014/main" id="{5E571760-8D24-A9A5-82F5-42A12FE4F6CB}"/>
               </a:ext>
             </a:extLst>
           </p:cNvPr>
@@ -4965,7 +4876,7 @@
           <p:cNvPr id="4" name="Slide Number Placeholder 3">
             <a:extLst>
               <a:ext uri="{FF2B5EF4-FFF2-40B4-BE49-F238E27FC236}">
-                <a16:creationId xmlns:a16="http://schemas.microsoft.com/office/drawing/2014/main" id="{DC78484B-E629-602F-1257-2DC8031A0AFD}"/>
+                <a16:creationId xmlns:a16="http://schemas.microsoft.com/office/drawing/2014/main" id="{7CDF4EBF-35FE-CB5E-8C2B-2566CF9A9F38}"/>
               </a:ext>
             </a:extLst>
           </p:cNvPr>
@@ -4993,7 +4904,7 @@
     </p:spTree>
     <p:extLst>
       <p:ext uri="{BB962C8B-B14F-4D97-AF65-F5344CB8AC3E}">
-        <p14:creationId xmlns:p14="http://schemas.microsoft.com/office/powerpoint/2010/main" val="1377699281"/>
+        <p14:creationId xmlns:p14="http://schemas.microsoft.com/office/powerpoint/2010/main" val="1924475710"/>
       </p:ext>
     </p:extLst>
   </p:cSld>
@@ -5025,7 +4936,7 @@
           <p:cNvPr id="2" name="Content Placeholder 1">
             <a:extLst>
               <a:ext uri="{FF2B5EF4-FFF2-40B4-BE49-F238E27FC236}">
-                <a16:creationId xmlns:a16="http://schemas.microsoft.com/office/drawing/2014/main" id="{198F7037-2926-54BD-9FB8-984E5EABB6B8}"/>
+                <a16:creationId xmlns:a16="http://schemas.microsoft.com/office/drawing/2014/main" id="{C4277B6F-6AEC-BD92-388D-700D7F1FA00C}"/>
               </a:ext>
             </a:extLst>
           </p:cNvPr>
@@ -5042,79 +4953,77 @@
           <a:lstStyle/>
           <a:p>
             <a:r>
-              <a:rPr lang="en-US" dirty="0"/>
-              <a:t>Architects can use a construct called a </a:t>
-            </a:r>
-            <a:r>
               <a:rPr lang="en-US" dirty="0">
                 <a:solidFill>
                   <a:schemeClr val="accent1"/>
                 </a:solidFill>
               </a:rPr>
-              <a:t>utility tree</a:t>
-            </a:r>
-            <a:r>
-              <a:rPr lang="en-US" dirty="0"/>
-              <a:t> when the stakeholders are not available.</a:t>
+              <a:t>PALM</a:t>
+            </a:r>
+            <a:r>
+              <a:rPr lang="en-US" dirty="0"/>
+              <a:t> consists of these steps</a:t>
+            </a:r>
+          </a:p>
+          <a:p>
+            <a:r>
+              <a:rPr lang="en-US" dirty="0">
+                <a:solidFill>
+                  <a:schemeClr val="accent4">
+                    <a:lumMod val="50000"/>
+                  </a:schemeClr>
+                </a:solidFill>
+              </a:rPr>
+              <a:t>Step 1: </a:t>
+            </a:r>
+            <a:r>
+              <a:rPr lang="en-US" dirty="0"/>
+              <a:t>Business goals elicitation.</a:t>
             </a:r>
           </a:p>
           <a:p>
             <a:pPr lvl="1"/>
             <a:r>
               <a:rPr lang="en-US" dirty="0"/>
-              <a:t>Of course, the real world, it is often the case that you do not have access to stakeholders when you need them.</a:t>
-            </a:r>
-          </a:p>
-          <a:p>
-            <a:r>
-              <a:rPr lang="en-US" dirty="0"/>
-              <a:t>A utility tree begins with the word </a:t>
-            </a:r>
+              <a:t>Using the categories given later in this section to guide the discussion, capture from stakeholders the set of important business goals for this system.</a:t>
+            </a:r>
+          </a:p>
+          <a:p>
             <a:r>
               <a:rPr lang="en-US" dirty="0">
                 <a:solidFill>
-                  <a:schemeClr val="accent1"/>
+                  <a:schemeClr val="accent4">
+                    <a:lumMod val="50000"/>
+                  </a:schemeClr>
                 </a:solidFill>
               </a:rPr>
-              <a:t>Utility</a:t>
-            </a:r>
-            <a:r>
-              <a:rPr lang="en-US" dirty="0"/>
-              <a:t> as the root node. Utility is an expression of the overall </a:t>
-            </a:r>
-            <a:r>
-              <a:rPr lang="en-US" dirty="0">
-                <a:solidFill>
-                  <a:schemeClr val="accent1"/>
-                </a:solidFill>
-              </a:rPr>
-              <a:t>goodness</a:t>
-            </a:r>
-            <a:r>
-              <a:rPr lang="en-US" dirty="0"/>
-              <a:t> of the system.</a:t>
+              <a:t>Step 2: </a:t>
+            </a:r>
+            <a:r>
+              <a:rPr lang="en-US" dirty="0"/>
+              <a:t>Identify potential QAs from business goals.</a:t>
             </a:r>
           </a:p>
           <a:p>
             <a:pPr lvl="1"/>
             <a:r>
               <a:rPr lang="en-US" dirty="0"/>
-              <a:t>You then elaborate on this root node by listing the major QAs that the system is required to exhibit.</a:t>
-            </a:r>
+              <a:t>For each important business goal scenario, have the participants describe a QA and response measure value that would help achieve the goal.</a:t>
+            </a:r>
+            <a:endParaRPr lang="en-US" dirty="0">
+              <a:solidFill>
+                <a:schemeClr val="accent4">
+                  <a:lumMod val="50000"/>
+                </a:schemeClr>
+              </a:solidFill>
+            </a:endParaRPr>
           </a:p>
           <a:p>
             <a:pPr lvl="1"/>
-            <a:r>
-              <a:rPr lang="en-US" dirty="0"/>
-              <a:t>Under each QA, record specific refinements of that QA. For example, performance might be decomposed into “data latency” and “transaction throughput” or, alternatively, “user wait time” and “time to refresh web page”.</a:t>
-            </a:r>
-          </a:p>
-          <a:p>
-            <a:pPr lvl="1"/>
-            <a:r>
-              <a:rPr lang="en-US" dirty="0"/>
-              <a:t>Under each refinement, you can then record the specific ASRs, expressed as QA scenarios.</a:t>
-            </a:r>
+            <a:endParaRPr lang="en-US" dirty="0"/>
+          </a:p>
+          <a:p>
+            <a:endParaRPr lang="en-US" dirty="0"/>
           </a:p>
         </p:txBody>
       </p:sp>
@@ -5123,7 +5032,7 @@
           <p:cNvPr id="3" name="Title 2">
             <a:extLst>
               <a:ext uri="{FF2B5EF4-FFF2-40B4-BE49-F238E27FC236}">
-                <a16:creationId xmlns:a16="http://schemas.microsoft.com/office/drawing/2014/main" id="{99EA9F47-17D6-2E2D-6AD2-6A7275C0DB8B}"/>
+                <a16:creationId xmlns:a16="http://schemas.microsoft.com/office/drawing/2014/main" id="{11684526-7E8D-B5D3-D46B-67B2C3BFA26D}"/>
               </a:ext>
             </a:extLst>
           </p:cNvPr>
@@ -5141,7 +5050,7 @@
           <a:p>
             <a:r>
               <a:rPr lang="en-US" dirty="0"/>
-              <a:t>ASRs From Utility Tree</a:t>
+              <a:t>ASRs From Business Goals</a:t>
             </a:r>
           </a:p>
         </p:txBody>
@@ -5151,7 +5060,7 @@
           <p:cNvPr id="4" name="Slide Number Placeholder 3">
             <a:extLst>
               <a:ext uri="{FF2B5EF4-FFF2-40B4-BE49-F238E27FC236}">
-                <a16:creationId xmlns:a16="http://schemas.microsoft.com/office/drawing/2014/main" id="{AEF39BC4-452D-49B2-0461-273F15AD2731}"/>
+                <a16:creationId xmlns:a16="http://schemas.microsoft.com/office/drawing/2014/main" id="{05F32836-36B2-1F60-5388-E6FE576F3C38}"/>
               </a:ext>
             </a:extLst>
           </p:cNvPr>
@@ -5179,7 +5088,7 @@
     </p:spTree>
     <p:extLst>
       <p:ext uri="{BB962C8B-B14F-4D97-AF65-F5344CB8AC3E}">
-        <p14:creationId xmlns:p14="http://schemas.microsoft.com/office/powerpoint/2010/main" val="1177055747"/>
+        <p14:creationId xmlns:p14="http://schemas.microsoft.com/office/powerpoint/2010/main" val="707007644"/>
       </p:ext>
     </p:extLst>
   </p:cSld>
@@ -5297,7 +5206,7 @@
           <p:cNvPr id="2" name="Content Placeholder 1">
             <a:extLst>
               <a:ext uri="{FF2B5EF4-FFF2-40B4-BE49-F238E27FC236}">
-                <a16:creationId xmlns:a16="http://schemas.microsoft.com/office/drawing/2014/main" id="{2E13D1AD-93D5-5E30-0BAD-90458C673CBC}"/>
+                <a16:creationId xmlns:a16="http://schemas.microsoft.com/office/drawing/2014/main" id="{6C5273C9-BBFE-188E-DF0B-550AA3A8423C}"/>
               </a:ext>
             </a:extLst>
           </p:cNvPr>
@@ -5313,171 +5222,58 @@
           <a:bodyPr/>
           <a:lstStyle/>
           <a:p>
+            <a:r>
+              <a:rPr lang="en-US" dirty="0"/>
+              <a:t>Using of categories for asking the stakeholders about business goals in each category, some assurance of coverage is gained.</a:t>
+            </a:r>
+          </a:p>
+          <a:p>
             <a:pPr lvl="1"/>
             <a:r>
               <a:rPr lang="en-US" dirty="0"/>
-              <a:t>Once the ASRs are recorded as scenarios and placed at the leaves of the tree, you can evaluate these scenarios against two criteria:</a:t>
-            </a:r>
-          </a:p>
-          <a:p>
-            <a:pPr lvl="2"/>
-            <a:r>
-              <a:rPr lang="en-US" dirty="0"/>
-              <a:t>the business value of the candidate scenario </a:t>
-            </a:r>
-          </a:p>
-          <a:p>
-            <a:pPr lvl="2"/>
-            <a:r>
-              <a:rPr lang="en-US" dirty="0"/>
-              <a:t>the technical risk of achieving it</a:t>
+              <a:t>Growth and continuity of the organization</a:t>
             </a:r>
           </a:p>
           <a:p>
             <a:pPr lvl="1"/>
             <a:r>
               <a:rPr lang="en-US" dirty="0"/>
-              <a:t>You can use any scale you like, but we find that a simple “</a:t>
-            </a:r>
-            <a:r>
-              <a:rPr lang="en-US" dirty="0">
-                <a:solidFill>
-                  <a:schemeClr val="accent1"/>
-                </a:solidFill>
-              </a:rPr>
-              <a:t>H</a:t>
-            </a:r>
-            <a:r>
-              <a:rPr lang="en-US" dirty="0"/>
-              <a:t>” (high), “</a:t>
-            </a:r>
-            <a:r>
-              <a:rPr lang="en-US" dirty="0">
-                <a:solidFill>
-                  <a:schemeClr val="accent1"/>
-                </a:solidFill>
-              </a:rPr>
-              <a:t>M</a:t>
-            </a:r>
-            <a:r>
-              <a:rPr lang="en-US" dirty="0"/>
-              <a:t>” (medium), and “</a:t>
-            </a:r>
-            <a:r>
-              <a:rPr lang="en-US" dirty="0">
-                <a:solidFill>
-                  <a:schemeClr val="accent1"/>
-                </a:solidFill>
-              </a:rPr>
-              <a:t>L</a:t>
-            </a:r>
-            <a:r>
-              <a:rPr lang="en-US" dirty="0"/>
-              <a:t>” (low) scoring system suffices for each criterion.</a:t>
+              <a:t>Meeting financial objectives</a:t>
             </a:r>
           </a:p>
           <a:p>
             <a:pPr lvl="1"/>
             <a:r>
               <a:rPr lang="en-US" dirty="0"/>
-              <a:t>For business value</a:t>
-            </a:r>
-          </a:p>
-          <a:p>
-            <a:pPr lvl="2"/>
-            <a:r>
-              <a:rPr lang="en-US" dirty="0">
-                <a:solidFill>
-                  <a:schemeClr val="accent1"/>
-                </a:solidFill>
-              </a:rPr>
-              <a:t>high</a:t>
-            </a:r>
-            <a:r>
-              <a:rPr lang="en-US" dirty="0"/>
-              <a:t> designates a must-have requirement</a:t>
-            </a:r>
-          </a:p>
-          <a:p>
-            <a:pPr lvl="2"/>
-            <a:r>
-              <a:rPr lang="en-US" dirty="0">
-                <a:solidFill>
-                  <a:schemeClr val="accent1"/>
-                </a:solidFill>
-              </a:rPr>
-              <a:t>medium</a:t>
-            </a:r>
-            <a:r>
-              <a:rPr lang="en-US" dirty="0"/>
-              <a:t> means the requirement is important but would not lead to project failure were it omitted,</a:t>
-            </a:r>
-          </a:p>
-          <a:p>
-            <a:pPr lvl="2"/>
-            <a:r>
-              <a:rPr lang="en-US" dirty="0">
-                <a:solidFill>
-                  <a:schemeClr val="accent1"/>
-                </a:solidFill>
-              </a:rPr>
-              <a:t>low</a:t>
-            </a:r>
-            <a:r>
-              <a:rPr lang="en-US" dirty="0"/>
-              <a:t> describes a nice requirement to meet but not something worth much effort.</a:t>
+              <a:t>Meeting personal objectives</a:t>
             </a:r>
           </a:p>
           <a:p>
             <a:pPr lvl="1"/>
             <a:r>
               <a:rPr lang="en-US" dirty="0"/>
-              <a:t>For technical risk,</a:t>
-            </a:r>
-          </a:p>
-          <a:p>
-            <a:pPr lvl="2"/>
-            <a:r>
-              <a:rPr lang="en-US" dirty="0">
-                <a:solidFill>
-                  <a:schemeClr val="accent1"/>
-                </a:solidFill>
-              </a:rPr>
-              <a:t>high</a:t>
-            </a:r>
-            <a:r>
-              <a:rPr lang="en-US" dirty="0"/>
-              <a:t> means that meeting this ASR is keeping you awake at night</a:t>
-            </a:r>
-          </a:p>
-          <a:p>
-            <a:pPr lvl="2"/>
-            <a:r>
-              <a:rPr lang="en-US" dirty="0">
-                <a:solidFill>
-                  <a:schemeClr val="accent1"/>
-                </a:solidFill>
-              </a:rPr>
-              <a:t>medium</a:t>
-            </a:r>
-            <a:r>
-              <a:rPr lang="en-US" dirty="0"/>
-              <a:t> means meeting this ASR is concerning but does not carry a high risk </a:t>
-            </a:r>
-          </a:p>
-          <a:p>
-            <a:pPr lvl="2"/>
-            <a:r>
-              <a:rPr lang="en-US" dirty="0">
-                <a:solidFill>
-                  <a:schemeClr val="accent1"/>
-                </a:solidFill>
-              </a:rPr>
-              <a:t>low</a:t>
-            </a:r>
-            <a:r>
-              <a:rPr lang="en-US" dirty="0"/>
-              <a:t> means that you have confidence in your ability to meet this ASR.</a:t>
+              <a:t>Meeting responsibility to the employees</a:t>
+            </a:r>
+          </a:p>
+          <a:p>
+            <a:pPr lvl="1"/>
+            <a:r>
+              <a:rPr lang="en-US" dirty="0"/>
+              <a:t>Meeting responsibility to society</a:t>
+            </a:r>
+          </a:p>
+          <a:p>
+            <a:pPr lvl="1"/>
+            <a:r>
+              <a:rPr lang="en-US" dirty="0"/>
+              <a:t>Meeting responsibility to the state</a:t>
+            </a:r>
+          </a:p>
+          <a:p>
+            <a:pPr lvl="1"/>
+            <a:r>
+              <a:rPr lang="en-US" dirty="0"/>
+              <a:t>Meeting responsibility to the shareholders</a:t>
             </a:r>
           </a:p>
         </p:txBody>
@@ -5487,7 +5283,7 @@
           <p:cNvPr id="3" name="Title 2">
             <a:extLst>
               <a:ext uri="{FF2B5EF4-FFF2-40B4-BE49-F238E27FC236}">
-                <a16:creationId xmlns:a16="http://schemas.microsoft.com/office/drawing/2014/main" id="{261C51BF-D31F-61AC-E284-19B2FDA42F36}"/>
+                <a16:creationId xmlns:a16="http://schemas.microsoft.com/office/drawing/2014/main" id="{9838E1F2-D5AA-D40B-C86D-4B23A493766D}"/>
               </a:ext>
             </a:extLst>
           </p:cNvPr>
@@ -5505,7 +5301,7 @@
           <a:p>
             <a:r>
               <a:rPr lang="en-US" dirty="0"/>
-              <a:t>ASRs From Utility Tree</a:t>
+              <a:t>ASRs From Business Goals</a:t>
             </a:r>
           </a:p>
         </p:txBody>
@@ -5515,7 +5311,7 @@
           <p:cNvPr id="4" name="Slide Number Placeholder 3">
             <a:extLst>
               <a:ext uri="{FF2B5EF4-FFF2-40B4-BE49-F238E27FC236}">
-                <a16:creationId xmlns:a16="http://schemas.microsoft.com/office/drawing/2014/main" id="{06DD176A-F868-22EA-0397-8C08CDD5B3CB}"/>
+                <a16:creationId xmlns:a16="http://schemas.microsoft.com/office/drawing/2014/main" id="{DC78484B-E629-602F-1257-2DC8031A0AFD}"/>
               </a:ext>
             </a:extLst>
           </p:cNvPr>
@@ -5543,7 +5339,7 @@
     </p:spTree>
     <p:extLst>
       <p:ext uri="{BB962C8B-B14F-4D97-AF65-F5344CB8AC3E}">
-        <p14:creationId xmlns:p14="http://schemas.microsoft.com/office/powerpoint/2010/main" val="2936563643"/>
+        <p14:creationId xmlns:p14="http://schemas.microsoft.com/office/powerpoint/2010/main" val="1377699281"/>
       </p:ext>
     </p:extLst>
   </p:cSld>
@@ -5575,7 +5371,7 @@
           <p:cNvPr id="2" name="Content Placeholder 1">
             <a:extLst>
               <a:ext uri="{FF2B5EF4-FFF2-40B4-BE49-F238E27FC236}">
-                <a16:creationId xmlns:a16="http://schemas.microsoft.com/office/drawing/2014/main" id="{DCE1EC38-5EF7-715C-D8F2-5E9B86C3D27D}"/>
+                <a16:creationId xmlns:a16="http://schemas.microsoft.com/office/drawing/2014/main" id="{198F7037-2926-54BD-9FB8-984E5EABB6B8}"/>
               </a:ext>
             </a:extLst>
           </p:cNvPr>
@@ -5593,21 +5389,77 @@
           <a:p>
             <a:r>
               <a:rPr lang="en-US" dirty="0"/>
-              <a:t>Once you have a utility tree filled out, you can use it to make important checks. For instance:</a:t>
+              <a:t>Architects can use a construct called a </a:t>
+            </a:r>
+            <a:r>
+              <a:rPr lang="en-US" dirty="0">
+                <a:solidFill>
+                  <a:schemeClr val="accent1"/>
+                </a:solidFill>
+              </a:rPr>
+              <a:t>utility tree</a:t>
+            </a:r>
+            <a:r>
+              <a:rPr lang="en-US" dirty="0"/>
+              <a:t> when the stakeholders are not available.</a:t>
             </a:r>
           </a:p>
           <a:p>
             <a:pPr lvl="1"/>
             <a:r>
               <a:rPr lang="en-US" dirty="0"/>
-              <a:t>A QA or QA refinement without any ASR scenario is not necessarily an error but rather an indication that you should investigate whether there are unrecorded ASR scenarios in that area.</a:t>
+              <a:t>Of course, the real world, it is often the case that you do not have access to stakeholders when you need them.</a:t>
+            </a:r>
+          </a:p>
+          <a:p>
+            <a:r>
+              <a:rPr lang="en-US" dirty="0"/>
+              <a:t>A utility tree begins with the word </a:t>
+            </a:r>
+            <a:r>
+              <a:rPr lang="en-US" dirty="0">
+                <a:solidFill>
+                  <a:schemeClr val="accent1"/>
+                </a:solidFill>
+              </a:rPr>
+              <a:t>Utility</a:t>
+            </a:r>
+            <a:r>
+              <a:rPr lang="en-US" dirty="0"/>
+              <a:t> as the root node. Utility is an expression of the overall </a:t>
+            </a:r>
+            <a:r>
+              <a:rPr lang="en-US" dirty="0">
+                <a:solidFill>
+                  <a:schemeClr val="accent1"/>
+                </a:solidFill>
+              </a:rPr>
+              <a:t>goodness</a:t>
+            </a:r>
+            <a:r>
+              <a:rPr lang="en-US" dirty="0"/>
+              <a:t> of the system.</a:t>
             </a:r>
           </a:p>
           <a:p>
             <a:pPr lvl="1"/>
             <a:r>
               <a:rPr lang="en-US" dirty="0"/>
-              <a:t>ASR scenarios that receive a (H, H) rating are obviously the ones that deserve the most attention from you; these are the most significant of the significant requirements.</a:t>
+              <a:t>You then elaborate on this root node by listing the major QAs that the system is required to exhibit.</a:t>
+            </a:r>
+          </a:p>
+          <a:p>
+            <a:pPr lvl="1"/>
+            <a:r>
+              <a:rPr lang="en-US" dirty="0"/>
+              <a:t>Under each QA, record specific refinements of that QA. For example, performance might be decomposed into “data latency” and “transaction throughput” or, alternatively, “user wait time” and “time to refresh web page”.</a:t>
+            </a:r>
+          </a:p>
+          <a:p>
+            <a:pPr lvl="1"/>
+            <a:r>
+              <a:rPr lang="en-US" dirty="0"/>
+              <a:t>Under each refinement, you can then record the specific ASRs, expressed as QA scenarios.</a:t>
             </a:r>
           </a:p>
         </p:txBody>
@@ -5617,7 +5469,7 @@
           <p:cNvPr id="3" name="Title 2">
             <a:extLst>
               <a:ext uri="{FF2B5EF4-FFF2-40B4-BE49-F238E27FC236}">
-                <a16:creationId xmlns:a16="http://schemas.microsoft.com/office/drawing/2014/main" id="{442BA08A-1AA8-7349-C3B3-0F2DF0B121BD}"/>
+                <a16:creationId xmlns:a16="http://schemas.microsoft.com/office/drawing/2014/main" id="{99EA9F47-17D6-2E2D-6AD2-6A7275C0DB8B}"/>
               </a:ext>
             </a:extLst>
           </p:cNvPr>
@@ -5645,7 +5497,7 @@
           <p:cNvPr id="4" name="Slide Number Placeholder 3">
             <a:extLst>
               <a:ext uri="{FF2B5EF4-FFF2-40B4-BE49-F238E27FC236}">
-                <a16:creationId xmlns:a16="http://schemas.microsoft.com/office/drawing/2014/main" id="{BF86827B-3688-F3A4-A8F2-7BF3065B1F61}"/>
+                <a16:creationId xmlns:a16="http://schemas.microsoft.com/office/drawing/2014/main" id="{AEF39BC4-452D-49B2-0461-273F15AD2731}"/>
               </a:ext>
             </a:extLst>
           </p:cNvPr>
@@ -5673,7 +5525,7 @@
     </p:spTree>
     <p:extLst>
       <p:ext uri="{BB962C8B-B14F-4D97-AF65-F5344CB8AC3E}">
-        <p14:creationId xmlns:p14="http://schemas.microsoft.com/office/powerpoint/2010/main" val="659875520"/>
+        <p14:creationId xmlns:p14="http://schemas.microsoft.com/office/powerpoint/2010/main" val="1177055747"/>
       </p:ext>
     </p:extLst>
   </p:cSld>
@@ -5700,51 +5552,210 @@
           <a:chExt cx="0" cy="0"/>
         </a:xfrm>
       </p:grpSpPr>
-      <p:pic>
-        <p:nvPicPr>
-          <p:cNvPr id="6" name="Picture Placeholder 5">
-            <a:extLst>
-              <a:ext uri="{FF2B5EF4-FFF2-40B4-BE49-F238E27FC236}">
-                <a16:creationId xmlns:a16="http://schemas.microsoft.com/office/drawing/2014/main" id="{AAE71760-293D-330E-AB4B-F3BD5298953F}"/>
-              </a:ext>
-            </a:extLst>
-          </p:cNvPr>
-          <p:cNvPicPr>
-            <a:picLocks noGrp="1" noChangeAspect="1"/>
-          </p:cNvPicPr>
-          <p:nvPr>
-            <p:ph type="pic" sz="quarter" idx="11"/>
-          </p:nvPr>
-        </p:nvPicPr>
-        <p:blipFill>
-          <a:blip r:embed="rId2">
-            <a:extLst>
-              <a:ext uri="{28A0092B-C50C-407E-A947-70E740481C1C}">
-                <a14:useLocalDpi xmlns:a14="http://schemas.microsoft.com/office/drawing/2010/main" val="0"/>
-              </a:ext>
-            </a:extLst>
-          </a:blip>
-          <a:srcRect t="1804" b="1804"/>
-          <a:stretch>
-            <a:fillRect/>
-          </a:stretch>
-        </p:blipFill>
+      <p:sp>
+        <p:nvSpPr>
+          <p:cNvPr id="2" name="Content Placeholder 1">
+            <a:extLst>
+              <a:ext uri="{FF2B5EF4-FFF2-40B4-BE49-F238E27FC236}">
+                <a16:creationId xmlns:a16="http://schemas.microsoft.com/office/drawing/2014/main" id="{2E13D1AD-93D5-5E30-0BAD-90458C673CBC}"/>
+              </a:ext>
+            </a:extLst>
+          </p:cNvPr>
+          <p:cNvSpPr>
+            <a:spLocks noGrp="1"/>
+          </p:cNvSpPr>
+          <p:nvPr>
+            <p:ph sz="half" idx="2"/>
+          </p:nvPr>
+        </p:nvSpPr>
         <p:spPr/>
-      </p:pic>
-      <p:sp>
-        <p:nvSpPr>
-          <p:cNvPr id="3" name="Text Placeholder 2">
-            <a:extLst>
-              <a:ext uri="{FF2B5EF4-FFF2-40B4-BE49-F238E27FC236}">
-                <a16:creationId xmlns:a16="http://schemas.microsoft.com/office/drawing/2014/main" id="{A2529886-87A4-FB96-D218-3DD7E17EB452}"/>
-              </a:ext>
-            </a:extLst>
-          </p:cNvPr>
-          <p:cNvSpPr>
-            <a:spLocks noGrp="1"/>
-          </p:cNvSpPr>
-          <p:nvPr>
-            <p:ph type="body" sz="quarter" idx="12"/>
+        <p:txBody>
+          <a:bodyPr/>
+          <a:lstStyle/>
+          <a:p>
+            <a:pPr lvl="1"/>
+            <a:r>
+              <a:rPr lang="en-US" dirty="0"/>
+              <a:t>Once the ASRs are recorded as scenarios and placed at the leaves of the tree, you can evaluate these scenarios against two criteria:</a:t>
+            </a:r>
+          </a:p>
+          <a:p>
+            <a:pPr lvl="2"/>
+            <a:r>
+              <a:rPr lang="en-US" dirty="0"/>
+              <a:t>the business value of the candidate scenario </a:t>
+            </a:r>
+          </a:p>
+          <a:p>
+            <a:pPr lvl="2"/>
+            <a:r>
+              <a:rPr lang="en-US" dirty="0"/>
+              <a:t>the technical risk of achieving it</a:t>
+            </a:r>
+          </a:p>
+          <a:p>
+            <a:pPr lvl="1"/>
+            <a:r>
+              <a:rPr lang="en-US" dirty="0"/>
+              <a:t>You can use any scale you like, but we find that a simple “</a:t>
+            </a:r>
+            <a:r>
+              <a:rPr lang="en-US" dirty="0">
+                <a:solidFill>
+                  <a:schemeClr val="accent1"/>
+                </a:solidFill>
+              </a:rPr>
+              <a:t>H</a:t>
+            </a:r>
+            <a:r>
+              <a:rPr lang="en-US" dirty="0"/>
+              <a:t>” (high), “</a:t>
+            </a:r>
+            <a:r>
+              <a:rPr lang="en-US" dirty="0">
+                <a:solidFill>
+                  <a:schemeClr val="accent1"/>
+                </a:solidFill>
+              </a:rPr>
+              <a:t>M</a:t>
+            </a:r>
+            <a:r>
+              <a:rPr lang="en-US" dirty="0"/>
+              <a:t>” (medium), and “</a:t>
+            </a:r>
+            <a:r>
+              <a:rPr lang="en-US" dirty="0">
+                <a:solidFill>
+                  <a:schemeClr val="accent1"/>
+                </a:solidFill>
+              </a:rPr>
+              <a:t>L</a:t>
+            </a:r>
+            <a:r>
+              <a:rPr lang="en-US" dirty="0"/>
+              <a:t>” (low) scoring system suffices for each criterion.</a:t>
+            </a:r>
+          </a:p>
+          <a:p>
+            <a:pPr lvl="1"/>
+            <a:r>
+              <a:rPr lang="en-US" dirty="0"/>
+              <a:t>For business value</a:t>
+            </a:r>
+          </a:p>
+          <a:p>
+            <a:pPr lvl="2"/>
+            <a:r>
+              <a:rPr lang="en-US" dirty="0">
+                <a:solidFill>
+                  <a:schemeClr val="accent1"/>
+                </a:solidFill>
+              </a:rPr>
+              <a:t>high</a:t>
+            </a:r>
+            <a:r>
+              <a:rPr lang="en-US" dirty="0"/>
+              <a:t> designates a must-have requirement</a:t>
+            </a:r>
+          </a:p>
+          <a:p>
+            <a:pPr lvl="2"/>
+            <a:r>
+              <a:rPr lang="en-US" dirty="0">
+                <a:solidFill>
+                  <a:schemeClr val="accent1"/>
+                </a:solidFill>
+              </a:rPr>
+              <a:t>medium</a:t>
+            </a:r>
+            <a:r>
+              <a:rPr lang="en-US" dirty="0"/>
+              <a:t> means the requirement is important but would not lead to project failure were it omitted,</a:t>
+            </a:r>
+          </a:p>
+          <a:p>
+            <a:pPr lvl="2"/>
+            <a:r>
+              <a:rPr lang="en-US" dirty="0">
+                <a:solidFill>
+                  <a:schemeClr val="accent1"/>
+                </a:solidFill>
+              </a:rPr>
+              <a:t>low</a:t>
+            </a:r>
+            <a:r>
+              <a:rPr lang="en-US" dirty="0"/>
+              <a:t> describes a nice requirement to meet but not something worth much effort.</a:t>
+            </a:r>
+          </a:p>
+          <a:p>
+            <a:pPr lvl="1"/>
+            <a:r>
+              <a:rPr lang="en-US" dirty="0"/>
+              <a:t>For technical risk,</a:t>
+            </a:r>
+          </a:p>
+          <a:p>
+            <a:pPr lvl="2"/>
+            <a:r>
+              <a:rPr lang="en-US" dirty="0">
+                <a:solidFill>
+                  <a:schemeClr val="accent1"/>
+                </a:solidFill>
+              </a:rPr>
+              <a:t>high</a:t>
+            </a:r>
+            <a:r>
+              <a:rPr lang="en-US" dirty="0"/>
+              <a:t> means that meeting this ASR is keeping you awake at night</a:t>
+            </a:r>
+          </a:p>
+          <a:p>
+            <a:pPr lvl="2"/>
+            <a:r>
+              <a:rPr lang="en-US" dirty="0">
+                <a:solidFill>
+                  <a:schemeClr val="accent1"/>
+                </a:solidFill>
+              </a:rPr>
+              <a:t>medium</a:t>
+            </a:r>
+            <a:r>
+              <a:rPr lang="en-US" dirty="0"/>
+              <a:t> means meeting this ASR is concerning but does not carry a high risk </a:t>
+            </a:r>
+          </a:p>
+          <a:p>
+            <a:pPr lvl="2"/>
+            <a:r>
+              <a:rPr lang="en-US" dirty="0">
+                <a:solidFill>
+                  <a:schemeClr val="accent1"/>
+                </a:solidFill>
+              </a:rPr>
+              <a:t>low</a:t>
+            </a:r>
+            <a:r>
+              <a:rPr lang="en-US" dirty="0"/>
+              <a:t> means that you have confidence in your ability to meet this ASR.</a:t>
+            </a:r>
+          </a:p>
+        </p:txBody>
+      </p:sp>
+      <p:sp>
+        <p:nvSpPr>
+          <p:cNvPr id="3" name="Title 2">
+            <a:extLst>
+              <a:ext uri="{FF2B5EF4-FFF2-40B4-BE49-F238E27FC236}">
+                <a16:creationId xmlns:a16="http://schemas.microsoft.com/office/drawing/2014/main" id="{261C51BF-D31F-61AC-E284-19B2FDA42F36}"/>
+              </a:ext>
+            </a:extLst>
+          </p:cNvPr>
+          <p:cNvSpPr>
+            <a:spLocks noGrp="1"/>
+          </p:cNvSpPr>
+          <p:nvPr>
+            <p:ph type="title"/>
           </p:nvPr>
         </p:nvSpPr>
         <p:spPr/>
@@ -5754,7 +5765,7 @@
           <a:p>
             <a:r>
               <a:rPr lang="en-US" dirty="0"/>
-              <a:t>An example of tree Form of the Utility Tree</a:t>
+              <a:t>ASRs From Utility Tree</a:t>
             </a:r>
           </a:p>
         </p:txBody>
@@ -5764,15 +5775,15 @@
           <p:cNvPr id="4" name="Slide Number Placeholder 3">
             <a:extLst>
               <a:ext uri="{FF2B5EF4-FFF2-40B4-BE49-F238E27FC236}">
-                <a16:creationId xmlns:a16="http://schemas.microsoft.com/office/drawing/2014/main" id="{5F6FA6CF-231E-1074-F3D9-5BA21838ACE8}"/>
-              </a:ext>
-            </a:extLst>
-          </p:cNvPr>
-          <p:cNvSpPr>
-            <a:spLocks noGrp="1"/>
-          </p:cNvSpPr>
-          <p:nvPr>
-            <p:ph type="sldNum" sz="quarter" idx="13"/>
+                <a16:creationId xmlns:a16="http://schemas.microsoft.com/office/drawing/2014/main" id="{06DD176A-F868-22EA-0397-8C08CDD5B3CB}"/>
+              </a:ext>
+            </a:extLst>
+          </p:cNvPr>
+          <p:cNvSpPr>
+            <a:spLocks noGrp="1"/>
+          </p:cNvSpPr>
+          <p:nvPr>
+            <p:ph type="sldNum" sz="quarter" idx="10"/>
           </p:nvPr>
         </p:nvSpPr>
         <p:spPr/>
@@ -5792,7 +5803,7 @@
     </p:spTree>
     <p:extLst>
       <p:ext uri="{BB962C8B-B14F-4D97-AF65-F5344CB8AC3E}">
-        <p14:creationId xmlns:p14="http://schemas.microsoft.com/office/powerpoint/2010/main" val="19755220"/>
+        <p14:creationId xmlns:p14="http://schemas.microsoft.com/office/powerpoint/2010/main" val="2936563643"/>
       </p:ext>
     </p:extLst>
   </p:cSld>
@@ -5824,7 +5835,7 @@
           <p:cNvPr id="6" name="Picture Placeholder 5">
             <a:extLst>
               <a:ext uri="{FF2B5EF4-FFF2-40B4-BE49-F238E27FC236}">
-                <a16:creationId xmlns:a16="http://schemas.microsoft.com/office/drawing/2014/main" id="{8AAFBBE4-E28B-7CB1-A7FA-1851933F9FCB}"/>
+                <a16:creationId xmlns:a16="http://schemas.microsoft.com/office/drawing/2014/main" id="{AAE71760-293D-330E-AB4B-F3BD5298953F}"/>
               </a:ext>
             </a:extLst>
           </p:cNvPr>
@@ -5835,7 +5846,7 @@
             <p:ph type="pic" sz="quarter" idx="11"/>
           </p:nvPr>
         </p:nvPicPr>
-        <p:blipFill rotWithShape="1">
+        <p:blipFill>
           <a:blip r:embed="rId2">
             <a:extLst>
               <a:ext uri="{28A0092B-C50C-407E-A947-70E740481C1C}">
@@ -5843,22 +5854,19 @@
               </a:ext>
             </a:extLst>
           </a:blip>
-          <a:srcRect l="-38527" t="1339" r="-38527"/>
-          <a:stretch/>
+          <a:srcRect t="1804" b="1804"/>
+          <a:stretch>
+            <a:fillRect/>
+          </a:stretch>
         </p:blipFill>
-        <p:spPr>
-          <a:xfrm>
-            <a:off x="1226228" y="489334"/>
-            <a:ext cx="9740579" cy="5405717"/>
-          </a:xfrm>
-        </p:spPr>
+        <p:spPr/>
       </p:pic>
       <p:sp>
         <p:nvSpPr>
           <p:cNvPr id="3" name="Text Placeholder 2">
             <a:extLst>
               <a:ext uri="{FF2B5EF4-FFF2-40B4-BE49-F238E27FC236}">
-                <a16:creationId xmlns:a16="http://schemas.microsoft.com/office/drawing/2014/main" id="{744AA59E-6FA6-87E5-5D26-97B5DD59E17F}"/>
+                <a16:creationId xmlns:a16="http://schemas.microsoft.com/office/drawing/2014/main" id="{A2529886-87A4-FB96-D218-3DD7E17EB452}"/>
               </a:ext>
             </a:extLst>
           </p:cNvPr>
@@ -5869,19 +5877,14 @@
             <p:ph type="body" sz="quarter" idx="12"/>
           </p:nvPr>
         </p:nvSpPr>
-        <p:spPr>
-          <a:xfrm>
-            <a:off x="555625" y="5997388"/>
-            <a:ext cx="11036300" cy="564777"/>
-          </a:xfrm>
-        </p:spPr>
+        <p:spPr/>
         <p:txBody>
           <a:bodyPr/>
           <a:lstStyle/>
           <a:p>
             <a:r>
               <a:rPr lang="en-US" dirty="0"/>
-              <a:t>Tabular Form of the Utility Tree for a System in the Healthcare Space</a:t>
+              <a:t>An example of tree Form of the Utility Tree</a:t>
             </a:r>
           </a:p>
         </p:txBody>
@@ -5891,7 +5894,7 @@
           <p:cNvPr id="4" name="Slide Number Placeholder 3">
             <a:extLst>
               <a:ext uri="{FF2B5EF4-FFF2-40B4-BE49-F238E27FC236}">
-                <a16:creationId xmlns:a16="http://schemas.microsoft.com/office/drawing/2014/main" id="{194873B5-6D10-C2EA-CBB3-4D46C01AD8D7}"/>
+                <a16:creationId xmlns:a16="http://schemas.microsoft.com/office/drawing/2014/main" id="{5F6FA6CF-231E-1074-F3D9-5BA21838ACE8}"/>
               </a:ext>
             </a:extLst>
           </p:cNvPr>
@@ -5919,7 +5922,7 @@
     </p:spTree>
     <p:extLst>
       <p:ext uri="{BB962C8B-B14F-4D97-AF65-F5344CB8AC3E}">
-        <p14:creationId xmlns:p14="http://schemas.microsoft.com/office/powerpoint/2010/main" val="897258297"/>
+        <p14:creationId xmlns:p14="http://schemas.microsoft.com/office/powerpoint/2010/main" val="19755220"/>
       </p:ext>
     </p:extLst>
   </p:cSld>
@@ -5951,7 +5954,7 @@
           <p:cNvPr id="2" name="Content Placeholder 1">
             <a:extLst>
               <a:ext uri="{FF2B5EF4-FFF2-40B4-BE49-F238E27FC236}">
-                <a16:creationId xmlns:a16="http://schemas.microsoft.com/office/drawing/2014/main" id="{E939A8F6-495A-E355-8FE4-FCE17007979F}"/>
+                <a16:creationId xmlns:a16="http://schemas.microsoft.com/office/drawing/2014/main" id="{DCE1EC38-5EF7-715C-D8F2-5E9B86C3D27D}"/>
               </a:ext>
             </a:extLst>
           </p:cNvPr>
@@ -5969,37 +5972,21 @@
           <a:p>
             <a:r>
               <a:rPr lang="en-US" dirty="0"/>
-              <a:t>Requirements, whether captured or not, change all the time.</a:t>
-            </a:r>
-          </a:p>
-          <a:p>
-            <a:r>
-              <a:rPr lang="en-US" dirty="0"/>
-              <a:t>Architects have to adapt and keep up, to ensure that their architectures are still the right ones that will bring success to the project.</a:t>
-            </a:r>
-          </a:p>
-          <a:p>
-            <a:r>
-              <a:rPr lang="en-US" dirty="0"/>
-              <a:t>Always keep a channel open to the key stakeholders who determine the ASRs so you can keep up with changing requirements.</a:t>
-            </a:r>
-          </a:p>
-          <a:p>
-            <a:r>
-              <a:rPr lang="en-US" dirty="0"/>
-              <a:t>Even better than keeping up with change is staying one step ahead of it.</a:t>
-            </a:r>
-          </a:p>
-          <a:p>
-            <a:r>
-              <a:rPr lang="en-US" dirty="0"/>
-              <a:t>If you get wind of a change to the ASRs, you can take preliminary steps to design for it to understand the implications.</a:t>
-            </a:r>
-          </a:p>
-          <a:p>
-            <a:r>
-              <a:rPr lang="en-US" dirty="0"/>
-              <a:t>If the change will be prohibitively expensive, sharing that information with the stakeholders will be a valuable contribution, and the earlier they know it, the better.</a:t>
+              <a:t>Once you have a utility tree filled out, you can use it to make important checks. For instance:</a:t>
+            </a:r>
+          </a:p>
+          <a:p>
+            <a:pPr lvl="1"/>
+            <a:r>
+              <a:rPr lang="en-US" dirty="0"/>
+              <a:t>A QA or QA refinement without any ASR scenario is not necessarily an error but rather an indication that you should investigate whether there are unrecorded ASR scenarios in that area.</a:t>
+            </a:r>
+          </a:p>
+          <a:p>
+            <a:pPr lvl="1"/>
+            <a:r>
+              <a:rPr lang="en-US" dirty="0"/>
+              <a:t>ASR scenarios that receive a (H, H) rating are obviously the ones that deserve the most attention from you; these are the most significant of the significant requirements.</a:t>
             </a:r>
           </a:p>
         </p:txBody>
@@ -6009,7 +5996,7 @@
           <p:cNvPr id="3" name="Title 2">
             <a:extLst>
               <a:ext uri="{FF2B5EF4-FFF2-40B4-BE49-F238E27FC236}">
-                <a16:creationId xmlns:a16="http://schemas.microsoft.com/office/drawing/2014/main" id="{20D958EE-B50E-75EF-961A-ECC948F93F7F}"/>
+                <a16:creationId xmlns:a16="http://schemas.microsoft.com/office/drawing/2014/main" id="{442BA08A-1AA8-7349-C3B3-0F2DF0B121BD}"/>
               </a:ext>
             </a:extLst>
           </p:cNvPr>
@@ -6027,7 +6014,7 @@
           <a:p>
             <a:r>
               <a:rPr lang="en-US" dirty="0"/>
-              <a:t>Change Happens</a:t>
+              <a:t>ASRs From Utility Tree</a:t>
             </a:r>
           </a:p>
         </p:txBody>
@@ -6037,7 +6024,7 @@
           <p:cNvPr id="4" name="Slide Number Placeholder 3">
             <a:extLst>
               <a:ext uri="{FF2B5EF4-FFF2-40B4-BE49-F238E27FC236}">
-                <a16:creationId xmlns:a16="http://schemas.microsoft.com/office/drawing/2014/main" id="{8E96CA32-A3AF-F463-3141-6C12AC089173}"/>
+                <a16:creationId xmlns:a16="http://schemas.microsoft.com/office/drawing/2014/main" id="{BF86827B-3688-F3A4-A8F2-7BF3065B1F61}"/>
               </a:ext>
             </a:extLst>
           </p:cNvPr>
@@ -6065,7 +6052,7 @@
     </p:spTree>
     <p:extLst>
       <p:ext uri="{BB962C8B-B14F-4D97-AF65-F5344CB8AC3E}">
-        <p14:creationId xmlns:p14="http://schemas.microsoft.com/office/powerpoint/2010/main" val="1895953766"/>
+        <p14:creationId xmlns:p14="http://schemas.microsoft.com/office/powerpoint/2010/main" val="659875520"/>
       </p:ext>
     </p:extLst>
   </p:cSld>
@@ -6092,115 +6079,69 @@
           <a:chExt cx="0" cy="0"/>
         </a:xfrm>
       </p:grpSpPr>
-      <p:sp>
-        <p:nvSpPr>
-          <p:cNvPr id="2" name="Content Placeholder 1">
-            <a:extLst>
-              <a:ext uri="{FF2B5EF4-FFF2-40B4-BE49-F238E27FC236}">
-                <a16:creationId xmlns:a16="http://schemas.microsoft.com/office/drawing/2014/main" id="{0915A95B-2AB4-1738-FC05-2057F32B1407}"/>
-              </a:ext>
-            </a:extLst>
-          </p:cNvPr>
-          <p:cNvSpPr>
-            <a:spLocks noGrp="1"/>
-          </p:cNvSpPr>
-          <p:nvPr>
-            <p:ph sz="half" idx="2"/>
-          </p:nvPr>
-        </p:nvSpPr>
-        <p:spPr/>
+      <p:pic>
+        <p:nvPicPr>
+          <p:cNvPr id="6" name="Picture Placeholder 5">
+            <a:extLst>
+              <a:ext uri="{FF2B5EF4-FFF2-40B4-BE49-F238E27FC236}">
+                <a16:creationId xmlns:a16="http://schemas.microsoft.com/office/drawing/2014/main" id="{8AAFBBE4-E28B-7CB1-A7FA-1851933F9FCB}"/>
+              </a:ext>
+            </a:extLst>
+          </p:cNvPr>
+          <p:cNvPicPr>
+            <a:picLocks noGrp="1" noChangeAspect="1"/>
+          </p:cNvPicPr>
+          <p:nvPr>
+            <p:ph type="pic" sz="quarter" idx="11"/>
+          </p:nvPr>
+        </p:nvPicPr>
+        <p:blipFill rotWithShape="1">
+          <a:blip r:embed="rId2">
+            <a:extLst>
+              <a:ext uri="{28A0092B-C50C-407E-A947-70E740481C1C}">
+                <a14:useLocalDpi xmlns:a14="http://schemas.microsoft.com/office/drawing/2010/main" val="0"/>
+              </a:ext>
+            </a:extLst>
+          </a:blip>
+          <a:srcRect l="-38527" t="1339" r="-38527"/>
+          <a:stretch/>
+        </p:blipFill>
+        <p:spPr>
+          <a:xfrm>
+            <a:off x="1226228" y="489334"/>
+            <a:ext cx="9740579" cy="5405717"/>
+          </a:xfrm>
+        </p:spPr>
+      </p:pic>
+      <p:sp>
+        <p:nvSpPr>
+          <p:cNvPr id="3" name="Text Placeholder 2">
+            <a:extLst>
+              <a:ext uri="{FF2B5EF4-FFF2-40B4-BE49-F238E27FC236}">
+                <a16:creationId xmlns:a16="http://schemas.microsoft.com/office/drawing/2014/main" id="{744AA59E-6FA6-87E5-5D26-97B5DD59E17F}"/>
+              </a:ext>
+            </a:extLst>
+          </p:cNvPr>
+          <p:cNvSpPr>
+            <a:spLocks noGrp="1"/>
+          </p:cNvSpPr>
+          <p:nvPr>
+            <p:ph type="body" sz="quarter" idx="12"/>
+          </p:nvPr>
+        </p:nvSpPr>
+        <p:spPr>
+          <a:xfrm>
+            <a:off x="555625" y="5997388"/>
+            <a:ext cx="11036300" cy="564777"/>
+          </a:xfrm>
+        </p:spPr>
         <p:txBody>
           <a:bodyPr/>
           <a:lstStyle/>
           <a:p>
             <a:r>
               <a:rPr lang="en-US" dirty="0"/>
-              <a:t>Architectures are driven by architecturally significant requirements: requirements that will have profound effects on the architecture. </a:t>
-            </a:r>
-          </a:p>
-          <a:p>
-            <a:pPr lvl="1"/>
-            <a:r>
-              <a:rPr lang="en-US" dirty="0"/>
-              <a:t>Architecturally significant requirements may be captured from requirements documents, by interviewing stakeholders, or by conducting a Quality Attribute Workshop.</a:t>
-            </a:r>
-          </a:p>
-          <a:p>
-            <a:r>
-              <a:rPr lang="en-US" dirty="0"/>
-              <a:t>Be mindful of the business goals of the organization. </a:t>
-            </a:r>
-          </a:p>
-          <a:p>
-            <a:pPr lvl="1"/>
-            <a:r>
-              <a:rPr lang="en-US" dirty="0"/>
-              <a:t>Business goals can be expressed in a common, structured form and represented as scenarios. </a:t>
-            </a:r>
-          </a:p>
-          <a:p>
-            <a:pPr lvl="1"/>
-            <a:r>
-              <a:rPr lang="en-US" dirty="0"/>
-              <a:t>Business goals may be elicited and documented using a structured facilitation method called PALM.</a:t>
-            </a:r>
-          </a:p>
-          <a:p>
-            <a:r>
-              <a:rPr lang="en-US" dirty="0"/>
-              <a:t>A useful representation of quality attribute requirements is in a utility tree. </a:t>
-            </a:r>
-          </a:p>
-          <a:p>
-            <a:pPr lvl="1"/>
-            <a:r>
-              <a:rPr lang="en-US" dirty="0"/>
-              <a:t>The utility tree helps to capture these requirements in a structured form.</a:t>
-            </a:r>
-          </a:p>
-          <a:p>
-            <a:pPr lvl="1"/>
-            <a:r>
-              <a:rPr lang="en-US" dirty="0"/>
-              <a:t>Scenarios are prioritized.</a:t>
-            </a:r>
-          </a:p>
-          <a:p>
-            <a:pPr lvl="1"/>
-            <a:r>
-              <a:rPr lang="en-US" dirty="0"/>
-              <a:t>This prioritized set defines your “marching orders” as an architect.</a:t>
-            </a:r>
-          </a:p>
-          <a:p>
-            <a:endParaRPr lang="en-US" dirty="0"/>
-          </a:p>
-        </p:txBody>
-      </p:sp>
-      <p:sp>
-        <p:nvSpPr>
-          <p:cNvPr id="3" name="Title 2">
-            <a:extLst>
-              <a:ext uri="{FF2B5EF4-FFF2-40B4-BE49-F238E27FC236}">
-                <a16:creationId xmlns:a16="http://schemas.microsoft.com/office/drawing/2014/main" id="{9CE7D61F-EDDB-C36C-6C63-10317690C9F3}"/>
-              </a:ext>
-            </a:extLst>
-          </p:cNvPr>
-          <p:cNvSpPr>
-            <a:spLocks noGrp="1"/>
-          </p:cNvSpPr>
-          <p:nvPr>
-            <p:ph type="title"/>
-          </p:nvPr>
-        </p:nvSpPr>
-        <p:spPr/>
-        <p:txBody>
-          <a:bodyPr/>
-          <a:lstStyle/>
-          <a:p>
-            <a:r>
-              <a:rPr lang="en-US" dirty="0"/>
-              <a:t>Summary</a:t>
+              <a:t>Tabular Form of the Utility Tree for a System in the Healthcare Space</a:t>
             </a:r>
           </a:p>
         </p:txBody>
@@ -6210,15 +6151,15 @@
           <p:cNvPr id="4" name="Slide Number Placeholder 3">
             <a:extLst>
               <a:ext uri="{FF2B5EF4-FFF2-40B4-BE49-F238E27FC236}">
-                <a16:creationId xmlns:a16="http://schemas.microsoft.com/office/drawing/2014/main" id="{672C22DB-C4CB-3974-E7B1-4E6A19405B71}"/>
-              </a:ext>
-            </a:extLst>
-          </p:cNvPr>
-          <p:cNvSpPr>
-            <a:spLocks noGrp="1"/>
-          </p:cNvSpPr>
-          <p:nvPr>
-            <p:ph type="sldNum" sz="quarter" idx="10"/>
+                <a16:creationId xmlns:a16="http://schemas.microsoft.com/office/drawing/2014/main" id="{194873B5-6D10-C2EA-CBB3-4D46C01AD8D7}"/>
+              </a:ext>
+            </a:extLst>
+          </p:cNvPr>
+          <p:cNvSpPr>
+            <a:spLocks noGrp="1"/>
+          </p:cNvSpPr>
+          <p:nvPr>
+            <p:ph type="sldNum" sz="quarter" idx="13"/>
           </p:nvPr>
         </p:nvSpPr>
         <p:spPr/>
@@ -6230,6 +6171,325 @@
               <a:rPr lang="en-US" smtClean="0"/>
               <a:pPr/>
               <a:t>25</a:t>
+            </a:fld>
+            <a:endParaRPr lang="en-US" dirty="0"/>
+          </a:p>
+        </p:txBody>
+      </p:sp>
+    </p:spTree>
+    <p:extLst>
+      <p:ext uri="{BB962C8B-B14F-4D97-AF65-F5344CB8AC3E}">
+        <p14:creationId xmlns:p14="http://schemas.microsoft.com/office/powerpoint/2010/main" val="897258297"/>
+      </p:ext>
+    </p:extLst>
+  </p:cSld>
+  <p:clrMapOvr>
+    <a:masterClrMapping/>
+  </p:clrMapOvr>
+</p:sld>
+</file>
+
+<file path=ppt/slides/slide26.xml><?xml version="1.0" encoding="utf-8"?>
+<p:sld xmlns:a="http://schemas.openxmlformats.org/drawingml/2006/main" xmlns:r="http://schemas.openxmlformats.org/officeDocument/2006/relationships" xmlns:p="http://schemas.openxmlformats.org/presentationml/2006/main">
+  <p:cSld>
+    <p:spTree>
+      <p:nvGrpSpPr>
+        <p:cNvPr id="1" name=""/>
+        <p:cNvGrpSpPr/>
+        <p:nvPr/>
+      </p:nvGrpSpPr>
+      <p:grpSpPr>
+        <a:xfrm>
+          <a:off x="0" y="0"/>
+          <a:ext cx="0" cy="0"/>
+          <a:chOff x="0" y="0"/>
+          <a:chExt cx="0" cy="0"/>
+        </a:xfrm>
+      </p:grpSpPr>
+      <p:sp>
+        <p:nvSpPr>
+          <p:cNvPr id="2" name="Content Placeholder 1">
+            <a:extLst>
+              <a:ext uri="{FF2B5EF4-FFF2-40B4-BE49-F238E27FC236}">
+                <a16:creationId xmlns:a16="http://schemas.microsoft.com/office/drawing/2014/main" id="{E939A8F6-495A-E355-8FE4-FCE17007979F}"/>
+              </a:ext>
+            </a:extLst>
+          </p:cNvPr>
+          <p:cNvSpPr>
+            <a:spLocks noGrp="1"/>
+          </p:cNvSpPr>
+          <p:nvPr>
+            <p:ph sz="half" idx="2"/>
+          </p:nvPr>
+        </p:nvSpPr>
+        <p:spPr/>
+        <p:txBody>
+          <a:bodyPr/>
+          <a:lstStyle/>
+          <a:p>
+            <a:r>
+              <a:rPr lang="en-US" dirty="0"/>
+              <a:t>Requirements, whether captured or not, change all the time.</a:t>
+            </a:r>
+          </a:p>
+          <a:p>
+            <a:r>
+              <a:rPr lang="en-US" dirty="0"/>
+              <a:t>Architects have to adapt and keep up, to ensure that their architectures are still the right ones that will bring success to the project.</a:t>
+            </a:r>
+          </a:p>
+          <a:p>
+            <a:r>
+              <a:rPr lang="en-US" dirty="0"/>
+              <a:t>Always keep a channel open to the key stakeholders who determine the ASRs so you can keep up with changing requirements.</a:t>
+            </a:r>
+          </a:p>
+          <a:p>
+            <a:r>
+              <a:rPr lang="en-US" dirty="0"/>
+              <a:t>Even better than keeping up with change is staying one step ahead of it.</a:t>
+            </a:r>
+          </a:p>
+          <a:p>
+            <a:r>
+              <a:rPr lang="en-US" dirty="0"/>
+              <a:t>If you get wind of a change to the ASRs, you can take preliminary steps to design for it to understand the implications.</a:t>
+            </a:r>
+          </a:p>
+          <a:p>
+            <a:r>
+              <a:rPr lang="en-US" dirty="0"/>
+              <a:t>If the change will be prohibitively expensive, sharing that information with the stakeholders will be a valuable contribution, and the earlier they know it, the better.</a:t>
+            </a:r>
+          </a:p>
+        </p:txBody>
+      </p:sp>
+      <p:sp>
+        <p:nvSpPr>
+          <p:cNvPr id="3" name="Title 2">
+            <a:extLst>
+              <a:ext uri="{FF2B5EF4-FFF2-40B4-BE49-F238E27FC236}">
+                <a16:creationId xmlns:a16="http://schemas.microsoft.com/office/drawing/2014/main" id="{20D958EE-B50E-75EF-961A-ECC948F93F7F}"/>
+              </a:ext>
+            </a:extLst>
+          </p:cNvPr>
+          <p:cNvSpPr>
+            <a:spLocks noGrp="1"/>
+          </p:cNvSpPr>
+          <p:nvPr>
+            <p:ph type="title"/>
+          </p:nvPr>
+        </p:nvSpPr>
+        <p:spPr/>
+        <p:txBody>
+          <a:bodyPr/>
+          <a:lstStyle/>
+          <a:p>
+            <a:r>
+              <a:rPr lang="en-US" dirty="0"/>
+              <a:t>Change Happens</a:t>
+            </a:r>
+          </a:p>
+        </p:txBody>
+      </p:sp>
+      <p:sp>
+        <p:nvSpPr>
+          <p:cNvPr id="4" name="Slide Number Placeholder 3">
+            <a:extLst>
+              <a:ext uri="{FF2B5EF4-FFF2-40B4-BE49-F238E27FC236}">
+                <a16:creationId xmlns:a16="http://schemas.microsoft.com/office/drawing/2014/main" id="{8E96CA32-A3AF-F463-3141-6C12AC089173}"/>
+              </a:ext>
+            </a:extLst>
+          </p:cNvPr>
+          <p:cNvSpPr>
+            <a:spLocks noGrp="1"/>
+          </p:cNvSpPr>
+          <p:nvPr>
+            <p:ph type="sldNum" sz="quarter" idx="10"/>
+          </p:nvPr>
+        </p:nvSpPr>
+        <p:spPr/>
+        <p:txBody>
+          <a:bodyPr/>
+          <a:lstStyle/>
+          <a:p>
+            <a:fld id="{AE311D09-C3D9-45E8-99CE-78E12234EEAD}" type="slidenum">
+              <a:rPr lang="en-US" smtClean="0"/>
+              <a:pPr/>
+              <a:t>26</a:t>
+            </a:fld>
+            <a:endParaRPr lang="en-US" dirty="0"/>
+          </a:p>
+        </p:txBody>
+      </p:sp>
+    </p:spTree>
+    <p:extLst>
+      <p:ext uri="{BB962C8B-B14F-4D97-AF65-F5344CB8AC3E}">
+        <p14:creationId xmlns:p14="http://schemas.microsoft.com/office/powerpoint/2010/main" val="1895953766"/>
+      </p:ext>
+    </p:extLst>
+  </p:cSld>
+  <p:clrMapOvr>
+    <a:masterClrMapping/>
+  </p:clrMapOvr>
+</p:sld>
+</file>
+
+<file path=ppt/slides/slide27.xml><?xml version="1.0" encoding="utf-8"?>
+<p:sld xmlns:a="http://schemas.openxmlformats.org/drawingml/2006/main" xmlns:r="http://schemas.openxmlformats.org/officeDocument/2006/relationships" xmlns:p="http://schemas.openxmlformats.org/presentationml/2006/main">
+  <p:cSld>
+    <p:spTree>
+      <p:nvGrpSpPr>
+        <p:cNvPr id="1" name=""/>
+        <p:cNvGrpSpPr/>
+        <p:nvPr/>
+      </p:nvGrpSpPr>
+      <p:grpSpPr>
+        <a:xfrm>
+          <a:off x="0" y="0"/>
+          <a:ext cx="0" cy="0"/>
+          <a:chOff x="0" y="0"/>
+          <a:chExt cx="0" cy="0"/>
+        </a:xfrm>
+      </p:grpSpPr>
+      <p:sp>
+        <p:nvSpPr>
+          <p:cNvPr id="2" name="Content Placeholder 1">
+            <a:extLst>
+              <a:ext uri="{FF2B5EF4-FFF2-40B4-BE49-F238E27FC236}">
+                <a16:creationId xmlns:a16="http://schemas.microsoft.com/office/drawing/2014/main" id="{0915A95B-2AB4-1738-FC05-2057F32B1407}"/>
+              </a:ext>
+            </a:extLst>
+          </p:cNvPr>
+          <p:cNvSpPr>
+            <a:spLocks noGrp="1"/>
+          </p:cNvSpPr>
+          <p:nvPr>
+            <p:ph sz="half" idx="2"/>
+          </p:nvPr>
+        </p:nvSpPr>
+        <p:spPr/>
+        <p:txBody>
+          <a:bodyPr/>
+          <a:lstStyle/>
+          <a:p>
+            <a:r>
+              <a:rPr lang="en-US" dirty="0"/>
+              <a:t>Architectures are driven by architecturally significant requirements: requirements that will have profound effects on the architecture. </a:t>
+            </a:r>
+          </a:p>
+          <a:p>
+            <a:pPr lvl="1"/>
+            <a:r>
+              <a:rPr lang="en-US" dirty="0"/>
+              <a:t>Architecturally significant requirements may be captured from requirements documents, by interviewing stakeholders, or by conducting a Quality Attribute Workshop.</a:t>
+            </a:r>
+          </a:p>
+          <a:p>
+            <a:r>
+              <a:rPr lang="en-US" dirty="0"/>
+              <a:t>Be mindful of the business goals of the organization. </a:t>
+            </a:r>
+          </a:p>
+          <a:p>
+            <a:pPr lvl="1"/>
+            <a:r>
+              <a:rPr lang="en-US" dirty="0"/>
+              <a:t>Business goals can be expressed in a common, structured form and represented as scenarios. </a:t>
+            </a:r>
+          </a:p>
+          <a:p>
+            <a:pPr lvl="1"/>
+            <a:r>
+              <a:rPr lang="en-US" dirty="0"/>
+              <a:t>Business goals may be elicited and documented using a structured facilitation method called PALM.</a:t>
+            </a:r>
+          </a:p>
+          <a:p>
+            <a:r>
+              <a:rPr lang="en-US" dirty="0"/>
+              <a:t>A useful representation of quality attribute requirements is in a utility tree. </a:t>
+            </a:r>
+          </a:p>
+          <a:p>
+            <a:pPr lvl="1"/>
+            <a:r>
+              <a:rPr lang="en-US" dirty="0"/>
+              <a:t>The utility tree helps to capture these requirements in a structured form.</a:t>
+            </a:r>
+          </a:p>
+          <a:p>
+            <a:pPr lvl="1"/>
+            <a:r>
+              <a:rPr lang="en-US" dirty="0"/>
+              <a:t>Scenarios are prioritized.</a:t>
+            </a:r>
+          </a:p>
+          <a:p>
+            <a:pPr lvl="1"/>
+            <a:r>
+              <a:rPr lang="en-US" dirty="0"/>
+              <a:t>This prioritized set defines your “marching orders” as an architect.</a:t>
+            </a:r>
+          </a:p>
+          <a:p>
+            <a:endParaRPr lang="en-US" dirty="0"/>
+          </a:p>
+        </p:txBody>
+      </p:sp>
+      <p:sp>
+        <p:nvSpPr>
+          <p:cNvPr id="3" name="Title 2">
+            <a:extLst>
+              <a:ext uri="{FF2B5EF4-FFF2-40B4-BE49-F238E27FC236}">
+                <a16:creationId xmlns:a16="http://schemas.microsoft.com/office/drawing/2014/main" id="{9CE7D61F-EDDB-C36C-6C63-10317690C9F3}"/>
+              </a:ext>
+            </a:extLst>
+          </p:cNvPr>
+          <p:cNvSpPr>
+            <a:spLocks noGrp="1"/>
+          </p:cNvSpPr>
+          <p:nvPr>
+            <p:ph type="title"/>
+          </p:nvPr>
+        </p:nvSpPr>
+        <p:spPr/>
+        <p:txBody>
+          <a:bodyPr/>
+          <a:lstStyle/>
+          <a:p>
+            <a:r>
+              <a:rPr lang="en-US" dirty="0"/>
+              <a:t>Summary</a:t>
+            </a:r>
+          </a:p>
+        </p:txBody>
+      </p:sp>
+      <p:sp>
+        <p:nvSpPr>
+          <p:cNvPr id="4" name="Slide Number Placeholder 3">
+            <a:extLst>
+              <a:ext uri="{FF2B5EF4-FFF2-40B4-BE49-F238E27FC236}">
+                <a16:creationId xmlns:a16="http://schemas.microsoft.com/office/drawing/2014/main" id="{672C22DB-C4CB-3974-E7B1-4E6A19405B71}"/>
+              </a:ext>
+            </a:extLst>
+          </p:cNvPr>
+          <p:cNvSpPr>
+            <a:spLocks noGrp="1"/>
+          </p:cNvSpPr>
+          <p:nvPr>
+            <p:ph type="sldNum" sz="quarter" idx="10"/>
+          </p:nvPr>
+        </p:nvSpPr>
+        <p:spPr/>
+        <p:txBody>
+          <a:bodyPr/>
+          <a:lstStyle/>
+          <a:p>
+            <a:fld id="{AE311D09-C3D9-45E8-99CE-78E12234EEAD}" type="slidenum">
+              <a:rPr lang="en-US" smtClean="0"/>
+              <a:pPr/>
+              <a:t>27</a:t>
             </a:fld>
             <a:endParaRPr lang="en-US" dirty="0"/>
           </a:p>
@@ -6999,6 +7259,7 @@
             </a:r>
           </a:p>
           <a:p>
+            <a:pPr lvl="1"/>
             <a:r>
               <a:rPr lang="en-US" dirty="0"/>
               <a:t>As we’ve seen, architectures are mostly influenced by QA requirements. </a:t>
@@ -7012,26 +7273,49 @@
             </a:endParaRPr>
           </a:p>
           <a:p>
+            <a:pPr lvl="1"/>
             <a:r>
               <a:rPr lang="en-US" dirty="0"/>
               <a:t>The best software engineering practices do prescribe capturing QA requirements. </a:t>
             </a:r>
           </a:p>
           <a:p>
+            <a:pPr lvl="2"/>
+            <a:r>
+              <a:rPr lang="en-US" dirty="0"/>
+              <a:t>For example, the Software Engineering Body of Knowledge says that important QA requirements must be captured and they should be specified unambiguously and be testable.</a:t>
+            </a:r>
+          </a:p>
+          <a:p>
             <a:pPr lvl="1"/>
             <a:r>
               <a:rPr lang="en-US" dirty="0"/>
-              <a:t>For example, the Software Engineering Body of Knowledge says that important QA requirements must be captured and they should be specified unambiguously and be testable.</a:t>
-            </a:r>
-          </a:p>
-          <a:p>
-            <a:r>
-              <a:rPr lang="en-US" dirty="0"/>
               <a:t>But most requirements documents focus on the required features and functionality of a system, which shape the architecture the least.</a:t>
             </a:r>
           </a:p>
           <a:p>
             <a:pPr lvl="1"/>
+            <a:r>
+              <a:rPr lang="en-US" dirty="0"/>
+              <a:t>Quality attributes, even when captured, are often captured poorly.</a:t>
+            </a:r>
+          </a:p>
+          <a:p>
+            <a:pPr lvl="2"/>
+            <a:r>
+              <a:rPr lang="en-US" dirty="0"/>
+              <a:t>For example, “The system shall be modular”.</a:t>
+            </a:r>
+          </a:p>
+          <a:p>
+            <a:pPr lvl="2"/>
+            <a:r>
+              <a:rPr lang="en-US" dirty="0"/>
+              <a:t>This is not a useful requirement because it’s ambiguous and therefore not testable.</a:t>
+            </a:r>
+            <a:endParaRPr lang="en-US" b="1" dirty="0"/>
+          </a:p>
+          <a:p>
             <a:endParaRPr lang="en-US" b="1" dirty="0"/>
           </a:p>
         </p:txBody>
@@ -7124,12 +7408,43 @@
           <a:chExt cx="0" cy="0"/>
         </a:xfrm>
       </p:grpSpPr>
-      <p:sp>
-        <p:nvSpPr>
-          <p:cNvPr id="2" name="Content Placeholder 1">
-            <a:extLst>
-              <a:ext uri="{FF2B5EF4-FFF2-40B4-BE49-F238E27FC236}">
-                <a16:creationId xmlns:a16="http://schemas.microsoft.com/office/drawing/2014/main" id="{6737EABD-5BBA-D9AF-0BD6-CE56C421F5E3}"/>
+      <p:pic>
+        <p:nvPicPr>
+          <p:cNvPr id="8" name="Picture Placeholder 7">
+            <a:extLst>
+              <a:ext uri="{FF2B5EF4-FFF2-40B4-BE49-F238E27FC236}">
+                <a16:creationId xmlns:a16="http://schemas.microsoft.com/office/drawing/2014/main" id="{FF07B4D5-C328-F2C4-77AE-DFB781AC4E71}"/>
+              </a:ext>
+            </a:extLst>
+          </p:cNvPr>
+          <p:cNvPicPr>
+            <a:picLocks noGrp="1" noChangeAspect="1"/>
+          </p:cNvPicPr>
+          <p:nvPr>
+            <p:ph type="pic" sz="quarter" idx="11"/>
+          </p:nvPr>
+        </p:nvPicPr>
+        <p:blipFill rotWithShape="1">
+          <a:blip r:embed="rId2">
+            <a:extLst>
+              <a:ext uri="{28A0092B-C50C-407E-A947-70E740481C1C}">
+                <a14:useLocalDpi xmlns:a14="http://schemas.microsoft.com/office/drawing/2010/main" val="0"/>
+              </a:ext>
+            </a:extLst>
+          </a:blip>
+          <a:srcRect l="-2741" r="-2741"/>
+          <a:stretch>
+            <a:fillRect/>
+          </a:stretch>
+        </p:blipFill>
+        <p:spPr/>
+      </p:pic>
+      <p:sp>
+        <p:nvSpPr>
+          <p:cNvPr id="3" name="Content Placeholder 2">
+            <a:extLst>
+              <a:ext uri="{FF2B5EF4-FFF2-40B4-BE49-F238E27FC236}">
+                <a16:creationId xmlns:a16="http://schemas.microsoft.com/office/drawing/2014/main" id="{3D3BA627-E6B3-3C8E-2B18-210962F9EA4D}"/>
               </a:ext>
             </a:extLst>
           </p:cNvPr>
@@ -7144,27 +7459,6 @@
         <p:txBody>
           <a:bodyPr/>
           <a:lstStyle/>
-          <a:p>
-            <a:r>
-              <a:rPr lang="en-US" dirty="0"/>
-              <a:t>Quality attributes, even when captured, are often captured poorly.</a:t>
-            </a:r>
-          </a:p>
-          <a:p>
-            <a:pPr lvl="1"/>
-            <a:r>
-              <a:rPr lang="en-US" dirty="0"/>
-              <a:t>For example, “The system shall be modular”.</a:t>
-            </a:r>
-          </a:p>
-          <a:p>
-            <a:pPr lvl="1"/>
-            <a:r>
-              <a:rPr lang="en-US" dirty="0"/>
-              <a:t>This is not a useful requirement because it’s ambiguous and therefore not testable.</a:t>
-            </a:r>
-            <a:endParaRPr lang="en-US" b="1" dirty="0"/>
-          </a:p>
           <a:p>
             <a:r>
               <a:rPr lang="en-US" b="1" dirty="0">
@@ -7196,26 +7490,62 @@
           </a:p>
           <a:p>
             <a:pPr lvl="1"/>
+            <a:endParaRPr lang="en-US" dirty="0"/>
+          </a:p>
+          <a:p>
+            <a:pPr lvl="1"/>
             <a:r>
               <a:rPr lang="en-US" dirty="0"/>
               <a:t>Stakeholders, the technical environment, and the organization itself all play a role in influencing architectures.</a:t>
             </a:r>
           </a:p>
           <a:p>
+            <a:endParaRPr lang="en-US" dirty="0"/>
+          </a:p>
+        </p:txBody>
+      </p:sp>
+      <p:sp>
+        <p:nvSpPr>
+          <p:cNvPr id="4" name="Content Placeholder 3">
+            <a:extLst>
+              <a:ext uri="{FF2B5EF4-FFF2-40B4-BE49-F238E27FC236}">
+                <a16:creationId xmlns:a16="http://schemas.microsoft.com/office/drawing/2014/main" id="{62279707-2023-C098-848C-3C23861B5905}"/>
+              </a:ext>
+            </a:extLst>
+          </p:cNvPr>
+          <p:cNvSpPr>
+            <a:spLocks noGrp="1"/>
+          </p:cNvSpPr>
+          <p:nvPr>
+            <p:ph sz="half" idx="12"/>
+          </p:nvPr>
+        </p:nvSpPr>
+        <p:spPr/>
+        <p:txBody>
+          <a:bodyPr/>
+          <a:lstStyle/>
+          <a:p>
             <a:pPr lvl="1"/>
+            <a:endParaRPr lang="en-US" dirty="0"/>
+          </a:p>
+          <a:p>
+            <a:pPr lvl="1"/>
             <a:r>
               <a:rPr lang="en-US" dirty="0"/>
               <a:t>For example, you will rarely see a requirements document that describes teaming assumptions.</a:t>
             </a:r>
           </a:p>
-        </p:txBody>
-      </p:sp>
-      <p:sp>
-        <p:nvSpPr>
-          <p:cNvPr id="3" name="Title 2">
-            <a:extLst>
-              <a:ext uri="{FF2B5EF4-FFF2-40B4-BE49-F238E27FC236}">
-                <a16:creationId xmlns:a16="http://schemas.microsoft.com/office/drawing/2014/main" id="{FF241E29-49A2-9228-8DDF-405036ABB6C3}"/>
+          <a:p>
+            <a:endParaRPr lang="en-US" dirty="0"/>
+          </a:p>
+        </p:txBody>
+      </p:sp>
+      <p:sp>
+        <p:nvSpPr>
+          <p:cNvPr id="5" name="Title 4">
+            <a:extLst>
+              <a:ext uri="{FF2B5EF4-FFF2-40B4-BE49-F238E27FC236}">
+                <a16:creationId xmlns:a16="http://schemas.microsoft.com/office/drawing/2014/main" id="{1411739C-63A8-8250-7769-585EABAC7AE1}"/>
               </a:ext>
             </a:extLst>
           </p:cNvPr>
@@ -7240,18 +7570,18 @@
       </p:sp>
       <p:sp>
         <p:nvSpPr>
-          <p:cNvPr id="4" name="Slide Number Placeholder 3">
-            <a:extLst>
-              <a:ext uri="{FF2B5EF4-FFF2-40B4-BE49-F238E27FC236}">
-                <a16:creationId xmlns:a16="http://schemas.microsoft.com/office/drawing/2014/main" id="{2A5D2AD1-18EB-F728-9FB6-5D18ED6911CB}"/>
-              </a:ext>
-            </a:extLst>
-          </p:cNvPr>
-          <p:cNvSpPr>
-            <a:spLocks noGrp="1"/>
-          </p:cNvSpPr>
-          <p:nvPr>
-            <p:ph type="sldNum" sz="quarter" idx="10"/>
+          <p:cNvPr id="6" name="Slide Number Placeholder 5">
+            <a:extLst>
+              <a:ext uri="{FF2B5EF4-FFF2-40B4-BE49-F238E27FC236}">
+                <a16:creationId xmlns:a16="http://schemas.microsoft.com/office/drawing/2014/main" id="{7A7A9619-70E4-04AE-0C98-FDC80856BB3E}"/>
+              </a:ext>
+            </a:extLst>
+          </p:cNvPr>
+          <p:cNvSpPr>
+            <a:spLocks noGrp="1"/>
+          </p:cNvSpPr>
+          <p:nvPr>
+            <p:ph type="sldNum" sz="quarter" idx="13"/>
           </p:nvPr>
         </p:nvSpPr>
         <p:spPr/>
@@ -7271,7 +7601,7 @@
     </p:spTree>
     <p:extLst>
       <p:ext uri="{BB962C8B-B14F-4D97-AF65-F5344CB8AC3E}">
-        <p14:creationId xmlns:p14="http://schemas.microsoft.com/office/powerpoint/2010/main" val="1934064646"/>
+        <p14:creationId xmlns:p14="http://schemas.microsoft.com/office/powerpoint/2010/main" val="3817580651"/>
       </p:ext>
     </p:extLst>
   </p:cSld>
